--- a/SelfHelp-2026.pptx
+++ b/SelfHelp-2026.pptx
@@ -29,8 +29,6 @@
     <p:sldId id="314" r:id="rId17"/>
     <p:sldId id="315" r:id="rId18"/>
     <p:sldId id="316" r:id="rId19"/>
-    <p:sldId id="317" r:id="rId20"/>
-    <p:sldId id="310" r:id="rId21"/>
     <p:sldId id="300" r:id="rId22"/>
   </p:sldIdLst>
   <p:sldSz cx="9144000" cy="5143500" type="screen16x9"/>
@@ -724,151 +722,19 @@
           <a:lstStyle/>
           <a:p>
             <a:r>
-              <a:rPr lang="en-US" sz="1200" b="0" kern="1200" dirty="0">
-                <a:solidFill>
-                  <a:schemeClr val="tx1"/>
-                </a:solidFill>
-                <a:effectLst/>
-                <a:latin typeface="+mn-lt"/>
-                <a:ea typeface="+mn-ea"/>
-                <a:cs typeface="+mn-cs"/>
-              </a:rPr>
-              <a:t>Some of you may remember that we already presented </a:t>
-            </a:r>
-            <a:r>
-              <a:rPr lang="en-US" sz="1200" b="0" kern="1200" dirty="0" err="1">
-                <a:solidFill>
-                  <a:schemeClr val="tx1"/>
-                </a:solidFill>
-                <a:effectLst/>
-                <a:latin typeface="+mn-lt"/>
-                <a:ea typeface="+mn-ea"/>
-                <a:cs typeface="+mn-cs"/>
-              </a:rPr>
-              <a:t>SelfHelp</a:t>
-            </a:r>
-            <a:r>
-              <a:rPr lang="en-US" sz="1200" b="0" kern="1200" dirty="0">
-                <a:solidFill>
-                  <a:schemeClr val="tx1"/>
-                </a:solidFill>
-                <a:effectLst/>
-                <a:latin typeface="+mn-lt"/>
-                <a:ea typeface="+mn-ea"/>
-                <a:cs typeface="+mn-cs"/>
-              </a:rPr>
-              <a:t> here in 2021. For others, this may be the first introduction. In both cases, the interesting part today is to see how far the platform has evolved since then.</a:t>
-            </a:r>
-          </a:p>
-          <a:p>
-            <a:endParaRPr lang="en-US" sz="1200" b="0" kern="1200" dirty="0">
-              <a:solidFill>
-                <a:schemeClr val="tx1"/>
-              </a:solidFill>
-              <a:effectLst/>
-              <a:latin typeface="+mn-lt"/>
-              <a:ea typeface="+mn-ea"/>
-              <a:cs typeface="+mn-cs"/>
-            </a:endParaRPr>
-          </a:p>
-          <a:p>
-            <a:r>
-              <a:rPr lang="en-US" sz="1200" b="0" kern="1200" dirty="0" err="1">
-                <a:solidFill>
-                  <a:schemeClr val="tx1"/>
-                </a:solidFill>
-                <a:effectLst/>
-                <a:latin typeface="+mn-lt"/>
-                <a:ea typeface="+mn-ea"/>
-                <a:cs typeface="+mn-cs"/>
-              </a:rPr>
-              <a:t>SelfHelp</a:t>
-            </a:r>
-            <a:r>
-              <a:rPr lang="en-US" sz="1200" b="0" kern="1200" dirty="0">
-                <a:solidFill>
-                  <a:schemeClr val="tx1"/>
-                </a:solidFill>
-                <a:effectLst/>
-                <a:latin typeface="+mn-lt"/>
-                <a:ea typeface="+mn-ea"/>
-                <a:cs typeface="+mn-cs"/>
-              </a:rPr>
-              <a:t> is no longer just a website tool. It has become a platform for building and running digital programs.</a:t>
-            </a:r>
-          </a:p>
-          <a:p>
-            <a:endParaRPr lang="en-US" sz="1200" b="0" kern="1200" dirty="0">
-              <a:solidFill>
-                <a:schemeClr val="tx1"/>
-              </a:solidFill>
-              <a:effectLst/>
-              <a:latin typeface="+mn-lt"/>
-              <a:ea typeface="+mn-ea"/>
-              <a:cs typeface="+mn-cs"/>
-            </a:endParaRPr>
-          </a:p>
-          <a:p>
-            <a:r>
-              <a:rPr lang="en-US" sz="1200" b="0" kern="1200" dirty="0">
-                <a:solidFill>
-                  <a:schemeClr val="tx1"/>
-                </a:solidFill>
-                <a:effectLst/>
-                <a:latin typeface="+mn-lt"/>
-                <a:ea typeface="+mn-ea"/>
-                <a:cs typeface="+mn-cs"/>
-              </a:rPr>
-              <a:t>What makes it interesting is the combination. In one system, we can publish content, collect data, automate steps, support mobile use, and now add AI-supported interactions. That means we are not only creating pages. We are creating complete digital journeys.</a:t>
-            </a:r>
-          </a:p>
-          <a:p>
-            <a:endParaRPr lang="en-US" sz="1200" b="0" kern="1200" dirty="0">
-              <a:solidFill>
-                <a:schemeClr val="tx1"/>
-              </a:solidFill>
-              <a:effectLst/>
-              <a:latin typeface="+mn-lt"/>
-              <a:ea typeface="+mn-ea"/>
-              <a:cs typeface="+mn-cs"/>
-            </a:endParaRPr>
-          </a:p>
-          <a:p>
-            <a:r>
-              <a:rPr lang="en-US" sz="1200" b="0" kern="1200" dirty="0">
-                <a:solidFill>
-                  <a:schemeClr val="tx1"/>
-                </a:solidFill>
-                <a:effectLst/>
-                <a:latin typeface="+mn-lt"/>
-                <a:ea typeface="+mn-ea"/>
-                <a:cs typeface="+mn-cs"/>
-              </a:rPr>
-              <a:t>The point of this talk is to show that </a:t>
-            </a:r>
-            <a:r>
-              <a:rPr lang="en-US" sz="1200" b="0" kern="1200" dirty="0" err="1">
-                <a:solidFill>
-                  <a:schemeClr val="tx1"/>
-                </a:solidFill>
-                <a:effectLst/>
-                <a:latin typeface="+mn-lt"/>
-                <a:ea typeface="+mn-ea"/>
-                <a:cs typeface="+mn-cs"/>
-              </a:rPr>
-              <a:t>SelfHelp</a:t>
-            </a:r>
-            <a:r>
-              <a:rPr lang="en-US" sz="1200" b="0" kern="1200" dirty="0">
-                <a:solidFill>
-                  <a:schemeClr val="tx1"/>
-                </a:solidFill>
-                <a:effectLst/>
-                <a:latin typeface="+mn-lt"/>
-                <a:ea typeface="+mn-ea"/>
-                <a:cs typeface="+mn-cs"/>
-              </a:rPr>
-              <a:t> has matured in a very practical direction. It now supports the full path from onboarding and content delivery to assessment, follow-up, and intelligent interaction.</a:t>
+              <a:t>Some of you may remember that we already presented SelfHelp here in 2021. Today I want to reconnect to that earlier presentation and show what has changed since then.</a:t>
+            </a:r>
+          </a:p>
+          <a:p/>
+          <a:p>
+            <a:r>
+              <a:t>The main message is simple: SelfHelp is no longer just a website system. It has grown into a platform for complete digital programs.</a:t>
+            </a:r>
+          </a:p>
+          <a:p/>
+          <a:p>
+            <a:r>
+              <a:t>What I want to show today is how that happened. Instead of separate tools for pages, surveys, reminders, and mobile use, we can now think in terms of one connected program.</a:t>
             </a:r>
           </a:p>
         </p:txBody>
@@ -991,232 +857,25 @@
           <a:lstStyle/>
           <a:p>
             <a:r>
-              <a:rPr lang="en-US" sz="1200" b="0" kern="1200" dirty="0">
-                <a:solidFill>
-                  <a:schemeClr val="tx1"/>
-                </a:solidFill>
-                <a:effectLst/>
-                <a:latin typeface="+mn-lt"/>
-                <a:ea typeface="+mn-ea"/>
-                <a:cs typeface="+mn-cs"/>
-              </a:rPr>
-              <a:t>I would present this carefully and fairly. There is no need to pretend that </a:t>
-            </a:r>
-            <a:r>
-              <a:rPr lang="en-US" sz="1200" b="0" kern="1200" dirty="0" err="1">
-                <a:solidFill>
-                  <a:schemeClr val="tx1"/>
-                </a:solidFill>
-                <a:effectLst/>
-                <a:latin typeface="+mn-lt"/>
-                <a:ea typeface="+mn-ea"/>
-                <a:cs typeface="+mn-cs"/>
-              </a:rPr>
-              <a:t>SelfHelp</a:t>
-            </a:r>
-            <a:r>
-              <a:rPr lang="en-US" sz="1200" b="0" kern="1200" dirty="0">
-                <a:solidFill>
-                  <a:schemeClr val="tx1"/>
-                </a:solidFill>
-                <a:effectLst/>
-                <a:latin typeface="+mn-lt"/>
-                <a:ea typeface="+mn-ea"/>
-                <a:cs typeface="+mn-cs"/>
-              </a:rPr>
-              <a:t> replaces every other system in every scenario.</a:t>
-            </a:r>
-          </a:p>
-          <a:p>
-            <a:endParaRPr lang="en-US" sz="1200" b="0" kern="1200" dirty="0">
-              <a:solidFill>
-                <a:schemeClr val="tx1"/>
-              </a:solidFill>
-              <a:effectLst/>
-              <a:latin typeface="+mn-lt"/>
-              <a:ea typeface="+mn-ea"/>
-              <a:cs typeface="+mn-cs"/>
-            </a:endParaRPr>
-          </a:p>
-          <a:p>
-            <a:r>
-              <a:rPr lang="en-US" sz="1200" b="0" kern="1200" dirty="0" err="1">
-                <a:solidFill>
-                  <a:schemeClr val="tx1"/>
-                </a:solidFill>
-                <a:effectLst/>
-                <a:latin typeface="+mn-lt"/>
-                <a:ea typeface="+mn-ea"/>
-                <a:cs typeface="+mn-cs"/>
-              </a:rPr>
-              <a:t>LimeSurvey</a:t>
-            </a:r>
-            <a:r>
-              <a:rPr lang="en-US" sz="1200" b="0" kern="1200" dirty="0">
-                <a:solidFill>
-                  <a:schemeClr val="tx1"/>
-                </a:solidFill>
-                <a:effectLst/>
-                <a:latin typeface="+mn-lt"/>
-                <a:ea typeface="+mn-ea"/>
-                <a:cs typeface="+mn-cs"/>
-              </a:rPr>
-              <a:t> is a very strong open and self-hosted survey platform. If the only goal is questionnaire administration, it is a serious option. JATOS and </a:t>
-            </a:r>
-            <a:r>
-              <a:rPr lang="en-US" sz="1200" b="0" kern="1200" dirty="0" err="1">
-                <a:solidFill>
-                  <a:schemeClr val="tx1"/>
-                </a:solidFill>
-                <a:effectLst/>
-                <a:latin typeface="+mn-lt"/>
-                <a:ea typeface="+mn-ea"/>
-                <a:cs typeface="+mn-cs"/>
-              </a:rPr>
-              <a:t>Formr</a:t>
-            </a:r>
-            <a:r>
-              <a:rPr lang="en-US" sz="1200" b="0" kern="1200" dirty="0">
-                <a:solidFill>
-                  <a:schemeClr val="tx1"/>
-                </a:solidFill>
-                <a:effectLst/>
-                <a:latin typeface="+mn-lt"/>
-                <a:ea typeface="+mn-ea"/>
-                <a:cs typeface="+mn-cs"/>
-              </a:rPr>
-              <a:t> are also very relevant for online studies, especially for experiment delivery and longitudinal research logic. Moodle is well established for digital learning delivery.</a:t>
-            </a:r>
-            <a:br>
-              <a:rPr lang="en-US" sz="1200" b="0" kern="1200" dirty="0">
-                <a:solidFill>
-                  <a:schemeClr val="tx1"/>
-                </a:solidFill>
-                <a:effectLst/>
-                <a:latin typeface="+mn-lt"/>
-                <a:ea typeface="+mn-ea"/>
-                <a:cs typeface="+mn-cs"/>
-              </a:rPr>
-            </a:br>
-            <a:endParaRPr lang="en-US" sz="1200" b="0" kern="1200" dirty="0">
-              <a:solidFill>
-                <a:schemeClr val="tx1"/>
-              </a:solidFill>
-              <a:effectLst/>
-              <a:latin typeface="+mn-lt"/>
-              <a:ea typeface="+mn-ea"/>
-              <a:cs typeface="+mn-cs"/>
-            </a:endParaRPr>
-          </a:p>
-          <a:p>
-            <a:r>
-              <a:rPr lang="en-US" sz="1200" b="0" kern="1200" dirty="0">
-                <a:solidFill>
-                  <a:schemeClr val="tx1"/>
-                </a:solidFill>
-                <a:effectLst/>
-                <a:latin typeface="+mn-lt"/>
-                <a:ea typeface="+mn-ea"/>
-                <a:cs typeface="+mn-cs"/>
-              </a:rPr>
-              <a:t>But </a:t>
-            </a:r>
-            <a:r>
-              <a:rPr lang="en-US" sz="1200" b="0" kern="1200" dirty="0" err="1">
-                <a:solidFill>
-                  <a:schemeClr val="tx1"/>
-                </a:solidFill>
-                <a:effectLst/>
-                <a:latin typeface="+mn-lt"/>
-                <a:ea typeface="+mn-ea"/>
-                <a:cs typeface="+mn-cs"/>
-              </a:rPr>
-              <a:t>SelfHelp</a:t>
-            </a:r>
-            <a:r>
-              <a:rPr lang="en-US" sz="1200" b="0" kern="1200" dirty="0">
-                <a:solidFill>
-                  <a:schemeClr val="tx1"/>
-                </a:solidFill>
-                <a:effectLst/>
-                <a:latin typeface="+mn-lt"/>
-                <a:ea typeface="+mn-ea"/>
-                <a:cs typeface="+mn-cs"/>
-              </a:rPr>
-              <a:t> is solving a different problem. It is trying to unify several layers that are often split apart: content delivery, structured data collection, conditional logic, automation, mobile use, permissions, and now AI-supported interaction. That makes it closer to a digital program platform than to a single-category tool.</a:t>
-            </a:r>
-          </a:p>
-          <a:p>
-            <a:endParaRPr lang="en-US" sz="1200" b="0" kern="1200" dirty="0">
-              <a:solidFill>
-                <a:schemeClr val="tx1"/>
-              </a:solidFill>
-              <a:effectLst/>
-              <a:latin typeface="+mn-lt"/>
-              <a:ea typeface="+mn-ea"/>
-              <a:cs typeface="+mn-cs"/>
-            </a:endParaRPr>
-          </a:p>
-          <a:p>
-            <a:r>
-              <a:rPr lang="en-US" sz="1200" b="0" kern="1200" dirty="0">
-                <a:solidFill>
-                  <a:schemeClr val="tx1"/>
-                </a:solidFill>
-                <a:effectLst/>
-                <a:latin typeface="+mn-lt"/>
-                <a:ea typeface="+mn-ea"/>
-                <a:cs typeface="+mn-cs"/>
-              </a:rPr>
-              <a:t>So I would not say "</a:t>
-            </a:r>
-            <a:r>
-              <a:rPr lang="en-US" sz="1200" b="0" kern="1200" dirty="0" err="1">
-                <a:solidFill>
-                  <a:schemeClr val="tx1"/>
-                </a:solidFill>
-                <a:effectLst/>
-                <a:latin typeface="+mn-lt"/>
-                <a:ea typeface="+mn-ea"/>
-                <a:cs typeface="+mn-cs"/>
-              </a:rPr>
-              <a:t>SelfHelp</a:t>
-            </a:r>
-            <a:r>
-              <a:rPr lang="en-US" sz="1200" b="0" kern="1200" dirty="0">
-                <a:solidFill>
-                  <a:schemeClr val="tx1"/>
-                </a:solidFill>
-                <a:effectLst/>
-                <a:latin typeface="+mn-lt"/>
-                <a:ea typeface="+mn-ea"/>
-                <a:cs typeface="+mn-cs"/>
-              </a:rPr>
-              <a:t> is universally better." I would say: when an institution wants one locally controlled platform for digital programs that combine content, interaction, data, workflows, and AI, </a:t>
-            </a:r>
-            <a:r>
-              <a:rPr lang="en-US" sz="1200" b="0" kern="1200" dirty="0" err="1">
-                <a:solidFill>
-                  <a:schemeClr val="tx1"/>
-                </a:solidFill>
-                <a:effectLst/>
-                <a:latin typeface="+mn-lt"/>
-                <a:ea typeface="+mn-ea"/>
-                <a:cs typeface="+mn-cs"/>
-              </a:rPr>
-              <a:t>SelfHelp</a:t>
-            </a:r>
-            <a:r>
-              <a:rPr lang="en-US" sz="1200" b="0" kern="1200" dirty="0">
-                <a:solidFill>
-                  <a:schemeClr val="tx1"/>
-                </a:solidFill>
-                <a:effectLst/>
-                <a:latin typeface="+mn-lt"/>
-                <a:ea typeface="+mn-ea"/>
-                <a:cs typeface="+mn-cs"/>
-              </a:rPr>
-              <a:t> has a stronger overall fit than stitching together separate products.</a:t>
+              <a:t>Each of these tools is strong in its own domain.</a:t>
+            </a:r>
+          </a:p>
+          <a:p/>
+          <a:p>
+            <a:r>
+              <a:t>LimeSurvey is excellent when the main need is survey administration. JATOS and formr are strong choices for online studies and longitudinal research logic. Moodle is a mature platform for digital learning delivery.</a:t>
+            </a:r>
+          </a:p>
+          <a:p/>
+          <a:p>
+            <a:r>
+              <a:t>SelfHelp solves a different problem. It becomes strongest when content, data, workflows, mobile use, permissions, and AI all need to stay connected inside one locally controlled system.</a:t>
+            </a:r>
+          </a:p>
+          <a:p/>
+          <a:p>
+            <a:r>
+              <a:t>That is the difference between using separate tools and building one continuous digital program.</a:t>
             </a:r>
           </a:p>
         </p:txBody>
@@ -1351,100 +1010,37 @@
           <a:lstStyle/>
           <a:p>
             <a:r>
-              <a:rPr lang="en-US" sz="1200" b="0" kern="1200" dirty="0">
-                <a:solidFill>
-                  <a:schemeClr val="tx1"/>
-                </a:solidFill>
-                <a:effectLst/>
-                <a:latin typeface="+mn-lt"/>
-                <a:ea typeface="+mn-ea"/>
-                <a:cs typeface="+mn-cs"/>
-              </a:rPr>
-              <a:t>This slide should be framed as roadmap, not as a finished release.</a:t>
-            </a:r>
-          </a:p>
-          <a:p>
-            <a:endParaRPr lang="en-US" sz="1200" b="0" kern="1200" dirty="0">
-              <a:solidFill>
-                <a:schemeClr val="tx1"/>
-              </a:solidFill>
-              <a:effectLst/>
-              <a:latin typeface="+mn-lt"/>
-              <a:ea typeface="+mn-ea"/>
-              <a:cs typeface="+mn-cs"/>
-            </a:endParaRPr>
-          </a:p>
-          <a:p>
-            <a:r>
-              <a:rPr lang="en-US" sz="1200" b="0" kern="1200" dirty="0">
-                <a:solidFill>
-                  <a:schemeClr val="tx1"/>
-                </a:solidFill>
-                <a:effectLst/>
-                <a:latin typeface="+mn-lt"/>
-                <a:ea typeface="+mn-ea"/>
-                <a:cs typeface="+mn-cs"/>
-              </a:rPr>
-              <a:t>The important point is why a new version matters. The redesign is not only about modern technology. It is about making the platform's content model cleaner and more explicit. When pages, sections, and fields are represented through stable APIs and schemas, the whole system becomes easier to maintain, easier to extend, and easier to validate.</a:t>
-            </a:r>
-          </a:p>
-          <a:p>
-            <a:endParaRPr lang="en-US" sz="1200" b="0" kern="1200" dirty="0">
-              <a:solidFill>
-                <a:schemeClr val="tx1"/>
-              </a:solidFill>
-              <a:effectLst/>
-              <a:latin typeface="+mn-lt"/>
-              <a:ea typeface="+mn-ea"/>
-              <a:cs typeface="+mn-cs"/>
-            </a:endParaRPr>
-          </a:p>
-          <a:p>
-            <a:r>
-              <a:rPr lang="en-US" sz="1200" b="0" kern="1200" dirty="0">
-                <a:solidFill>
-                  <a:schemeClr val="tx1"/>
-                </a:solidFill>
-                <a:effectLst/>
-                <a:latin typeface="+mn-lt"/>
-                <a:ea typeface="+mn-ea"/>
-                <a:cs typeface="+mn-cs"/>
-              </a:rPr>
-              <a:t>That also unlocks the next major step: LLM-assisted content building. The idea is that an AI request could eventually return structured page context or page JSON, which the platform can then use in a controlled way. That is much more powerful than asking an LLM for plain text. It means AI could help generate actual platform content in the language the system understands.</a:t>
-            </a:r>
-            <a:br>
-              <a:rPr lang="en-US" sz="1200" b="0" kern="1200" dirty="0">
-                <a:solidFill>
-                  <a:schemeClr val="tx1"/>
-                </a:solidFill>
-                <a:effectLst/>
-                <a:latin typeface="+mn-lt"/>
-                <a:ea typeface="+mn-ea"/>
-                <a:cs typeface="+mn-cs"/>
-              </a:rPr>
-            </a:br>
-            <a:endParaRPr lang="en-US" sz="1200" b="0" kern="1200" dirty="0">
-              <a:solidFill>
-                <a:schemeClr val="tx1"/>
-              </a:solidFill>
-              <a:effectLst/>
-              <a:latin typeface="+mn-lt"/>
-              <a:ea typeface="+mn-ea"/>
-              <a:cs typeface="+mn-cs"/>
-            </a:endParaRPr>
-          </a:p>
-          <a:p>
-            <a:r>
-              <a:rPr lang="en-US" sz="1200" b="0" kern="1200" dirty="0">
-                <a:solidFill>
-                  <a:schemeClr val="tx1"/>
-                </a:solidFill>
-                <a:effectLst/>
-                <a:latin typeface="+mn-lt"/>
-                <a:ea typeface="+mn-ea"/>
-                <a:cs typeface="+mn-cs"/>
-              </a:rPr>
-              <a:t>That part is not finished yet, and I would say that clearly. But it is one of the strongest reasons the redesign is strategically important.</a:t>
+              <a:t>The summary is simple.</a:t>
+            </a:r>
+          </a:p>
+          <a:p/>
+          <a:p>
+            <a:r>
+              <a:t>SelfHelp gives one platform where content, assessments, workflows, mobile interaction, and AI can be part of the same program. That is already useful today.</a:t>
+            </a:r>
+          </a:p>
+          <a:p/>
+          <a:p>
+            <a:r>
+              <a:t>It also gives local control and room for future development. And that is where SelfHelp 2 becomes relevant. It is already in development, and I would say it is roughly seventy to eighty percent there. The point is not redesign for its own sake. The point is to make the platform more structured, easier to extend, and much faster to build with.</a:t>
+            </a:r>
+          </a:p>
+          <a:p/>
+          <a:p>
+            <a:r>
+              <a:t>One of the most interesting next steps is LLM-supported content creation. The idea is that the system can generate structured page content much faster, so teams can spend less time building website structure by hand and more time on the actual study design, content quality, and assessment logic.</a:t>
+            </a:r>
+          </a:p>
+          <a:p/>
+          <a:p>
+            <a:r>
+              <a:t>And one practical point at the end: if colleagues see value in this direction, especially in the local university AI infrastructure behind it, it would be very helpful to support the move from proof of concept to a permanent service. A short letter of support to ID could make a real difference there.</a:t>
+            </a:r>
+          </a:p>
+          <a:p/>
+          <a:p>
+            <a:r>
+              <a:t>The final point I would leave with is this: SelfHelp moves us from isolated digital tools to continuous digital programs.</a:t>
             </a:r>
           </a:p>
         </p:txBody>
@@ -1507,261 +1103,6 @@
     <p:extLst>
       <p:ext uri="{BB962C8B-B14F-4D97-AF65-F5344CB8AC3E}">
         <p14:creationId xmlns:p14="http://schemas.microsoft.com/office/powerpoint/2010/main" val="3881941530"/>
-      </p:ext>
-    </p:extLst>
-  </p:cSld>
-  <p:clrMapOvr>
-    <a:masterClrMapping/>
-  </p:clrMapOvr>
-</p:notes>
-</file>
-
-<file path=ppt/notesSlides/notesSlide12.xml><?xml version="1.0" encoding="utf-8"?>
-<p:notes xmlns:a="http://schemas.openxmlformats.org/drawingml/2006/main" xmlns:r="http://schemas.openxmlformats.org/officeDocument/2006/relationships" xmlns:p="http://schemas.openxmlformats.org/presentationml/2006/main">
-  <p:cSld>
-    <p:spTree>
-      <p:nvGrpSpPr>
-        <p:cNvPr id="1" name="">
-          <a:extLst>
-            <a:ext uri="{FF2B5EF4-FFF2-40B4-BE49-F238E27FC236}">
-              <a16:creationId xmlns:a16="http://schemas.microsoft.com/office/drawing/2014/main" id="{07B33046-5807-71EE-480F-0CEE14AA4169}"/>
-            </a:ext>
-          </a:extLst>
-        </p:cNvPr>
-        <p:cNvGrpSpPr/>
-        <p:nvPr/>
-      </p:nvGrpSpPr>
-      <p:grpSpPr>
-        <a:xfrm>
-          <a:off x="0" y="0"/>
-          <a:ext cx="0" cy="0"/>
-          <a:chOff x="0" y="0"/>
-          <a:chExt cx="0" cy="0"/>
-        </a:xfrm>
-      </p:grpSpPr>
-      <p:sp>
-        <p:nvSpPr>
-          <p:cNvPr id="2" name="Slide Image Placeholder 1">
-            <a:extLst>
-              <a:ext uri="{FF2B5EF4-FFF2-40B4-BE49-F238E27FC236}">
-                <a16:creationId xmlns:a16="http://schemas.microsoft.com/office/drawing/2014/main" id="{4B06B0E3-0773-5079-5F41-7BCC82BD4873}"/>
-              </a:ext>
-            </a:extLst>
-          </p:cNvPr>
-          <p:cNvSpPr>
-            <a:spLocks noGrp="1" noRot="1" noChangeAspect="1"/>
-          </p:cNvSpPr>
-          <p:nvPr>
-            <p:ph type="sldImg"/>
-          </p:nvPr>
-        </p:nvSpPr>
-        <p:spPr/>
-      </p:sp>
-      <p:sp>
-        <p:nvSpPr>
-          <p:cNvPr id="3" name="Notes Placeholder 2">
-            <a:extLst>
-              <a:ext uri="{FF2B5EF4-FFF2-40B4-BE49-F238E27FC236}">
-                <a16:creationId xmlns:a16="http://schemas.microsoft.com/office/drawing/2014/main" id="{00F3E4AF-D691-7BCD-8C93-32DA2F695320}"/>
-              </a:ext>
-            </a:extLst>
-          </p:cNvPr>
-          <p:cNvSpPr>
-            <a:spLocks noGrp="1"/>
-          </p:cNvSpPr>
-          <p:nvPr>
-            <p:ph type="body" idx="1"/>
-          </p:nvPr>
-        </p:nvSpPr>
-        <p:spPr/>
-        <p:txBody>
-          <a:bodyPr/>
-          <a:lstStyle/>
-          <a:p>
-            <a:r>
-              <a:rPr lang="en-US" sz="1200" b="0" kern="1200" dirty="0">
-                <a:solidFill>
-                  <a:schemeClr val="tx1"/>
-                </a:solidFill>
-                <a:effectLst/>
-                <a:latin typeface="+mn-lt"/>
-                <a:ea typeface="+mn-ea"/>
-                <a:cs typeface="+mn-cs"/>
-              </a:rPr>
-              <a:t>I would close with a calm and confident summary.</a:t>
-            </a:r>
-          </a:p>
-          <a:p>
-            <a:endParaRPr lang="en-US" sz="1200" b="0" kern="1200" dirty="0">
-              <a:solidFill>
-                <a:schemeClr val="tx1"/>
-              </a:solidFill>
-              <a:effectLst/>
-              <a:latin typeface="+mn-lt"/>
-              <a:ea typeface="+mn-ea"/>
-              <a:cs typeface="+mn-cs"/>
-            </a:endParaRPr>
-          </a:p>
-          <a:p>
-            <a:r>
-              <a:rPr lang="en-US" sz="1200" b="0" kern="1200" dirty="0" err="1">
-                <a:solidFill>
-                  <a:schemeClr val="tx1"/>
-                </a:solidFill>
-                <a:effectLst/>
-                <a:latin typeface="+mn-lt"/>
-                <a:ea typeface="+mn-ea"/>
-                <a:cs typeface="+mn-cs"/>
-              </a:rPr>
-              <a:t>SelfHelp</a:t>
-            </a:r>
-            <a:r>
-              <a:rPr lang="en-US" sz="1200" b="0" kern="1200" dirty="0">
-                <a:solidFill>
-                  <a:schemeClr val="tx1"/>
-                </a:solidFill>
-                <a:effectLst/>
-                <a:latin typeface="+mn-lt"/>
-                <a:ea typeface="+mn-ea"/>
-                <a:cs typeface="+mn-cs"/>
-              </a:rPr>
-              <a:t> is valuable because it already connects pieces that are usually scattered. It gives us one platform where content, assessments, workflows, mobile interaction, and AI can be part of the same program.</a:t>
-            </a:r>
-          </a:p>
-          <a:p>
-            <a:endParaRPr lang="en-US" sz="1200" b="0" kern="1200" dirty="0">
-              <a:solidFill>
-                <a:schemeClr val="tx1"/>
-              </a:solidFill>
-              <a:effectLst/>
-              <a:latin typeface="+mn-lt"/>
-              <a:ea typeface="+mn-ea"/>
-              <a:cs typeface="+mn-cs"/>
-            </a:endParaRPr>
-          </a:p>
-          <a:p>
-            <a:r>
-              <a:rPr lang="en-US" sz="1200" b="0" kern="1200" dirty="0">
-                <a:solidFill>
-                  <a:schemeClr val="tx1"/>
-                </a:solidFill>
-                <a:effectLst/>
-                <a:latin typeface="+mn-lt"/>
-                <a:ea typeface="+mn-ea"/>
-                <a:cs typeface="+mn-cs"/>
-              </a:rPr>
-              <a:t>The second point is that the platform is moving in the right direction. The current system is already capable. The next version is about making that capability easier to scale, easier to maintain, and easier to create with.</a:t>
-            </a:r>
-          </a:p>
-          <a:p>
-            <a:endParaRPr lang="en-US" sz="1200" b="0" kern="1200" dirty="0">
-              <a:solidFill>
-                <a:schemeClr val="tx1"/>
-              </a:solidFill>
-              <a:effectLst/>
-              <a:latin typeface="+mn-lt"/>
-              <a:ea typeface="+mn-ea"/>
-              <a:cs typeface="+mn-cs"/>
-            </a:endParaRPr>
-          </a:p>
-          <a:p>
-            <a:r>
-              <a:rPr lang="en-US" sz="1200" b="0" kern="1200" dirty="0">
-                <a:solidFill>
-                  <a:schemeClr val="tx1"/>
-                </a:solidFill>
-                <a:effectLst/>
-                <a:latin typeface="+mn-lt"/>
-                <a:ea typeface="+mn-ea"/>
-                <a:cs typeface="+mn-cs"/>
-              </a:rPr>
-              <a:t>If I had to end with one line, I would say this: </a:t>
-            </a:r>
-            <a:r>
-              <a:rPr lang="en-US" sz="1200" b="0" kern="1200" dirty="0" err="1">
-                <a:solidFill>
-                  <a:schemeClr val="tx1"/>
-                </a:solidFill>
-                <a:effectLst/>
-                <a:latin typeface="+mn-lt"/>
-                <a:ea typeface="+mn-ea"/>
-                <a:cs typeface="+mn-cs"/>
-              </a:rPr>
-              <a:t>SelfHelp</a:t>
-            </a:r>
-            <a:r>
-              <a:rPr lang="en-US" sz="1200" b="0" kern="1200" dirty="0">
-                <a:solidFill>
-                  <a:schemeClr val="tx1"/>
-                </a:solidFill>
-                <a:effectLst/>
-                <a:latin typeface="+mn-lt"/>
-                <a:ea typeface="+mn-ea"/>
-                <a:cs typeface="+mn-cs"/>
-              </a:rPr>
-              <a:t> is becoming a serious institutional foundation for digital programs, not just a collection of digital tools.</a:t>
-            </a:r>
-          </a:p>
-        </p:txBody>
-      </p:sp>
-      <p:sp>
-        <p:nvSpPr>
-          <p:cNvPr id="4" name="Footer Placeholder 3">
-            <a:extLst>
-              <a:ext uri="{FF2B5EF4-FFF2-40B4-BE49-F238E27FC236}">
-                <a16:creationId xmlns:a16="http://schemas.microsoft.com/office/drawing/2014/main" id="{918005B3-024A-B206-9F9A-6EC17209D951}"/>
-              </a:ext>
-            </a:extLst>
-          </p:cNvPr>
-          <p:cNvSpPr>
-            <a:spLocks noGrp="1"/>
-          </p:cNvSpPr>
-          <p:nvPr>
-            <p:ph type="ftr" sz="quarter" idx="4"/>
-          </p:nvPr>
-        </p:nvSpPr>
-        <p:spPr/>
-        <p:txBody>
-          <a:bodyPr/>
-          <a:lstStyle/>
-          <a:p>
-            <a:endParaRPr lang="de-CH" dirty="0"/>
-          </a:p>
-        </p:txBody>
-      </p:sp>
-      <p:sp>
-        <p:nvSpPr>
-          <p:cNvPr id="5" name="Slide Number Placeholder 4">
-            <a:extLst>
-              <a:ext uri="{FF2B5EF4-FFF2-40B4-BE49-F238E27FC236}">
-                <a16:creationId xmlns:a16="http://schemas.microsoft.com/office/drawing/2014/main" id="{636A39CA-5595-C1FE-30C9-F10A44D3E77E}"/>
-              </a:ext>
-            </a:extLst>
-          </p:cNvPr>
-          <p:cNvSpPr>
-            <a:spLocks noGrp="1"/>
-          </p:cNvSpPr>
-          <p:nvPr>
-            <p:ph type="sldNum" sz="quarter" idx="5"/>
-          </p:nvPr>
-        </p:nvSpPr>
-        <p:spPr/>
-        <p:txBody>
-          <a:bodyPr/>
-          <a:lstStyle/>
-          <a:p>
-            <a:fld id="{B2B24C57-7758-4EF8-8A0E-FE171C8C1817}" type="slidenum">
-              <a:rPr lang="de-CH" smtClean="0"/>
-              <a:t>13</a:t>
-            </a:fld>
-            <a:endParaRPr lang="de-CH" dirty="0"/>
-          </a:p>
-        </p:txBody>
-      </p:sp>
-    </p:spTree>
-    <p:extLst>
-      <p:ext uri="{BB962C8B-B14F-4D97-AF65-F5344CB8AC3E}">
-        <p14:creationId xmlns:p14="http://schemas.microsoft.com/office/powerpoint/2010/main" val="1630963884"/>
       </p:ext>
     </p:extLst>
   </p:cSld>
@@ -1919,172 +1260,19 @@
           <a:lstStyle/>
           <a:p>
             <a:r>
-              <a:rPr lang="en-US" sz="1200" b="0" kern="1200" dirty="0">
-                <a:solidFill>
-                  <a:schemeClr val="tx1"/>
-                </a:solidFill>
-                <a:effectLst/>
-                <a:latin typeface="+mn-lt"/>
-                <a:ea typeface="+mn-ea"/>
-                <a:cs typeface="+mn-cs"/>
-              </a:rPr>
-              <a:t>If someone asks what </a:t>
-            </a:r>
-            <a:r>
-              <a:rPr lang="en-US" sz="1200" b="0" kern="1200" dirty="0" err="1">
-                <a:solidFill>
-                  <a:schemeClr val="tx1"/>
-                </a:solidFill>
-                <a:effectLst/>
-                <a:latin typeface="+mn-lt"/>
-                <a:ea typeface="+mn-ea"/>
-                <a:cs typeface="+mn-cs"/>
-              </a:rPr>
-              <a:t>SelfHelp</a:t>
-            </a:r>
-            <a:r>
-              <a:rPr lang="en-US" sz="1200" b="0" kern="1200" dirty="0">
-                <a:solidFill>
-                  <a:schemeClr val="tx1"/>
-                </a:solidFill>
-                <a:effectLst/>
-                <a:latin typeface="+mn-lt"/>
-                <a:ea typeface="+mn-ea"/>
-                <a:cs typeface="+mn-cs"/>
-              </a:rPr>
-              <a:t> is in plain language, I would say this: it is a configurable platform for building digital services.</a:t>
-            </a:r>
-          </a:p>
-          <a:p>
-            <a:endParaRPr lang="en-US" sz="1200" b="0" kern="1200" dirty="0">
-              <a:solidFill>
-                <a:schemeClr val="tx1"/>
-              </a:solidFill>
-              <a:effectLst/>
-              <a:latin typeface="+mn-lt"/>
-              <a:ea typeface="+mn-ea"/>
-              <a:cs typeface="+mn-cs"/>
-            </a:endParaRPr>
-          </a:p>
-          <a:p>
-            <a:r>
-              <a:rPr lang="en-US" sz="1200" b="0" kern="1200" dirty="0">
-                <a:solidFill>
-                  <a:schemeClr val="tx1"/>
-                </a:solidFill>
-                <a:effectLst/>
-                <a:latin typeface="+mn-lt"/>
-                <a:ea typeface="+mn-ea"/>
-                <a:cs typeface="+mn-cs"/>
-              </a:rPr>
-              <a:t>Instead of treating a website, a survey, a reminder workflow, and a mobile app as separate projects, </a:t>
-            </a:r>
-            <a:r>
-              <a:rPr lang="en-US" sz="1200" b="0" kern="1200" dirty="0" err="1">
-                <a:solidFill>
-                  <a:schemeClr val="tx1"/>
-                </a:solidFill>
-                <a:effectLst/>
-                <a:latin typeface="+mn-lt"/>
-                <a:ea typeface="+mn-ea"/>
-                <a:cs typeface="+mn-cs"/>
-              </a:rPr>
-              <a:t>SelfHelp</a:t>
-            </a:r>
-            <a:r>
-              <a:rPr lang="en-US" sz="1200" b="0" kern="1200" dirty="0">
-                <a:solidFill>
-                  <a:schemeClr val="tx1"/>
-                </a:solidFill>
-                <a:effectLst/>
-                <a:latin typeface="+mn-lt"/>
-                <a:ea typeface="+mn-ea"/>
-                <a:cs typeface="+mn-cs"/>
-              </a:rPr>
-              <a:t> brings them together. Pages are assembled from reusable sections. Data is stored in a structured way. Workflows can react to what users do. The same content model can also be rendered for mobile.</a:t>
-            </a:r>
-          </a:p>
-          <a:p>
-            <a:endParaRPr lang="en-US" sz="1200" b="0" kern="1200" dirty="0">
-              <a:solidFill>
-                <a:schemeClr val="tx1"/>
-              </a:solidFill>
-              <a:effectLst/>
-              <a:latin typeface="+mn-lt"/>
-              <a:ea typeface="+mn-ea"/>
-              <a:cs typeface="+mn-cs"/>
-            </a:endParaRPr>
-          </a:p>
-          <a:p>
-            <a:r>
-              <a:rPr lang="en-US" sz="1200" b="0" kern="1200" dirty="0">
-                <a:solidFill>
-                  <a:schemeClr val="tx1"/>
-                </a:solidFill>
-                <a:effectLst/>
-                <a:latin typeface="+mn-lt"/>
-                <a:ea typeface="+mn-ea"/>
-                <a:cs typeface="+mn-cs"/>
-              </a:rPr>
-              <a:t>That is important in a university environment because many projects do not fail on ideas. They fail because too many tools have to be stitched together. </a:t>
-            </a:r>
-            <a:r>
-              <a:rPr lang="en-US" sz="1200" b="0" kern="1200" dirty="0" err="1">
-                <a:solidFill>
-                  <a:schemeClr val="tx1"/>
-                </a:solidFill>
-                <a:effectLst/>
-                <a:latin typeface="+mn-lt"/>
-                <a:ea typeface="+mn-ea"/>
-                <a:cs typeface="+mn-cs"/>
-              </a:rPr>
-              <a:t>SelfHelp</a:t>
-            </a:r>
-            <a:r>
-              <a:rPr lang="en-US" sz="1200" b="0" kern="1200" dirty="0">
-                <a:solidFill>
-                  <a:schemeClr val="tx1"/>
-                </a:solidFill>
-                <a:effectLst/>
-                <a:latin typeface="+mn-lt"/>
-                <a:ea typeface="+mn-ea"/>
-                <a:cs typeface="+mn-cs"/>
-              </a:rPr>
-              <a:t> reduces that fragmentation.</a:t>
-            </a:r>
-            <a:br>
-              <a:rPr lang="en-US" sz="1200" b="0" kern="1200" dirty="0">
-                <a:solidFill>
-                  <a:schemeClr val="tx1"/>
-                </a:solidFill>
-                <a:effectLst/>
-                <a:latin typeface="+mn-lt"/>
-                <a:ea typeface="+mn-ea"/>
-                <a:cs typeface="+mn-cs"/>
-              </a:rPr>
-            </a:br>
-            <a:endParaRPr lang="en-US" sz="1200" b="0" kern="1200" dirty="0">
-              <a:solidFill>
-                <a:schemeClr val="tx1"/>
-              </a:solidFill>
-              <a:effectLst/>
-              <a:latin typeface="+mn-lt"/>
-              <a:ea typeface="+mn-ea"/>
-              <a:cs typeface="+mn-cs"/>
-            </a:endParaRPr>
-          </a:p>
-          <a:p>
-            <a:r>
-              <a:rPr lang="en-US" sz="1200" b="0" kern="1200" dirty="0">
-                <a:solidFill>
-                  <a:schemeClr val="tx1"/>
-                </a:solidFill>
-                <a:effectLst/>
-                <a:latin typeface="+mn-lt"/>
-                <a:ea typeface="+mn-ea"/>
-                <a:cs typeface="+mn-cs"/>
-              </a:rPr>
-              <a:t>And because it can be hosted under institutional control, it is suited to settings where governance and data protection matter.</a:t>
+              <a:t>If I had to explain SelfHelp in one sentence, I would call it a platform for running digital programs.</a:t>
+            </a:r>
+          </a:p>
+          <a:p/>
+          <a:p>
+            <a:r>
+              <a:t>The important point is that it brings together pieces that are often separated. Content, assessments, workflows, and mobile delivery can all live in the same system instead of being spread across different tools.</a:t>
+            </a:r>
+          </a:p>
+          <a:p/>
+          <a:p>
+            <a:r>
+              <a:t>Because it is built from reusable components, new projects do not have to start from zero every time. And because it can be hosted under university control, it fits settings where governance and data protection matter.</a:t>
             </a:r>
           </a:p>
         </p:txBody>
@@ -2189,182 +1377,25 @@
           <a:lstStyle/>
           <a:p>
             <a:r>
-              <a:rPr lang="en-US" sz="1200" b="0" kern="1200" dirty="0">
-                <a:solidFill>
-                  <a:schemeClr val="tx1"/>
-                </a:solidFill>
-                <a:effectLst/>
-                <a:latin typeface="+mn-lt"/>
-                <a:ea typeface="+mn-ea"/>
-                <a:cs typeface="+mn-cs"/>
-              </a:rPr>
-              <a:t>I would connect this slide back to the audience first. We already showed </a:t>
-            </a:r>
-            <a:r>
-              <a:rPr lang="en-US" sz="1200" b="0" kern="1200" dirty="0" err="1">
-                <a:solidFill>
-                  <a:schemeClr val="tx1"/>
-                </a:solidFill>
-                <a:effectLst/>
-                <a:latin typeface="+mn-lt"/>
-                <a:ea typeface="+mn-ea"/>
-                <a:cs typeface="+mn-cs"/>
-              </a:rPr>
-              <a:t>SelfHelp</a:t>
-            </a:r>
-            <a:r>
-              <a:rPr lang="en-US" sz="1200" b="0" kern="1200" dirty="0">
-                <a:solidFill>
-                  <a:schemeClr val="tx1"/>
-                </a:solidFill>
-                <a:effectLst/>
-                <a:latin typeface="+mn-lt"/>
-                <a:ea typeface="+mn-ea"/>
-                <a:cs typeface="+mn-cs"/>
-              </a:rPr>
-              <a:t> in this faculty setting in 2021, so this is not a completely new story. It is more a continuation. Some people in the room may remember the earlier version, and this slide helps show what changed since then.</a:t>
-            </a:r>
-            <a:br>
-              <a:rPr lang="en-US" sz="1200" b="0" kern="1200" dirty="0">
-                <a:solidFill>
-                  <a:schemeClr val="tx1"/>
-                </a:solidFill>
-                <a:effectLst/>
-                <a:latin typeface="+mn-lt"/>
-                <a:ea typeface="+mn-ea"/>
-                <a:cs typeface="+mn-cs"/>
-              </a:rPr>
-            </a:br>
-            <a:endParaRPr lang="en-US" sz="1200" b="0" kern="1200" dirty="0">
-              <a:solidFill>
-                <a:schemeClr val="tx1"/>
-              </a:solidFill>
-              <a:effectLst/>
-              <a:latin typeface="+mn-lt"/>
-              <a:ea typeface="+mn-ea"/>
-              <a:cs typeface="+mn-cs"/>
-            </a:endParaRPr>
-          </a:p>
-          <a:p>
-            <a:r>
-              <a:rPr lang="en-US" sz="1200" b="0" kern="1200" dirty="0">
-                <a:solidFill>
-                  <a:schemeClr val="tx1"/>
-                </a:solidFill>
-                <a:effectLst/>
-                <a:latin typeface="+mn-lt"/>
-                <a:ea typeface="+mn-ea"/>
-                <a:cs typeface="+mn-cs"/>
-              </a:rPr>
-              <a:t>At the beginning, the message was quite simple: </a:t>
-            </a:r>
-            <a:r>
-              <a:rPr lang="en-US" sz="1200" b="0" kern="1200" dirty="0" err="1">
-                <a:solidFill>
-                  <a:schemeClr val="tx1"/>
-                </a:solidFill>
-                <a:effectLst/>
-                <a:latin typeface="+mn-lt"/>
-                <a:ea typeface="+mn-ea"/>
-                <a:cs typeface="+mn-cs"/>
-              </a:rPr>
-              <a:t>SelfHelp</a:t>
-            </a:r>
-            <a:r>
-              <a:rPr lang="en-US" sz="1200" b="0" kern="1200" dirty="0">
-                <a:solidFill>
-                  <a:schemeClr val="tx1"/>
-                </a:solidFill>
-                <a:effectLst/>
-                <a:latin typeface="+mn-lt"/>
-                <a:ea typeface="+mn-ea"/>
-                <a:cs typeface="+mn-cs"/>
-              </a:rPr>
-              <a:t> helped us build self-help and research-oriented websites, host them ourselves, and adapt them without too much custom development.</a:t>
-            </a:r>
-          </a:p>
-          <a:p>
-            <a:endParaRPr lang="en-US" sz="1200" b="0" kern="1200" dirty="0">
-              <a:solidFill>
-                <a:schemeClr val="tx1"/>
-              </a:solidFill>
-              <a:effectLst/>
-              <a:latin typeface="+mn-lt"/>
-              <a:ea typeface="+mn-ea"/>
-              <a:cs typeface="+mn-cs"/>
-            </a:endParaRPr>
-          </a:p>
-          <a:p>
-            <a:r>
-              <a:rPr lang="en-US" sz="1200" b="0" kern="1200" dirty="0">
-                <a:solidFill>
-                  <a:schemeClr val="tx1"/>
-                </a:solidFill>
-                <a:effectLst/>
-                <a:latin typeface="+mn-lt"/>
-                <a:ea typeface="+mn-ea"/>
-                <a:cs typeface="+mn-cs"/>
-              </a:rPr>
-              <a:t>After that, the platform became much more operational. The page system became more modular, automation became more reliable, and mobile support became much more usable in practice.</a:t>
-            </a:r>
-            <a:br>
-              <a:rPr lang="en-US" sz="1200" b="0" kern="1200" dirty="0">
-                <a:solidFill>
-                  <a:schemeClr val="tx1"/>
-                </a:solidFill>
-                <a:effectLst/>
-                <a:latin typeface="+mn-lt"/>
-                <a:ea typeface="+mn-ea"/>
-                <a:cs typeface="+mn-cs"/>
-              </a:rPr>
-            </a:br>
-            <a:endParaRPr lang="en-US" sz="1200" b="0" kern="1200" dirty="0">
-              <a:solidFill>
-                <a:schemeClr val="tx1"/>
-              </a:solidFill>
-              <a:effectLst/>
-              <a:latin typeface="+mn-lt"/>
-              <a:ea typeface="+mn-ea"/>
-              <a:cs typeface="+mn-cs"/>
-            </a:endParaRPr>
-          </a:p>
-          <a:p>
-            <a:r>
-              <a:rPr lang="en-US" sz="1200" b="0" kern="1200" dirty="0">
-                <a:solidFill>
-                  <a:schemeClr val="tx1"/>
-                </a:solidFill>
-                <a:effectLst/>
-                <a:latin typeface="+mn-lt"/>
-                <a:ea typeface="+mn-ea"/>
-                <a:cs typeface="+mn-cs"/>
-              </a:rPr>
-              <a:t>And in the current stage, a lot of the progress is in the foundation: better data structures, more systematic workflows, stronger permissions, two-factor authentication, and infrastructure for background processes and live updates. On top of that, we now have a real AI layer.</a:t>
-            </a:r>
-          </a:p>
-          <a:p>
-            <a:endParaRPr lang="en-US" sz="1200" b="0" kern="1200" dirty="0">
-              <a:solidFill>
-                <a:schemeClr val="tx1"/>
-              </a:solidFill>
-              <a:effectLst/>
-              <a:latin typeface="+mn-lt"/>
-              <a:ea typeface="+mn-ea"/>
-              <a:cs typeface="+mn-cs"/>
-            </a:endParaRPr>
-          </a:p>
-          <a:p>
-            <a:r>
-              <a:rPr lang="en-US" sz="1200" b="0" kern="1200" dirty="0">
-                <a:solidFill>
-                  <a:schemeClr val="tx1"/>
-                </a:solidFill>
-                <a:effectLst/>
-                <a:latin typeface="+mn-lt"/>
-                <a:ea typeface="+mn-ea"/>
-                <a:cs typeface="+mn-cs"/>
-              </a:rPr>
-              <a:t>So the main point of this slide is: the idea stayed the same, but the platform became much more mature and much more capable.</a:t>
+              <a:t>The easiest way to see the change is to look at what the platform was mainly used for at each stage.</a:t>
+            </a:r>
+          </a:p>
+          <a:p/>
+          <a:p>
+            <a:r>
+              <a:t>In 2021, SelfHelp was mainly presented as a platform for self-help and research-oriented websites. By 2023, it had become more modular and more practical to run, with better page structure, stronger scheduling, and better mobile integration.</a:t>
+            </a:r>
+          </a:p>
+          <a:p/>
+          <a:p>
+            <a:r>
+              <a:t>From 2024 to 2026, a lot of the progress happened in the foundation. The data model became stronger, workflows became more systematic, permissions became clearer, two-factor authentication was added, and background processing became more reliable.</a:t>
+            </a:r>
+          </a:p>
+          <a:p/>
+          <a:p>
+            <a:r>
+              <a:t>And once that stronger base was in place, AI features could be added on top of it. So the overall direction is quite clear. The platform started with publishing content, and it is now moving toward running structured digital programs.</a:t>
             </a:r>
           </a:p>
         </p:txBody>
@@ -2469,133 +1500,25 @@
           <a:lstStyle/>
           <a:p>
             <a:r>
-              <a:rPr lang="en-US" sz="1200" b="0" kern="1200" dirty="0">
-                <a:solidFill>
-                  <a:schemeClr val="tx1"/>
-                </a:solidFill>
-                <a:effectLst/>
-                <a:latin typeface="+mn-lt"/>
-                <a:ea typeface="+mn-ea"/>
-                <a:cs typeface="+mn-cs"/>
-              </a:rPr>
-              <a:t>This is the outcome slide. Here I would avoid technical detail and focus on what a team can actually build.</a:t>
-            </a:r>
-          </a:p>
-          <a:p>
-            <a:endParaRPr lang="en-US" sz="1200" b="0" kern="1200" dirty="0">
-              <a:solidFill>
-                <a:schemeClr val="tx1"/>
-              </a:solidFill>
-              <a:effectLst/>
-              <a:latin typeface="+mn-lt"/>
-              <a:ea typeface="+mn-ea"/>
-              <a:cs typeface="+mn-cs"/>
-            </a:endParaRPr>
-          </a:p>
-          <a:p>
-            <a:r>
-              <a:rPr lang="en-US" sz="1200" b="0" kern="1200" dirty="0">
-                <a:solidFill>
-                  <a:schemeClr val="tx1"/>
-                </a:solidFill>
-                <a:effectLst/>
-                <a:latin typeface="+mn-lt"/>
-                <a:ea typeface="+mn-ea"/>
-                <a:cs typeface="+mn-cs"/>
-              </a:rPr>
-              <a:t>A team can create a complete digital program: a landing page, onboarding, assessments, educational or intervention content, reminders, follow-up measures, and dashboards or review views. That can be done inside one environment instead of moving between disconnected systems.</a:t>
-            </a:r>
-            <a:br>
-              <a:rPr lang="en-US" sz="1200" b="0" kern="1200" dirty="0">
-                <a:solidFill>
-                  <a:schemeClr val="tx1"/>
-                </a:solidFill>
-                <a:effectLst/>
-                <a:latin typeface="+mn-lt"/>
-                <a:ea typeface="+mn-ea"/>
-                <a:cs typeface="+mn-cs"/>
-              </a:rPr>
-            </a:br>
-            <a:endParaRPr lang="en-US" sz="1200" b="0" kern="1200" dirty="0">
-              <a:solidFill>
-                <a:schemeClr val="tx1"/>
-              </a:solidFill>
-              <a:effectLst/>
-              <a:latin typeface="+mn-lt"/>
-              <a:ea typeface="+mn-ea"/>
-              <a:cs typeface="+mn-cs"/>
-            </a:endParaRPr>
-          </a:p>
-          <a:p>
-            <a:r>
-              <a:rPr lang="en-US" sz="1200" b="0" kern="1200" dirty="0">
-                <a:solidFill>
-                  <a:schemeClr val="tx1"/>
-                </a:solidFill>
-                <a:effectLst/>
-                <a:latin typeface="+mn-lt"/>
-                <a:ea typeface="+mn-ea"/>
-                <a:cs typeface="+mn-cs"/>
-              </a:rPr>
-              <a:t>The system is useful whenever a project needs structure over time. That includes research studies, guided learning, support programs, coaching flows, blended care models, or any process where users return repeatedly and the system needs to react to what happened before.</a:t>
-            </a:r>
-            <a:br>
-              <a:rPr lang="en-US" sz="1200" b="0" kern="1200" dirty="0">
-                <a:solidFill>
-                  <a:schemeClr val="tx1"/>
-                </a:solidFill>
-                <a:effectLst/>
-                <a:latin typeface="+mn-lt"/>
-                <a:ea typeface="+mn-ea"/>
-                <a:cs typeface="+mn-cs"/>
-              </a:rPr>
-            </a:br>
-            <a:endParaRPr lang="en-US" sz="1200" b="0" kern="1200" dirty="0">
-              <a:solidFill>
-                <a:schemeClr val="tx1"/>
-              </a:solidFill>
-              <a:effectLst/>
-              <a:latin typeface="+mn-lt"/>
-              <a:ea typeface="+mn-ea"/>
-              <a:cs typeface="+mn-cs"/>
-            </a:endParaRPr>
-          </a:p>
-          <a:p>
-            <a:r>
-              <a:rPr lang="en-US" sz="1200" b="0" kern="1200" dirty="0">
-                <a:solidFill>
-                  <a:schemeClr val="tx1"/>
-                </a:solidFill>
-                <a:effectLst/>
-                <a:latin typeface="+mn-lt"/>
-                <a:ea typeface="+mn-ea"/>
-                <a:cs typeface="+mn-cs"/>
-              </a:rPr>
-              <a:t>The key idea is simple: </a:t>
-            </a:r>
-            <a:r>
-              <a:rPr lang="en-US" sz="1200" b="0" kern="1200" dirty="0" err="1">
-                <a:solidFill>
-                  <a:schemeClr val="tx1"/>
-                </a:solidFill>
-                <a:effectLst/>
-                <a:latin typeface="+mn-lt"/>
-                <a:ea typeface="+mn-ea"/>
-                <a:cs typeface="+mn-cs"/>
-              </a:rPr>
-              <a:t>SelfHelp</a:t>
-            </a:r>
-            <a:r>
-              <a:rPr lang="en-US" sz="1200" b="0" kern="1200" dirty="0">
-                <a:solidFill>
-                  <a:schemeClr val="tx1"/>
-                </a:solidFill>
-                <a:effectLst/>
-                <a:latin typeface="+mn-lt"/>
-                <a:ea typeface="+mn-ea"/>
-                <a:cs typeface="+mn-cs"/>
-              </a:rPr>
-              <a:t> supports ongoing journeys, not one-off interactions.</a:t>
+              <a:t>What this means in practice is that a team can take an idea and turn it into a full user journey.</a:t>
+            </a:r>
+          </a:p>
+          <a:p/>
+          <a:p>
+            <a:r>
+              <a:t>With the platform, a team can create a complete digital program: onboarding, content, structured assessments, reminders, and follow-up. That can all happen in one environment instead of being split across disconnected tools.</a:t>
+            </a:r>
+          </a:p>
+          <a:p/>
+          <a:p>
+            <a:r>
+              <a:t>A person can enter a program, receive the right content, complete assessments over time, and be guided to the next step automatically. The system can also adapt what people see based on language, group, role, or what has already happened before.</a:t>
+            </a:r>
+          </a:p>
+          <a:p/>
+          <a:p>
+            <a:r>
+              <a:t>It can collect richer input such as files or voice, which makes it more flexible than a simple form-based workflow. So the real value is not only that SelfHelp can publish content. It can run a process over time.</a:t>
             </a:r>
           </a:p>
         </p:txBody>
@@ -2700,230 +1623,25 @@
           <a:lstStyle/>
           <a:p>
             <a:r>
-              <a:rPr lang="en-US" sz="1200" b="0" kern="1200" dirty="0">
-                <a:solidFill>
-                  <a:schemeClr val="tx1"/>
-                </a:solidFill>
-                <a:effectLst/>
-                <a:latin typeface="+mn-lt"/>
-                <a:ea typeface="+mn-ea"/>
-                <a:cs typeface="+mn-cs"/>
-              </a:rPr>
-              <a:t>This slide is here to prepare the audience for the three main plugins we will look at next: </a:t>
-            </a:r>
-            <a:r>
-              <a:rPr lang="en-US" sz="1200" b="0" kern="1200" dirty="0" err="1">
-                <a:solidFill>
-                  <a:schemeClr val="tx1"/>
-                </a:solidFill>
-                <a:effectLst/>
-                <a:latin typeface="+mn-lt"/>
-                <a:ea typeface="+mn-ea"/>
-                <a:cs typeface="+mn-cs"/>
-              </a:rPr>
-              <a:t>SurveyJS</a:t>
-            </a:r>
-            <a:r>
-              <a:rPr lang="en-US" sz="1200" b="0" kern="1200" dirty="0">
-                <a:solidFill>
-                  <a:schemeClr val="tx1"/>
-                </a:solidFill>
-                <a:effectLst/>
-                <a:latin typeface="+mn-lt"/>
-                <a:ea typeface="+mn-ea"/>
-                <a:cs typeface="+mn-cs"/>
-              </a:rPr>
-              <a:t>, the general LLM plugin, and the LLM Therapy Chat plugin.</a:t>
-            </a:r>
-            <a:br>
-              <a:rPr lang="en-US" sz="1200" b="0" kern="1200" dirty="0">
-                <a:solidFill>
-                  <a:schemeClr val="tx1"/>
-                </a:solidFill>
-                <a:effectLst/>
-                <a:latin typeface="+mn-lt"/>
-                <a:ea typeface="+mn-ea"/>
-                <a:cs typeface="+mn-cs"/>
-              </a:rPr>
-            </a:br>
-            <a:endParaRPr lang="en-US" sz="1200" b="0" kern="1200" dirty="0">
-              <a:solidFill>
-                <a:schemeClr val="tx1"/>
-              </a:solidFill>
-              <a:effectLst/>
-              <a:latin typeface="+mn-lt"/>
-              <a:ea typeface="+mn-ea"/>
-              <a:cs typeface="+mn-cs"/>
-            </a:endParaRPr>
-          </a:p>
-          <a:p>
-            <a:r>
-              <a:rPr lang="en-US" sz="1200" b="0" kern="1200" dirty="0">
-                <a:solidFill>
-                  <a:schemeClr val="tx1"/>
-                </a:solidFill>
-                <a:effectLst/>
-                <a:latin typeface="+mn-lt"/>
-                <a:ea typeface="+mn-ea"/>
-                <a:cs typeface="+mn-cs"/>
-              </a:rPr>
-              <a:t>Before going into those three, I want to show that they do not stand alone. They sit inside a larger platform architecture. There is an API layer that connects the web platform, the mobile app, and external services. There is external authentication support, which matters for institutional deployment. There are also plugins for Lab.js experiments, formula-based logic, R-based computation, video-linked workflows, and sensing data integration.</a:t>
-            </a:r>
-            <a:br>
-              <a:rPr lang="en-US" sz="1200" b="0" kern="1200" dirty="0">
-                <a:solidFill>
-                  <a:schemeClr val="tx1"/>
-                </a:solidFill>
-                <a:effectLst/>
-                <a:latin typeface="+mn-lt"/>
-                <a:ea typeface="+mn-ea"/>
-                <a:cs typeface="+mn-cs"/>
-              </a:rPr>
-            </a:br>
-            <a:endParaRPr lang="en-US" sz="1200" b="0" kern="1200" dirty="0">
-              <a:solidFill>
-                <a:schemeClr val="tx1"/>
-              </a:solidFill>
-              <a:effectLst/>
-              <a:latin typeface="+mn-lt"/>
-              <a:ea typeface="+mn-ea"/>
-              <a:cs typeface="+mn-cs"/>
-            </a:endParaRPr>
-          </a:p>
-          <a:p>
-            <a:r>
-              <a:rPr lang="en-US" sz="1200" b="0" kern="1200" dirty="0">
-                <a:solidFill>
-                  <a:schemeClr val="tx1"/>
-                </a:solidFill>
-                <a:effectLst/>
-                <a:latin typeface="+mn-lt"/>
-                <a:ea typeface="+mn-ea"/>
-                <a:cs typeface="+mn-cs"/>
-              </a:rPr>
-              <a:t>The sensing part is worth explaining clearly. Here </a:t>
-            </a:r>
-            <a:r>
-              <a:rPr lang="en-US" sz="1200" b="0" kern="1200" dirty="0" err="1">
-                <a:solidFill>
-                  <a:schemeClr val="tx1"/>
-                </a:solidFill>
-                <a:effectLst/>
-                <a:latin typeface="+mn-lt"/>
-                <a:ea typeface="+mn-ea"/>
-                <a:cs typeface="+mn-cs"/>
-              </a:rPr>
-              <a:t>SelfHelp</a:t>
-            </a:r>
-            <a:r>
-              <a:rPr lang="en-US" sz="1200" b="0" kern="1200" dirty="0">
-                <a:solidFill>
-                  <a:schemeClr val="tx1"/>
-                </a:solidFill>
-                <a:effectLst/>
-                <a:latin typeface="+mn-lt"/>
-                <a:ea typeface="+mn-ea"/>
-                <a:cs typeface="+mn-cs"/>
-              </a:rPr>
-              <a:t> does not collect the raw wearable data itself. Another platform collects data from devices such as Garmin and similar sources, and </a:t>
-            </a:r>
-            <a:r>
-              <a:rPr lang="en-US" sz="1200" b="0" kern="1200" dirty="0" err="1">
-                <a:solidFill>
-                  <a:schemeClr val="tx1"/>
-                </a:solidFill>
-                <a:effectLst/>
-                <a:latin typeface="+mn-lt"/>
-                <a:ea typeface="+mn-ea"/>
-                <a:cs typeface="+mn-cs"/>
-              </a:rPr>
-              <a:t>SelfHelp</a:t>
-            </a:r>
-            <a:r>
-              <a:rPr lang="en-US" sz="1200" b="0" kern="1200" dirty="0">
-                <a:solidFill>
-                  <a:schemeClr val="tx1"/>
-                </a:solidFill>
-                <a:effectLst/>
-                <a:latin typeface="+mn-lt"/>
-                <a:ea typeface="+mn-ea"/>
-                <a:cs typeface="+mn-cs"/>
-              </a:rPr>
-              <a:t> can pull that data in and use it in the wider workflow.</a:t>
-            </a:r>
-          </a:p>
-          <a:p>
-            <a:endParaRPr lang="en-US" sz="1200" b="0" kern="1200" dirty="0">
-              <a:solidFill>
-                <a:schemeClr val="tx1"/>
-              </a:solidFill>
-              <a:effectLst/>
-              <a:latin typeface="+mn-lt"/>
-              <a:ea typeface="+mn-ea"/>
-              <a:cs typeface="+mn-cs"/>
-            </a:endParaRPr>
-          </a:p>
-          <a:p>
-            <a:r>
-              <a:rPr lang="en-US" sz="1200" b="0" kern="1200" dirty="0">
-                <a:solidFill>
-                  <a:schemeClr val="tx1"/>
-                </a:solidFill>
-                <a:effectLst/>
-                <a:latin typeface="+mn-lt"/>
-                <a:ea typeface="+mn-ea"/>
-                <a:cs typeface="+mn-cs"/>
-              </a:rPr>
-              <a:t>That tells us something important about </a:t>
-            </a:r>
-            <a:r>
-              <a:rPr lang="en-US" sz="1200" b="0" kern="1200" dirty="0" err="1">
-                <a:solidFill>
-                  <a:schemeClr val="tx1"/>
-                </a:solidFill>
-                <a:effectLst/>
-                <a:latin typeface="+mn-lt"/>
-                <a:ea typeface="+mn-ea"/>
-                <a:cs typeface="+mn-cs"/>
-              </a:rPr>
-              <a:t>SelfHelp's</a:t>
-            </a:r>
-            <a:r>
-              <a:rPr lang="en-US" sz="1200" b="0" kern="1200" dirty="0">
-                <a:solidFill>
-                  <a:schemeClr val="tx1"/>
-                </a:solidFill>
-                <a:effectLst/>
-                <a:latin typeface="+mn-lt"/>
-                <a:ea typeface="+mn-ea"/>
-                <a:cs typeface="+mn-cs"/>
-              </a:rPr>
-              <a:t> identity. It was built to support real projects with different methods and different data sources, not just one standard survey or content format.</a:t>
-            </a:r>
-          </a:p>
-          <a:p>
-            <a:endParaRPr lang="en-US" sz="1200" b="0" kern="1200" dirty="0">
-              <a:solidFill>
-                <a:schemeClr val="tx1"/>
-              </a:solidFill>
-              <a:effectLst/>
-              <a:latin typeface="+mn-lt"/>
-              <a:ea typeface="+mn-ea"/>
-              <a:cs typeface="+mn-cs"/>
-            </a:endParaRPr>
-          </a:p>
-          <a:p>
-            <a:r>
-              <a:rPr lang="en-US" sz="1200" b="0" kern="1200" dirty="0">
-                <a:solidFill>
-                  <a:schemeClr val="tx1"/>
-                </a:solidFill>
-                <a:effectLst/>
-                <a:latin typeface="+mn-lt"/>
-                <a:ea typeface="+mn-ea"/>
-                <a:cs typeface="+mn-cs"/>
-              </a:rPr>
-              <a:t>If I mention the most important supporting pieces around the three main plugins, I would highlight the API layer, external authentication, Lab.js, R integration, and sensing integration. They make the overall platform much stronger.</a:t>
+              <a:t>One reason SelfHelp has been able to grow is that it expands through plugins.</a:t>
+            </a:r>
+          </a:p>
+          <a:p/>
+          <a:p>
+            <a:r>
+              <a:t>That means the platform can add capabilities without rebuilding the core system every time. Some plugins work mainly in the background, but they are important for the whole platform.</a:t>
+            </a:r>
+          </a:p>
+          <a:p/>
+          <a:p>
+            <a:r>
+              <a:t>External authentication helps when the platform needs to fit university or institutional access models. Lab.js makes it possible to include browser-based experiments and structured tasks in the same environment. R integration opens the door to more advanced analysis and computation. And custom formulas let us calculate scores and derived values directly inside the platform.</a:t>
+            </a:r>
+          </a:p>
+          <a:p/>
+          <a:p>
+            <a:r>
+              <a:t>On top of that foundation, there are newer plugins that are more visible from the user side. Those are the three I want to highlight next because they show clearly where the platform is going.</a:t>
             </a:r>
           </a:p>
         </p:txBody>
@@ -3046,193 +1764,25 @@
           <a:lstStyle/>
           <a:p>
             <a:r>
-              <a:rPr lang="en-US" sz="1200" b="0" kern="1200" dirty="0" err="1">
-                <a:solidFill>
-                  <a:schemeClr val="tx1"/>
-                </a:solidFill>
-                <a:effectLst/>
-                <a:latin typeface="+mn-lt"/>
-                <a:ea typeface="+mn-ea"/>
-                <a:cs typeface="+mn-cs"/>
-              </a:rPr>
-              <a:t>SurveyJS</a:t>
-            </a:r>
-            <a:r>
-              <a:rPr lang="en-US" sz="1200" b="0" kern="1200" dirty="0">
-                <a:solidFill>
-                  <a:schemeClr val="tx1"/>
-                </a:solidFill>
-                <a:effectLst/>
-                <a:latin typeface="+mn-lt"/>
-                <a:ea typeface="+mn-ea"/>
-                <a:cs typeface="+mn-cs"/>
-              </a:rPr>
-              <a:t> is one of the clearest examples of how </a:t>
-            </a:r>
-            <a:r>
-              <a:rPr lang="en-US" sz="1200" b="0" kern="1200" dirty="0" err="1">
-                <a:solidFill>
-                  <a:schemeClr val="tx1"/>
-                </a:solidFill>
-                <a:effectLst/>
-                <a:latin typeface="+mn-lt"/>
-                <a:ea typeface="+mn-ea"/>
-                <a:cs typeface="+mn-cs"/>
-              </a:rPr>
-              <a:t>SelfHelp</a:t>
-            </a:r>
-            <a:r>
-              <a:rPr lang="en-US" sz="1200" b="0" kern="1200" dirty="0">
-                <a:solidFill>
-                  <a:schemeClr val="tx1"/>
-                </a:solidFill>
-                <a:effectLst/>
-                <a:latin typeface="+mn-lt"/>
-                <a:ea typeface="+mn-ea"/>
-                <a:cs typeface="+mn-cs"/>
-              </a:rPr>
-              <a:t> has moved beyond simple forms.</a:t>
-            </a:r>
-          </a:p>
-          <a:p>
-            <a:endParaRPr lang="en-US" sz="1200" b="0" kern="1200" dirty="0">
-              <a:solidFill>
-                <a:schemeClr val="tx1"/>
-              </a:solidFill>
-              <a:effectLst/>
-              <a:latin typeface="+mn-lt"/>
-              <a:ea typeface="+mn-ea"/>
-              <a:cs typeface="+mn-cs"/>
-            </a:endParaRPr>
-          </a:p>
-          <a:p>
-            <a:r>
-              <a:rPr lang="en-US" sz="1200" b="0" kern="1200" dirty="0">
-                <a:solidFill>
-                  <a:schemeClr val="tx1"/>
-                </a:solidFill>
-                <a:effectLst/>
-                <a:latin typeface="+mn-lt"/>
-                <a:ea typeface="+mn-ea"/>
-                <a:cs typeface="+mn-cs"/>
-              </a:rPr>
-              <a:t>What matters here is not only that surveys can be built. It is that surveys become managed assets inside the platform. They can be versioned, scheduled, restricted, edited, and connected to dashboards. Response metadata such as timing and completion context is also available, which is valuable for both research quality and operational monitoring.</a:t>
-            </a:r>
-            <a:br>
-              <a:rPr lang="en-US" sz="1200" b="0" kern="1200" dirty="0">
-                <a:solidFill>
-                  <a:schemeClr val="tx1"/>
-                </a:solidFill>
-                <a:effectLst/>
-                <a:latin typeface="+mn-lt"/>
-                <a:ea typeface="+mn-ea"/>
-                <a:cs typeface="+mn-cs"/>
-              </a:rPr>
-            </a:br>
-            <a:endParaRPr lang="en-US" sz="1200" b="0" kern="1200" dirty="0">
-              <a:solidFill>
-                <a:schemeClr val="tx1"/>
-              </a:solidFill>
-              <a:effectLst/>
-              <a:latin typeface="+mn-lt"/>
-              <a:ea typeface="+mn-ea"/>
-              <a:cs typeface="+mn-cs"/>
-            </a:endParaRPr>
-          </a:p>
-          <a:p>
-            <a:r>
-              <a:rPr lang="en-US" sz="1200" b="0" kern="1200" dirty="0">
-                <a:solidFill>
-                  <a:schemeClr val="tx1"/>
-                </a:solidFill>
-                <a:effectLst/>
-                <a:latin typeface="+mn-lt"/>
-                <a:ea typeface="+mn-ea"/>
-                <a:cs typeface="+mn-cs"/>
-              </a:rPr>
-              <a:t>The richer input support is also worth mentioning. File upload and voice recording make the survey layer more flexible than a standard text-only questionnaire.</a:t>
-            </a:r>
-            <a:br>
-              <a:rPr lang="en-US" sz="1200" b="0" kern="1200" dirty="0">
-                <a:solidFill>
-                  <a:schemeClr val="tx1"/>
-                </a:solidFill>
-                <a:effectLst/>
-                <a:latin typeface="+mn-lt"/>
-                <a:ea typeface="+mn-ea"/>
-                <a:cs typeface="+mn-cs"/>
-              </a:rPr>
-            </a:br>
-            <a:endParaRPr lang="en-US" sz="1200" b="0" kern="1200" dirty="0">
-              <a:solidFill>
-                <a:schemeClr val="tx1"/>
-              </a:solidFill>
-              <a:effectLst/>
-              <a:latin typeface="+mn-lt"/>
-              <a:ea typeface="+mn-ea"/>
-              <a:cs typeface="+mn-cs"/>
-            </a:endParaRPr>
-          </a:p>
-          <a:p>
-            <a:r>
-              <a:rPr lang="en-US" sz="1200" b="0" kern="1200" dirty="0">
-                <a:solidFill>
-                  <a:schemeClr val="tx1"/>
-                </a:solidFill>
-                <a:effectLst/>
-                <a:latin typeface="+mn-lt"/>
-                <a:ea typeface="+mn-ea"/>
-                <a:cs typeface="+mn-cs"/>
-              </a:rPr>
-              <a:t>So the message is: </a:t>
-            </a:r>
-            <a:r>
-              <a:rPr lang="en-US" sz="1200" b="0" kern="1200" dirty="0" err="1">
-                <a:solidFill>
-                  <a:schemeClr val="tx1"/>
-                </a:solidFill>
-                <a:effectLst/>
-                <a:latin typeface="+mn-lt"/>
-                <a:ea typeface="+mn-ea"/>
-                <a:cs typeface="+mn-cs"/>
-              </a:rPr>
-              <a:t>SurveyJS</a:t>
-            </a:r>
-            <a:r>
-              <a:rPr lang="en-US" sz="1200" b="0" kern="1200" dirty="0">
-                <a:solidFill>
-                  <a:schemeClr val="tx1"/>
-                </a:solidFill>
-                <a:effectLst/>
-                <a:latin typeface="+mn-lt"/>
-                <a:ea typeface="+mn-ea"/>
-                <a:cs typeface="+mn-cs"/>
-              </a:rPr>
-              <a:t> turns </a:t>
-            </a:r>
-            <a:r>
-              <a:rPr lang="en-US" sz="1200" b="0" kern="1200" dirty="0" err="1">
-                <a:solidFill>
-                  <a:schemeClr val="tx1"/>
-                </a:solidFill>
-                <a:effectLst/>
-                <a:latin typeface="+mn-lt"/>
-                <a:ea typeface="+mn-ea"/>
-                <a:cs typeface="+mn-cs"/>
-              </a:rPr>
-              <a:t>SelfHelp</a:t>
-            </a:r>
-            <a:r>
-              <a:rPr lang="en-US" sz="1200" b="0" kern="1200" dirty="0">
-                <a:solidFill>
-                  <a:schemeClr val="tx1"/>
-                </a:solidFill>
-                <a:effectLst/>
-                <a:latin typeface="+mn-lt"/>
-                <a:ea typeface="+mn-ea"/>
-                <a:cs typeface="+mn-cs"/>
-              </a:rPr>
-              <a:t> into a serious structured assessment environment, while still keeping it connected to the rest of the platform logic.</a:t>
+              <a:t>SurveyJS is a good example of how SelfHelp has moved beyond simple forms.</a:t>
+            </a:r>
+          </a:p>
+          <a:p/>
+          <a:p>
+            <a:r>
+              <a:t>The important point is not just that we can create surveys. We can manage them properly inside the platform. They can be versioned, scheduled, edited later, and connected to dashboards.</a:t>
+            </a:r>
+          </a:p>
+          <a:p/>
+          <a:p>
+            <a:r>
+              <a:t>That improves data quality and makes repeated or longitudinal assessment easier to handle. It also gives more flexibility, because responses can include file uploads and voice recordings as well.</a:t>
+            </a:r>
+          </a:p>
+          <a:p/>
+          <a:p>
+            <a:r>
+              <a:t>So SurveyJS turns SelfHelp into a much more serious environment for structured data collection over time.</a:t>
             </a:r>
           </a:p>
         </p:txBody>
@@ -3367,109 +1917,37 @@
           <a:lstStyle/>
           <a:p>
             <a:r>
-              <a:rPr lang="en-US" sz="1200" b="0" kern="1200" dirty="0">
-                <a:solidFill>
-                  <a:schemeClr val="tx1"/>
-                </a:solidFill>
-                <a:effectLst/>
-                <a:latin typeface="+mn-lt"/>
-                <a:ea typeface="+mn-ea"/>
-                <a:cs typeface="+mn-cs"/>
-              </a:rPr>
-              <a:t>I would present this as an AI layer for controlled use, not as a chatbot novelty.</a:t>
-            </a:r>
-            <a:br>
-              <a:rPr lang="en-US" sz="1200" b="0" kern="1200" dirty="0">
-                <a:solidFill>
-                  <a:schemeClr val="tx1"/>
-                </a:solidFill>
-                <a:effectLst/>
-                <a:latin typeface="+mn-lt"/>
-                <a:ea typeface="+mn-ea"/>
-                <a:cs typeface="+mn-cs"/>
-              </a:rPr>
-            </a:br>
-            <a:endParaRPr lang="en-US" sz="1200" b="0" kern="1200" dirty="0">
-              <a:solidFill>
-                <a:schemeClr val="tx1"/>
-              </a:solidFill>
-              <a:effectLst/>
-              <a:latin typeface="+mn-lt"/>
-              <a:ea typeface="+mn-ea"/>
-              <a:cs typeface="+mn-cs"/>
-            </a:endParaRPr>
-          </a:p>
-          <a:p>
-            <a:r>
-              <a:rPr lang="en-US" sz="1200" b="0" kern="1200" dirty="0">
-                <a:solidFill>
-                  <a:schemeClr val="tx1"/>
-                </a:solidFill>
-                <a:effectLst/>
-                <a:latin typeface="+mn-lt"/>
-                <a:ea typeface="+mn-ea"/>
-                <a:cs typeface="+mn-cs"/>
-              </a:rPr>
-              <a:t>The LLM plugin allows us to place a purpose-built assistant inside any page. That assistant can be narrow or broad depending on the prompt context. It can work with uploaded material, image-capable models, and voice input. And importantly, it can produce either conversational answers or structured outputs that the rest of the platform can use.</a:t>
-            </a:r>
-            <a:br>
-              <a:rPr lang="en-US" sz="1200" b="0" kern="1200" dirty="0">
-                <a:solidFill>
-                  <a:schemeClr val="tx1"/>
-                </a:solidFill>
-                <a:effectLst/>
-                <a:latin typeface="+mn-lt"/>
-                <a:ea typeface="+mn-ea"/>
-                <a:cs typeface="+mn-cs"/>
-              </a:rPr>
-            </a:br>
-            <a:endParaRPr lang="en-US" sz="1200" b="0" kern="1200" dirty="0">
-              <a:solidFill>
-                <a:schemeClr val="tx1"/>
-              </a:solidFill>
-              <a:effectLst/>
-              <a:latin typeface="+mn-lt"/>
-              <a:ea typeface="+mn-ea"/>
-              <a:cs typeface="+mn-cs"/>
-            </a:endParaRPr>
-          </a:p>
-          <a:p>
-            <a:r>
-              <a:rPr lang="en-US" sz="1200" b="0" kern="1200" dirty="0">
-                <a:solidFill>
-                  <a:schemeClr val="tx1"/>
-                </a:solidFill>
-                <a:effectLst/>
-                <a:latin typeface="+mn-lt"/>
-                <a:ea typeface="+mn-ea"/>
-                <a:cs typeface="+mn-cs"/>
-              </a:rPr>
-              <a:t>What makes this more serious than a generic chat widget is everything around it. There are reusable prompt scripts, background execution patterns, an admin view over conversations, and a prompt lab for evaluating prompt versions against datasets and replay cases.</a:t>
-            </a:r>
-          </a:p>
-          <a:p>
-            <a:endParaRPr lang="en-US" sz="1200" b="0" kern="1200" dirty="0">
-              <a:solidFill>
-                <a:schemeClr val="tx1"/>
-              </a:solidFill>
-              <a:effectLst/>
-              <a:latin typeface="+mn-lt"/>
-              <a:ea typeface="+mn-ea"/>
-              <a:cs typeface="+mn-cs"/>
-            </a:endParaRPr>
-          </a:p>
-          <a:p>
-            <a:r>
-              <a:rPr lang="en-US" sz="1200" b="0" kern="1200" dirty="0">
-                <a:solidFill>
-                  <a:schemeClr val="tx1"/>
-                </a:solidFill>
-                <a:effectLst/>
-                <a:latin typeface="+mn-lt"/>
-                <a:ea typeface="+mn-ea"/>
-                <a:cs typeface="+mn-cs"/>
-              </a:rPr>
-              <a:t>That last part is especially strong in an academic environment. It means AI behavior can be reviewed, tested, and improved in a more disciplined way before it is exposed in a real program.</a:t>
+              <a:t>This is not a chatbot. It is a controlled, testable AI component.</a:t>
+            </a:r>
+          </a:p>
+          <a:p/>
+          <a:p>
+            <a:r>
+              <a:t>The LLM plugin allows us to place a purpose-built assistant inside any page, with a defined context and a clearly bounded role. That already makes it different from a general chat tool.</a:t>
+            </a:r>
+          </a:p>
+          <a:p/>
+          <a:p>
+            <a:r>
+              <a:t>An important part of that control is prompt management. Prompts can be developed, versioned, tested, replayed, and compared before they are used in a real program. That is especially valuable in an academic setting, because AI behavior does not just have to work once. It has to be reviewable and improvable over time.</a:t>
+            </a:r>
+          </a:p>
+          <a:p/>
+          <a:p>
+            <a:r>
+              <a:t>The plugin can also work with uploaded material, image-capable models, and voice input, and it can return either conversational answers or structured outputs that the rest of the platform can use.</a:t>
+            </a:r>
+          </a:p>
+          <a:p/>
+          <a:p>
+            <a:r>
+              <a:t>That structured side is important as well. The plugin can work with structured JSON responses in the style people now know from OpenAI-based workflows, which makes it much easier to connect AI output back into the platform in a controlled way.</a:t>
+            </a:r>
+          </a:p>
+          <a:p/>
+          <a:p>
+            <a:r>
+              <a:t>It is also important that, at the moment, we are using the university's local LLM infrastructure. That means the interaction stays inside the university environment, which is a strong point when data protection and institutional control matter.</a:t>
             </a:r>
           </a:p>
         </p:txBody>
@@ -3604,123 +2082,25 @@
           <a:lstStyle/>
           <a:p>
             <a:r>
-              <a:rPr lang="en-US" sz="1200" b="0" kern="1200" dirty="0">
-                <a:solidFill>
-                  <a:schemeClr val="tx1"/>
-                </a:solidFill>
-                <a:effectLst/>
-                <a:latin typeface="+mn-lt"/>
-                <a:ea typeface="+mn-ea"/>
-                <a:cs typeface="+mn-cs"/>
-              </a:rPr>
-              <a:t>This is probably the most distinctive plugin in the current platform.</a:t>
-            </a:r>
-          </a:p>
-          <a:p>
-            <a:endParaRPr lang="en-US" sz="1200" b="0" kern="1200" dirty="0">
-              <a:solidFill>
-                <a:schemeClr val="tx1"/>
-              </a:solidFill>
-              <a:effectLst/>
-              <a:latin typeface="+mn-lt"/>
-              <a:ea typeface="+mn-ea"/>
-              <a:cs typeface="+mn-cs"/>
-            </a:endParaRPr>
-          </a:p>
-          <a:p>
-            <a:r>
-              <a:rPr lang="en-US" sz="1200" b="0" kern="1200" dirty="0">
-                <a:solidFill>
-                  <a:schemeClr val="tx1"/>
-                </a:solidFill>
-                <a:effectLst/>
-                <a:latin typeface="+mn-lt"/>
-                <a:ea typeface="+mn-ea"/>
-                <a:cs typeface="+mn-cs"/>
-              </a:rPr>
-              <a:t>The important point is that it is not trying to replace human support. It is building a supervised interaction model. A user can interact with AI, but therapists remain present through a dedicated dashboard. They can review the conversation, intervene, send their own messages, create notes, generate drafts, and manage risk status.</a:t>
-            </a:r>
-            <a:br>
-              <a:rPr lang="en-US" sz="1200" b="0" kern="1200" dirty="0">
-                <a:solidFill>
-                  <a:schemeClr val="tx1"/>
-                </a:solidFill>
-                <a:effectLst/>
-                <a:latin typeface="+mn-lt"/>
-                <a:ea typeface="+mn-ea"/>
-                <a:cs typeface="+mn-cs"/>
-              </a:rPr>
-            </a:br>
-            <a:endParaRPr lang="en-US" sz="1200" b="0" kern="1200" dirty="0">
-              <a:solidFill>
-                <a:schemeClr val="tx1"/>
-              </a:solidFill>
-              <a:effectLst/>
-              <a:latin typeface="+mn-lt"/>
-              <a:ea typeface="+mn-ea"/>
-              <a:cs typeface="+mn-cs"/>
-            </a:endParaRPr>
-          </a:p>
-          <a:p>
-            <a:r>
-              <a:rPr lang="en-US" sz="1200" b="0" kern="1200" dirty="0">
-                <a:solidFill>
-                  <a:schemeClr val="tx1"/>
-                </a:solidFill>
-                <a:effectLst/>
-                <a:latin typeface="+mn-lt"/>
-                <a:ea typeface="+mn-ea"/>
-                <a:cs typeface="+mn-cs"/>
-              </a:rPr>
-              <a:t>The escalation model is central. The system supports moving from AI-supported interaction to direct human handling. And when safety signals are triggered, the conversation can be switched into human-only mode.</a:t>
-            </a:r>
-          </a:p>
-          <a:p>
-            <a:r>
-              <a:rPr lang="en-US" sz="1200" b="0" kern="1200" dirty="0">
-                <a:solidFill>
-                  <a:schemeClr val="tx1"/>
-                </a:solidFill>
-                <a:effectLst/>
-                <a:latin typeface="+mn-lt"/>
-                <a:ea typeface="+mn-ea"/>
-                <a:cs typeface="+mn-cs"/>
-              </a:rPr>
-              <a:t>But it is also important to say that this plugin does not have to run as AI chat. It can also run in a human-only setup. That means we can configure different groups or different study conditions and compare, for example, AI-supported interaction versus purely human interaction.</a:t>
-            </a:r>
-            <a:br>
-              <a:rPr lang="en-US" sz="1200" b="0" kern="1200" dirty="0">
-                <a:solidFill>
-                  <a:schemeClr val="tx1"/>
-                </a:solidFill>
-                <a:effectLst/>
-                <a:latin typeface="+mn-lt"/>
-                <a:ea typeface="+mn-ea"/>
-                <a:cs typeface="+mn-cs"/>
-              </a:rPr>
-            </a:br>
-            <a:endParaRPr lang="en-US" sz="1200" b="0" kern="1200" dirty="0">
-              <a:solidFill>
-                <a:schemeClr val="tx1"/>
-              </a:solidFill>
-              <a:effectLst/>
-              <a:latin typeface="+mn-lt"/>
-              <a:ea typeface="+mn-ea"/>
-              <a:cs typeface="+mn-cs"/>
-            </a:endParaRPr>
-          </a:p>
-          <a:p>
-            <a:r>
-              <a:rPr lang="en-US" sz="1200" b="0" kern="1200" dirty="0">
-                <a:solidFill>
-                  <a:schemeClr val="tx1"/>
-                </a:solidFill>
-                <a:effectLst/>
-                <a:latin typeface="+mn-lt"/>
-                <a:ea typeface="+mn-ea"/>
-                <a:cs typeface="+mn-cs"/>
-              </a:rPr>
-              <a:t>That is why this plugin is so valuable conceptually. It is flexible enough for service delivery, but also very interesting for research design, because it allows different communication models inside the same framework while keeping therapist oversight and responsibility in place.</a:t>
+              <a:t>This is the most distinctive plugin in the current platform.</a:t>
+            </a:r>
+          </a:p>
+          <a:p/>
+          <a:p>
+            <a:r>
+              <a:t>The key idea is supervised communication. A user can interact with AI, but therapists remain present through a dedicated dashboard where they can review conversations, intervene, send their own messages, create notes, generate drafts, and manage risk status.</a:t>
+            </a:r>
+          </a:p>
+          <a:p/>
+          <a:p>
+            <a:r>
+              <a:t>It is also important that the plugin can run without AI. That allows controlled comparison between AI-supported and human-only communication inside the same framework.</a:t>
+            </a:r>
+          </a:p>
+          <a:p/>
+          <a:p>
+            <a:r>
+              <a:t>That makes it interesting not only for practice, but also for research.</a:t>
             </a:r>
           </a:p>
         </p:txBody>
@@ -3855,103 +2235,25 @@
           <a:lstStyle/>
           <a:p>
             <a:r>
-              <a:rPr lang="en-US" sz="1200" b="0" kern="1200" dirty="0">
-                <a:solidFill>
-                  <a:schemeClr val="tx1"/>
-                </a:solidFill>
-                <a:effectLst/>
-                <a:latin typeface="+mn-lt"/>
-                <a:ea typeface="+mn-ea"/>
-                <a:cs typeface="+mn-cs"/>
-              </a:rPr>
-              <a:t>The mobile app is important because many digital programs only become useful when they leave the desktop.</a:t>
-            </a:r>
-          </a:p>
-          <a:p>
-            <a:endParaRPr lang="en-US" sz="1200" b="0" kern="1200" dirty="0">
-              <a:solidFill>
-                <a:schemeClr val="tx1"/>
-              </a:solidFill>
-              <a:effectLst/>
-              <a:latin typeface="+mn-lt"/>
-              <a:ea typeface="+mn-ea"/>
-              <a:cs typeface="+mn-cs"/>
-            </a:endParaRPr>
-          </a:p>
-          <a:p>
-            <a:r>
-              <a:rPr lang="en-US" sz="1200" b="0" kern="1200" dirty="0" err="1">
-                <a:solidFill>
-                  <a:schemeClr val="tx1"/>
-                </a:solidFill>
-                <a:effectLst/>
-                <a:latin typeface="+mn-lt"/>
-                <a:ea typeface="+mn-ea"/>
-                <a:cs typeface="+mn-cs"/>
-              </a:rPr>
-              <a:t>SelfHelp</a:t>
-            </a:r>
-            <a:r>
-              <a:rPr lang="en-US" sz="1200" b="0" kern="1200" dirty="0">
-                <a:solidFill>
-                  <a:schemeClr val="tx1"/>
-                </a:solidFill>
-                <a:effectLst/>
-                <a:latin typeface="+mn-lt"/>
-                <a:ea typeface="+mn-ea"/>
-                <a:cs typeface="+mn-cs"/>
-              </a:rPr>
-              <a:t> already has a mobile frontend that works with the same platform logic. Surveys, AI chat, therapy chat, notifications, camera-based input, and microphone-based input are already part of that picture.</a:t>
-            </a:r>
-          </a:p>
-          <a:p>
-            <a:endParaRPr lang="en-US" sz="1200" b="0" kern="1200" dirty="0">
-              <a:solidFill>
-                <a:schemeClr val="tx1"/>
-              </a:solidFill>
-              <a:effectLst/>
-              <a:latin typeface="+mn-lt"/>
-              <a:ea typeface="+mn-ea"/>
-              <a:cs typeface="+mn-cs"/>
-            </a:endParaRPr>
-          </a:p>
-          <a:p>
-            <a:r>
-              <a:rPr lang="en-US" sz="1200" b="0" kern="1200" dirty="0">
-                <a:solidFill>
-                  <a:schemeClr val="tx1"/>
-                </a:solidFill>
-                <a:effectLst/>
-                <a:latin typeface="+mn-lt"/>
-                <a:ea typeface="+mn-ea"/>
-                <a:cs typeface="+mn-cs"/>
-              </a:rPr>
-              <a:t>That matters because repeated interaction often happens in the middle of daily life. A system that can only be used from a desktop browser is much more limited. The mobile app makes check-ins, reflections, uploads, and conversations easier and more natural.</a:t>
-            </a:r>
-          </a:p>
-          <a:p>
-            <a:endParaRPr lang="en-US" sz="1200" b="0" kern="1200" dirty="0">
-              <a:solidFill>
-                <a:schemeClr val="tx1"/>
-              </a:solidFill>
-              <a:effectLst/>
-              <a:latin typeface="+mn-lt"/>
-              <a:ea typeface="+mn-ea"/>
-              <a:cs typeface="+mn-cs"/>
-            </a:endParaRPr>
-          </a:p>
-          <a:p>
-            <a:r>
-              <a:rPr lang="en-US" sz="1200" b="0" kern="1200" dirty="0">
-                <a:solidFill>
-                  <a:schemeClr val="tx1"/>
-                </a:solidFill>
-                <a:effectLst/>
-                <a:latin typeface="+mn-lt"/>
-                <a:ea typeface="+mn-ea"/>
-                <a:cs typeface="+mn-cs"/>
-              </a:rPr>
-              <a:t>So the platform is not just able to publish content. It can stay present where real use actually happens.</a:t>
+              <a:t>The mobile app is important because complete digital programs rarely stay on the desktop.</a:t>
+            </a:r>
+          </a:p>
+          <a:p/>
+          <a:p>
+            <a:r>
+              <a:t>SelfHelp already has a mobile frontend that uses the same platform logic. Surveys, AI chat, therapy chat, notifications, camera-based input, and microphone-based input are already part of that picture.</a:t>
+            </a:r>
+          </a:p>
+          <a:p/>
+          <a:p>
+            <a:r>
+              <a:t>That matters because repeated interaction often happens in the middle of daily life. The mobile app makes check-ins, uploads, reflections, and conversations more natural.</a:t>
+            </a:r>
+          </a:p>
+          <a:p/>
+          <a:p>
+            <a:r>
+              <a:t>So the same program can stay with the user across different situations, instead of being split across separate tools.</a:t>
             </a:r>
           </a:p>
         </p:txBody>
@@ -19929,16 +18231,7 @@
           <a:lstStyle/>
           <a:p>
             <a:r>
-              <a:rPr lang="en-US" dirty="0"/>
-              <a:t>Mobile App: Bringing </a:t>
-            </a:r>
-            <a:r>
-              <a:rPr lang="en-US" dirty="0" err="1"/>
-              <a:t>SelfHelp</a:t>
-            </a:r>
-            <a:r>
-              <a:rPr lang="en-US" dirty="0"/>
-              <a:t> into Daily Use</a:t>
+              <a:t>Mobile App</a:t>
             </a:r>
           </a:p>
         </p:txBody>
@@ -19976,8 +18269,7 @@
               <a:buChar char="•"/>
             </a:pPr>
             <a:r>
-              <a:rPr lang="en-US" dirty="0"/>
-              <a:t>The mobile app uses the same platform logic through mobile-ready JSON output</a:t>
+              <a:t>The same program logic can continue on mobile</a:t>
             </a:r>
           </a:p>
           <a:p>
@@ -19986,8 +18278,7 @@
               <a:buChar char="•"/>
             </a:pPr>
             <a:r>
-              <a:rPr lang="en-US" dirty="0"/>
-              <a:t>It already supports surveys, AI chat, therapy chat, notifications, camera, and microphone</a:t>
+              <a:t>Surveys, AI chat, therapy chat, notifications, camera, and microphone are already supported</a:t>
             </a:r>
           </a:p>
           <a:p>
@@ -19996,8 +18287,7 @@
               <a:buChar char="•"/>
             </a:pPr>
             <a:r>
-              <a:rPr lang="en-US" dirty="0"/>
-              <a:t>This enables repeated interaction in real contexts, not only desktop sessions</a:t>
+              <a:t>This makes repeated real-world interaction much easier</a:t>
             </a:r>
           </a:p>
           <a:p>
@@ -20006,8 +18296,7 @@
               <a:buChar char="•"/>
             </a:pPr>
             <a:r>
-              <a:rPr lang="en-US" dirty="0"/>
-              <a:t>Mobile support increases adherence, timeliness, and day-to-day relevance</a:t>
+              <a:t>SelfHelp becomes part of daily use, not only desktop use</a:t>
             </a:r>
           </a:p>
           <a:p>
@@ -20015,14 +18304,6 @@
               <a:buFont typeface="Arial" panose="020B0604020202020204" pitchFamily="34" charset="0"/>
               <a:buChar char="•"/>
             </a:pPr>
-            <a:r>
-              <a:rPr lang="en-US" dirty="0" err="1"/>
-              <a:t>SelfHelp</a:t>
-            </a:r>
-            <a:r>
-              <a:rPr lang="en-US" dirty="0"/>
-              <a:t> becomes a living service, not just a web portal</a:t>
-            </a:r>
           </a:p>
         </p:txBody>
       </p:sp>
@@ -20092,16 +18373,7 @@
           <a:lstStyle/>
           <a:p>
             <a:r>
-              <a:rPr lang="en-US" dirty="0"/>
-              <a:t>How </a:t>
-            </a:r>
-            <a:r>
-              <a:rPr lang="en-US" dirty="0" err="1"/>
-              <a:t>SelfHelp</a:t>
-            </a:r>
-            <a:r>
-              <a:rPr lang="en-US" dirty="0"/>
-              <a:t> Compares to Existing Open, Self-Hosted Options</a:t>
+              <a:t>Alternatives</a:t>
             </a:r>
           </a:p>
         </p:txBody>
@@ -20139,12 +18411,7 @@
               <a:buChar char="•"/>
             </a:pPr>
             <a:r>
-              <a:rPr lang="en-US" dirty="0" err="1"/>
-              <a:t>LimeSurvey</a:t>
-            </a:r>
-            <a:r>
-              <a:rPr lang="en-US" dirty="0"/>
-              <a:t> is excellent for surveys, but it is primarily a survey product</a:t>
+              <a:t>LimeSurvey is strong for surveys</a:t>
             </a:r>
           </a:p>
           <a:p>
@@ -20153,16 +18420,7 @@
               <a:buChar char="•"/>
             </a:pPr>
             <a:r>
-              <a:rPr lang="en-US" dirty="0"/>
-              <a:t>JATOS and </a:t>
-            </a:r>
-            <a:r>
-              <a:rPr lang="en-US" dirty="0" err="1"/>
-              <a:t>formr</a:t>
-            </a:r>
-            <a:r>
-              <a:rPr lang="en-US" dirty="0"/>
-              <a:t> are strong for online studies, yet they are less suited to content-rich program delivery</a:t>
+              <a:t>JATOS and formr are strong for online studies</a:t>
             </a:r>
           </a:p>
           <a:p>
@@ -20171,8 +18429,7 @@
               <a:buChar char="•"/>
             </a:pPr>
             <a:r>
-              <a:rPr lang="en-US" dirty="0"/>
-              <a:t>Moodle is strong for learning delivery, but it is not built around intervention workflows or supervised support logic</a:t>
+              <a:t>Moodle is strong for learning delivery</a:t>
             </a:r>
           </a:p>
           <a:p>
@@ -20181,12 +18438,7 @@
               <a:buChar char="•"/>
             </a:pPr>
             <a:r>
-              <a:rPr lang="en-US" dirty="0" err="1"/>
-              <a:t>SelfHelp</a:t>
-            </a:r>
-            <a:r>
-              <a:rPr lang="en-US" dirty="0"/>
-              <a:t> brings content, assessments, workflows, mobile, permissions, and AI into one coherent stack</a:t>
+              <a:t>SelfHelp is strongest when everything needs to stay connected</a:t>
             </a:r>
           </a:p>
           <a:p>
@@ -20194,10 +18446,6 @@
               <a:buFont typeface="Arial" panose="020B0604020202020204" pitchFamily="34" charset="0"/>
               <a:buChar char="•"/>
             </a:pPr>
-            <a:r>
-              <a:rPr lang="en-US" dirty="0"/>
-              <a:t>Its advantage is not one feature in isolation, but the fact that the pieces already work together</a:t>
-            </a:r>
           </a:p>
         </p:txBody>
       </p:sp>
@@ -20267,16 +18515,7 @@
           <a:lstStyle/>
           <a:p>
             <a:r>
-              <a:rPr lang="en-US" dirty="0"/>
-              <a:t> </a:t>
-            </a:r>
-            <a:r>
-              <a:rPr lang="en-US" dirty="0" err="1"/>
-              <a:t>SelfHelp</a:t>
-            </a:r>
-            <a:r>
-              <a:rPr lang="en-US" dirty="0"/>
-              <a:t> 2: Why the Redesign Matters</a:t>
+              <a:t>Why Use SelfHelp</a:t>
             </a:r>
           </a:p>
         </p:txBody>
@@ -20314,12 +18553,7 @@
               <a:buChar char="•"/>
             </a:pPr>
             <a:r>
-              <a:rPr lang="en-US" dirty="0" err="1"/>
-              <a:t>SelfHelp</a:t>
-            </a:r>
-            <a:r>
-              <a:rPr lang="en-US" dirty="0"/>
-              <a:t> 2 is moving toward a cleaner API-first backend and modern frontend</a:t>
+              <a:t>One platform for complete digital programs</a:t>
             </a:r>
           </a:p>
           <a:p>
@@ -20328,8 +18562,7 @@
               <a:buChar char="•"/>
             </a:pPr>
             <a:r>
-              <a:rPr lang="en-US" dirty="0"/>
-              <a:t>Page structure, section logic, and publishing become more explicit and maintainable</a:t>
+              <a:t>One structure across content, data, workflows, mobile, and AI</a:t>
             </a:r>
           </a:p>
           <a:p>
@@ -20338,8 +18571,7 @@
               <a:buChar char="•"/>
             </a:pPr>
             <a:r>
-              <a:rPr lang="en-US" dirty="0"/>
-              <a:t>The new architecture should make future plugins and interfaces easier to build</a:t>
+              <a:t>Local control plus flexibility for future development</a:t>
             </a:r>
           </a:p>
           <a:p>
@@ -20348,8 +18580,7 @@
               <a:buChar char="•"/>
             </a:pPr>
             <a:r>
-              <a:rPr lang="en-US" dirty="0"/>
-              <a:t>A key strategic goal is structured page JSON that LLMs can generate or adapt</a:t>
+              <a:t>SelfHelp 2 can make the platform even more structured and easier to extend</a:t>
             </a:r>
           </a:p>
           <a:p>
@@ -20357,10 +18588,6 @@
               <a:buFont typeface="Arial" panose="020B0604020202020204" pitchFamily="34" charset="0"/>
               <a:buChar char="•"/>
             </a:pPr>
-            <a:r>
-              <a:rPr lang="en-US" dirty="0"/>
-              <a:t>The redesign is therefore not cosmetic; it prepares the platform for faster, safer content creation</a:t>
-            </a:r>
           </a:p>
         </p:txBody>
       </p:sp>
@@ -20378,353 +18605,6 @@
 </file>
 
 <file path=ppt/slides/slide13.xml><?xml version="1.0" encoding="utf-8"?>
-<p:sld xmlns:a="http://schemas.openxmlformats.org/drawingml/2006/main" xmlns:r="http://schemas.openxmlformats.org/officeDocument/2006/relationships" xmlns:p="http://schemas.openxmlformats.org/presentationml/2006/main">
-  <p:cSld>
-    <p:spTree>
-      <p:nvGrpSpPr>
-        <p:cNvPr id="1" name="">
-          <a:extLst>
-            <a:ext uri="{FF2B5EF4-FFF2-40B4-BE49-F238E27FC236}">
-              <a16:creationId xmlns:a16="http://schemas.microsoft.com/office/drawing/2014/main" id="{DE8B036C-361C-3558-5FBF-69CEB643A21F}"/>
-            </a:ext>
-          </a:extLst>
-        </p:cNvPr>
-        <p:cNvGrpSpPr/>
-        <p:nvPr/>
-      </p:nvGrpSpPr>
-      <p:grpSpPr>
-        <a:xfrm>
-          <a:off x="0" y="0"/>
-          <a:ext cx="0" cy="0"/>
-          <a:chOff x="0" y="0"/>
-          <a:chExt cx="0" cy="0"/>
-        </a:xfrm>
-      </p:grpSpPr>
-      <p:sp>
-        <p:nvSpPr>
-          <p:cNvPr id="6" name="Titel 5">
-            <a:extLst>
-              <a:ext uri="{FF2B5EF4-FFF2-40B4-BE49-F238E27FC236}">
-                <a16:creationId xmlns:a16="http://schemas.microsoft.com/office/drawing/2014/main" id="{366628C4-4F5A-BB1E-2C95-C32CEECA8DF3}"/>
-              </a:ext>
-            </a:extLst>
-          </p:cNvPr>
-          <p:cNvSpPr>
-            <a:spLocks noGrp="1" noRot="1" noMove="1" noResize="1" noEditPoints="1" noAdjustHandles="1" noChangeArrowheads="1" noChangeShapeType="1"/>
-          </p:cNvSpPr>
-          <p:nvPr>
-            <p:ph type="title"/>
-            <p:custDataLst>
-              <p:tags r:id="rId1"/>
-            </p:custDataLst>
-          </p:nvPr>
-        </p:nvSpPr>
-        <p:spPr>
-          <a:xfrm>
-            <a:off x="540000" y="680400"/>
-            <a:ext cx="7020000" cy="410369"/>
-          </a:xfrm>
-        </p:spPr>
-        <p:txBody>
-          <a:bodyPr/>
-          <a:lstStyle/>
-          <a:p>
-            <a:r>
-              <a:rPr lang="en-US" dirty="0"/>
-              <a:t>Closing: Why </a:t>
-            </a:r>
-            <a:r>
-              <a:rPr lang="en-US" dirty="0" err="1"/>
-              <a:t>SelfHelp</a:t>
-            </a:r>
-            <a:r>
-              <a:rPr lang="en-US" dirty="0"/>
-              <a:t> Matters Now</a:t>
-            </a:r>
-          </a:p>
-        </p:txBody>
-      </p:sp>
-      <p:sp>
-        <p:nvSpPr>
-          <p:cNvPr id="17" name="TextBox 16">
-            <a:extLst>
-              <a:ext uri="{FF2B5EF4-FFF2-40B4-BE49-F238E27FC236}">
-                <a16:creationId xmlns:a16="http://schemas.microsoft.com/office/drawing/2014/main" id="{264F70EF-3120-A13D-D0F3-20EC073D8B41}"/>
-              </a:ext>
-            </a:extLst>
-          </p:cNvPr>
-          <p:cNvSpPr txBox="1"/>
-          <p:nvPr/>
-        </p:nvSpPr>
-        <p:spPr>
-          <a:xfrm>
-            <a:off x="128016" y="2194560"/>
-            <a:ext cx="6044184" cy="2031325"/>
-          </a:xfrm>
-          <a:prstGeom prst="rect">
-            <a:avLst/>
-          </a:prstGeom>
-          <a:noFill/>
-        </p:spPr>
-        <p:txBody>
-          <a:bodyPr wrap="square" rtlCol="0">
-            <a:spAutoFit/>
-          </a:bodyPr>
-          <a:lstStyle/>
-          <a:p>
-            <a:pPr marL="285750" indent="-285750">
-              <a:buFont typeface="Arial" panose="020B0604020202020204" pitchFamily="34" charset="0"/>
-              <a:buChar char="•"/>
-            </a:pPr>
-            <a:r>
-              <a:rPr lang="en-US" dirty="0"/>
-              <a:t>One platform for digital research, teaching, and support programs</a:t>
-            </a:r>
-          </a:p>
-          <a:p>
-            <a:pPr marL="285750" indent="-285750">
-              <a:buFont typeface="Arial" panose="020B0604020202020204" pitchFamily="34" charset="0"/>
-              <a:buChar char="•"/>
-            </a:pPr>
-            <a:r>
-              <a:rPr lang="en-US" dirty="0"/>
-              <a:t>One structure across web, mobile, workflows, and AI</a:t>
-            </a:r>
-          </a:p>
-          <a:p>
-            <a:pPr marL="285750" indent="-285750">
-              <a:buFont typeface="Arial" panose="020B0604020202020204" pitchFamily="34" charset="0"/>
-              <a:buChar char="•"/>
-            </a:pPr>
-            <a:r>
-              <a:rPr lang="en-US" dirty="0"/>
-              <a:t>One locally controlled foundation that can keep growing with university needs</a:t>
-            </a:r>
-          </a:p>
-          <a:p>
-            <a:pPr marL="285750" indent="-285750">
-              <a:buFont typeface="Arial" panose="020B0604020202020204" pitchFamily="34" charset="0"/>
-              <a:buChar char="•"/>
-            </a:pPr>
-            <a:r>
-              <a:rPr lang="en-US" dirty="0" err="1"/>
-              <a:t>SelfHelp</a:t>
-            </a:r>
-            <a:r>
-              <a:rPr lang="en-US" dirty="0"/>
-              <a:t> 2 can make content creation faster, more structured, and eventually AI-assisted</a:t>
-            </a:r>
-          </a:p>
-        </p:txBody>
-      </p:sp>
-    </p:spTree>
-    <p:extLst>
-      <p:ext uri="{BB962C8B-B14F-4D97-AF65-F5344CB8AC3E}">
-        <p14:creationId xmlns:p14="http://schemas.microsoft.com/office/powerpoint/2010/main" val="1302012921"/>
-      </p:ext>
-    </p:extLst>
-  </p:cSld>
-  <p:clrMapOvr>
-    <a:masterClrMapping/>
-  </p:clrMapOvr>
-</p:sld>
-</file>
-
-<file path=ppt/slides/slide14.xml><?xml version="1.0" encoding="utf-8"?>
-<p:sld xmlns:a="http://schemas.openxmlformats.org/drawingml/2006/main" xmlns:r="http://schemas.openxmlformats.org/officeDocument/2006/relationships" xmlns:p="http://schemas.openxmlformats.org/presentationml/2006/main">
-  <p:cSld>
-    <p:spTree>
-      <p:nvGrpSpPr>
-        <p:cNvPr id="1" name=""/>
-        <p:cNvGrpSpPr/>
-        <p:nvPr/>
-      </p:nvGrpSpPr>
-      <p:grpSpPr>
-        <a:xfrm>
-          <a:off x="0" y="0"/>
-          <a:ext cx="0" cy="0"/>
-          <a:chOff x="0" y="0"/>
-          <a:chExt cx="0" cy="0"/>
-        </a:xfrm>
-      </p:grpSpPr>
-      <p:sp>
-        <p:nvSpPr>
-          <p:cNvPr id="6" name="Titel 5">
-            <a:extLst>
-              <a:ext uri="{FF2B5EF4-FFF2-40B4-BE49-F238E27FC236}">
-                <a16:creationId xmlns:a16="http://schemas.microsoft.com/office/drawing/2014/main" id="{54714233-AEC6-FF45-AC0E-9715865E27CA}"/>
-              </a:ext>
-            </a:extLst>
-          </p:cNvPr>
-          <p:cNvSpPr>
-            <a:spLocks noGrp="1" noRot="1" noMove="1" noResize="1" noEditPoints="1" noAdjustHandles="1" noChangeArrowheads="1" noChangeShapeType="1"/>
-          </p:cNvSpPr>
-          <p:nvPr>
-            <p:ph type="title"/>
-            <p:custDataLst>
-              <p:tags r:id="rId1"/>
-            </p:custDataLst>
-          </p:nvPr>
-        </p:nvSpPr>
-        <p:spPr/>
-        <p:txBody>
-          <a:bodyPr/>
-          <a:lstStyle/>
-          <a:p>
-            <a:r>
-              <a:rPr lang="de-DE" dirty="0"/>
-              <a:t>References</a:t>
-            </a:r>
-          </a:p>
-        </p:txBody>
-      </p:sp>
-      <p:sp>
-        <p:nvSpPr>
-          <p:cNvPr id="7" name="TextBox 6"/>
-          <p:cNvSpPr txBox="1"/>
-          <p:nvPr/>
-        </p:nvSpPr>
-        <p:spPr>
-          <a:xfrm>
-            <a:off x="128016" y="2194560"/>
-            <a:ext cx="8177784" cy="2343655"/>
-          </a:xfrm>
-          <a:prstGeom prst="rect">
-            <a:avLst/>
-          </a:prstGeom>
-          <a:noFill/>
-        </p:spPr>
-        <p:txBody>
-          <a:bodyPr wrap="square" rtlCol="0">
-            <a:spAutoFit/>
-          </a:bodyPr>
-          <a:lstStyle/>
-          <a:p>
-            <a:pPr marL="342900" lvl="0" indent="-342900">
-              <a:lnSpc>
-                <a:spcPct val="150000"/>
-              </a:lnSpc>
-              <a:buFont typeface="Wingdings" panose="05000000000000000000" pitchFamily="2" charset="2"/>
-              <a:buChar char="§"/>
-              <a:defRPr/>
-            </a:pPr>
-            <a:r>
-              <a:rPr lang="en-US" sz="2000" dirty="0">
-                <a:latin typeface="Arial" panose="020B0604020202020204" pitchFamily="34" charset="0"/>
-                <a:cs typeface="Arial" panose="020B0604020202020204" pitchFamily="34" charset="0"/>
-                <a:hlinkClick r:id="rId3"/>
-              </a:rPr>
-              <a:t>https://github.com/humdek-unibe-ch/sh-selfhelp</a:t>
-            </a:r>
-            <a:endParaRPr lang="en-US" sz="2000" dirty="0">
-              <a:latin typeface="Arial" panose="020B0604020202020204" pitchFamily="34" charset="0"/>
-              <a:cs typeface="Arial" panose="020B0604020202020204" pitchFamily="34" charset="0"/>
-            </a:endParaRPr>
-          </a:p>
-          <a:p>
-            <a:pPr marL="342900" lvl="0" indent="-342900">
-              <a:lnSpc>
-                <a:spcPct val="150000"/>
-              </a:lnSpc>
-              <a:buFont typeface="Wingdings" panose="05000000000000000000" pitchFamily="2" charset="2"/>
-              <a:buChar char="§"/>
-              <a:defRPr/>
-            </a:pPr>
-            <a:r>
-              <a:rPr lang="en-US" sz="2000" dirty="0">
-                <a:latin typeface="Arial" panose="020B0604020202020204" pitchFamily="34" charset="0"/>
-                <a:cs typeface="Arial" panose="020B0604020202020204" pitchFamily="34" charset="0"/>
-                <a:hlinkClick r:id="rId4"/>
-              </a:rPr>
-              <a:t>https://github.com/humdek-unibe-ch/sh-selfhelp_app</a:t>
-            </a:r>
-            <a:endParaRPr lang="en-US" sz="2000" dirty="0">
-              <a:latin typeface="Arial" panose="020B0604020202020204" pitchFamily="34" charset="0"/>
-              <a:cs typeface="Arial" panose="020B0604020202020204" pitchFamily="34" charset="0"/>
-            </a:endParaRPr>
-          </a:p>
-          <a:p>
-            <a:pPr marL="342900" lvl="0" indent="-342900">
-              <a:lnSpc>
-                <a:spcPct val="150000"/>
-              </a:lnSpc>
-              <a:buFont typeface="Wingdings" panose="05000000000000000000" pitchFamily="2" charset="2"/>
-              <a:buChar char="§"/>
-              <a:defRPr/>
-            </a:pPr>
-            <a:r>
-              <a:rPr lang="en-US" sz="2000" dirty="0">
-                <a:latin typeface="Arial" panose="020B0604020202020204" pitchFamily="34" charset="0"/>
-                <a:cs typeface="Arial" panose="020B0604020202020204" pitchFamily="34" charset="0"/>
-                <a:hlinkClick r:id="rId5"/>
-              </a:rPr>
-              <a:t>https://github.com/humdek-unibe-ch/sh-shp-survey_js</a:t>
-            </a:r>
-            <a:endParaRPr lang="en-US" sz="2000" dirty="0">
-              <a:latin typeface="Arial" panose="020B0604020202020204" pitchFamily="34" charset="0"/>
-              <a:cs typeface="Arial" panose="020B0604020202020204" pitchFamily="34" charset="0"/>
-            </a:endParaRPr>
-          </a:p>
-          <a:p>
-            <a:pPr marL="342900" lvl="0" indent="-342900">
-              <a:lnSpc>
-                <a:spcPct val="150000"/>
-              </a:lnSpc>
-              <a:buFont typeface="Wingdings" panose="05000000000000000000" pitchFamily="2" charset="2"/>
-              <a:buChar char="§"/>
-              <a:defRPr/>
-            </a:pPr>
-            <a:r>
-              <a:rPr lang="en-US" sz="2000" dirty="0">
-                <a:latin typeface="Arial" panose="020B0604020202020204" pitchFamily="34" charset="0"/>
-                <a:cs typeface="Arial" panose="020B0604020202020204" pitchFamily="34" charset="0"/>
-                <a:hlinkClick r:id="rId6"/>
-              </a:rPr>
-              <a:t>https://github.com/humdek-unibe-ch/sh-shp-llm</a:t>
-            </a:r>
-            <a:endParaRPr lang="en-US" sz="2000" dirty="0">
-              <a:latin typeface="Arial" panose="020B0604020202020204" pitchFamily="34" charset="0"/>
-              <a:cs typeface="Arial" panose="020B0604020202020204" pitchFamily="34" charset="0"/>
-            </a:endParaRPr>
-          </a:p>
-          <a:p>
-            <a:pPr marL="342900" lvl="0" indent="-342900">
-              <a:lnSpc>
-                <a:spcPct val="150000"/>
-              </a:lnSpc>
-              <a:buFont typeface="Wingdings" panose="05000000000000000000" pitchFamily="2" charset="2"/>
-              <a:buChar char="§"/>
-              <a:defRPr/>
-            </a:pPr>
-            <a:r>
-              <a:rPr lang="en-US" sz="2000" dirty="0">
-                <a:latin typeface="Arial" panose="020B0604020202020204" pitchFamily="34" charset="0"/>
-                <a:cs typeface="Arial" panose="020B0604020202020204" pitchFamily="34" charset="0"/>
-                <a:hlinkClick r:id="rId7"/>
-              </a:rPr>
-              <a:t>https://github.com/humdek-unibe-ch/sh-shp-llm_therapy_chat</a:t>
-            </a:r>
-            <a:endParaRPr lang="en-US" sz="2000" dirty="0">
-              <a:latin typeface="Arial" panose="020B0604020202020204" pitchFamily="34" charset="0"/>
-              <a:cs typeface="Arial" panose="020B0604020202020204" pitchFamily="34" charset="0"/>
-            </a:endParaRPr>
-          </a:p>
-        </p:txBody>
-      </p:sp>
-    </p:spTree>
-    <p:extLst>
-      <p:ext uri="{BB962C8B-B14F-4D97-AF65-F5344CB8AC3E}">
-        <p14:creationId xmlns:p14="http://schemas.microsoft.com/office/powerpoint/2010/main" val="1343811897"/>
-      </p:ext>
-    </p:extLst>
-  </p:cSld>
-  <p:clrMapOvr>
-    <a:masterClrMapping/>
-  </p:clrMapOvr>
-</p:sld>
-</file>
-
-<file path=ppt/slides/slide15.xml><?xml version="1.0" encoding="utf-8"?>
 <p:sld xmlns:a="http://schemas.openxmlformats.org/drawingml/2006/main" xmlns:r="http://schemas.openxmlformats.org/officeDocument/2006/relationships" xmlns:p="http://schemas.openxmlformats.org/presentationml/2006/main">
   <p:cSld>
     <p:spTree>
@@ -20971,12 +18851,7 @@
           <a:lstStyle/>
           <a:p>
             <a:r>
-              <a:rPr lang="en-US" dirty="0" err="1"/>
-              <a:t>SelfHelp</a:t>
-            </a:r>
-            <a:r>
-              <a:rPr lang="en-US" dirty="0"/>
-              <a:t>: A Platform for Digital Programs, Research and Support</a:t>
+              <a:t>SelfHelp at the Faculty Meeting</a:t>
             </a:r>
           </a:p>
         </p:txBody>
@@ -21009,12 +18884,7 @@
               <a:defRPr/>
             </a:pPr>
             <a:r>
-              <a:rPr lang="en-US" dirty="0" err="1"/>
-              <a:t>SelfHelp</a:t>
-            </a:r>
-            <a:r>
-              <a:rPr lang="en-US" dirty="0"/>
-              <a:t> began as a self-help and research website platform</a:t>
+              <a:t>We already presented SelfHelp here in 2021</a:t>
             </a:r>
             <a:endParaRPr lang="de-DE" sz="2000" dirty="0">
               <a:latin typeface="Arial" panose="020B0604020202020204" pitchFamily="34" charset="0"/>
@@ -21028,8 +18898,7 @@
               <a:defRPr/>
             </a:pPr>
             <a:r>
-              <a:rPr lang="en-US" dirty="0"/>
-              <a:t>It has grown into a modular system for content, data, workflows, mobile, and AI</a:t>
+              <a:t>Since then, the platform has evolved significantly</a:t>
             </a:r>
             <a:endParaRPr lang="de-DE" sz="2000" dirty="0">
               <a:latin typeface="Arial" panose="020B0604020202020204" pitchFamily="34" charset="0"/>
@@ -21043,8 +18912,7 @@
               <a:defRPr/>
             </a:pPr>
             <a:r>
-              <a:rPr lang="en-US" dirty="0"/>
-              <a:t>It is designed for real programs, not just isolated pages or forms</a:t>
+              <a:t>Today, SelfHelp is no longer just a website system</a:t>
             </a:r>
           </a:p>
           <a:p>
@@ -21054,8 +18922,7 @@
               <a:defRPr/>
             </a:pPr>
             <a:r>
-              <a:rPr lang="en-US" dirty="0"/>
-              <a:t>The value is practical: build, run, adapt, and monitor digital interventions in one place</a:t>
+              <a:t>It is a platform for complete digital programs</a:t>
             </a:r>
           </a:p>
           <a:p>
@@ -21123,16 +18990,7 @@
           <a:lstStyle/>
           <a:p>
             <a:r>
-              <a:rPr lang="en-US" dirty="0"/>
-              <a:t>What </a:t>
-            </a:r>
-            <a:r>
-              <a:rPr lang="en-US" dirty="0" err="1"/>
-              <a:t>SelfHelp</a:t>
-            </a:r>
-            <a:r>
-              <a:rPr lang="en-US" dirty="0"/>
-              <a:t> Is</a:t>
+              <a:t>What SelfHelp Is</a:t>
             </a:r>
           </a:p>
         </p:txBody>
@@ -21165,8 +19023,7 @@
               <a:defRPr/>
             </a:pPr>
             <a:r>
-              <a:rPr lang="en-US" dirty="0"/>
-              <a:t>A modular platform for building digital programs with reusable components</a:t>
+              <a:t>A modular platform for running digital programs</a:t>
             </a:r>
           </a:p>
           <a:p>
@@ -21176,8 +19033,7 @@
               <a:defRPr/>
             </a:pPr>
             <a:r>
-              <a:rPr lang="en-US" dirty="0"/>
-              <a:t>The same system handles content, data collection, automation, permissions, and mobile output</a:t>
+              <a:t>Brings content, assessments, workflows, and mobile delivery into one system</a:t>
             </a:r>
           </a:p>
           <a:p>
@@ -21187,8 +19043,7 @@
               <a:defRPr/>
             </a:pPr>
             <a:r>
-              <a:rPr lang="en-US" dirty="0"/>
-              <a:t>It supports institutional hosting and strong control over sensitive data</a:t>
+              <a:t>Reusable components make projects faster to build and easier to adapt</a:t>
             </a:r>
           </a:p>
           <a:p>
@@ -21198,8 +19053,7 @@
               <a:defRPr/>
             </a:pPr>
             <a:r>
-              <a:rPr lang="en-US" dirty="0"/>
-              <a:t>Many use cases can be configured through the CMS rather than custom-coded from scratch</a:t>
+              <a:t>Can be hosted under university control</a:t>
             </a:r>
           </a:p>
           <a:p>
@@ -21208,10 +19062,6 @@
               <a:buChar char="§"/>
               <a:defRPr/>
             </a:pPr>
-            <a:r>
-              <a:rPr lang="en-US" dirty="0"/>
-              <a:t>A plugin architecture allows the platform to grow without breaking the core</a:t>
-            </a:r>
           </a:p>
           <a:p>
             <a:pPr marL="342900" indent="-342900">
@@ -21278,16 +19128,7 @@
           <a:lstStyle/>
           <a:p>
             <a:r>
-              <a:rPr lang="en-US" dirty="0"/>
-              <a:t>How </a:t>
-            </a:r>
-            <a:r>
-              <a:rPr lang="en-US" dirty="0" err="1"/>
-              <a:t>SelfHelp</a:t>
-            </a:r>
-            <a:r>
-              <a:rPr lang="en-US" dirty="0"/>
-              <a:t> Evolved</a:t>
+              <a:t>How SelfHelp Evolved</a:t>
             </a:r>
           </a:p>
         </p:txBody>
@@ -21320,7 +19161,6 @@
               <a:defRPr/>
             </a:pPr>
             <a:r>
-              <a:rPr lang="en-US" dirty="0"/>
               <a:t>2021: positioned as a platform for self-help and research websites</a:t>
             </a:r>
           </a:p>
@@ -21331,7 +19171,6 @@
               <a:defRPr/>
             </a:pPr>
             <a:r>
-              <a:rPr lang="en-US" dirty="0"/>
               <a:t>2023: expanded toward modular pages, scheduling, and mobile integration</a:t>
             </a:r>
           </a:p>
@@ -21342,8 +19181,7 @@
               <a:defRPr/>
             </a:pPr>
             <a:r>
-              <a:rPr lang="en-US" dirty="0"/>
-              <a:t>2024 to 2026: stronger data model, workflows, permissions, 2FA, and live refresh mechanisms</a:t>
+              <a:t>2024 to 2026: stronger data model, workflows, permissions, 2FA, and background processing</a:t>
             </a:r>
           </a:p>
           <a:p>
@@ -21353,7 +19191,6 @@
               <a:defRPr/>
             </a:pPr>
             <a:r>
-              <a:rPr lang="en-US" dirty="0"/>
               <a:t>The newest step is AI: general LLM support and supervised therapy-style chat</a:t>
             </a:r>
           </a:p>
@@ -21364,7 +19201,6 @@
               <a:defRPr/>
             </a:pPr>
             <a:r>
-              <a:rPr lang="en-US" dirty="0"/>
               <a:t>The direction is clear: from content publishing toward structured digital program delivery</a:t>
             </a:r>
           </a:p>
@@ -21433,8 +19269,7 @@
           <a:lstStyle/>
           <a:p>
             <a:r>
-              <a:rPr lang="en-US" dirty="0"/>
-              <a:t>What Teams Can Achieve with It</a:t>
+              <a:t>What Teams Can Do with It</a:t>
             </a:r>
           </a:p>
         </p:txBody>
@@ -21467,8 +19302,7 @@
               <a:defRPr/>
             </a:pPr>
             <a:r>
-              <a:rPr lang="en-US" dirty="0"/>
-              <a:t>Launch digital programs that combine information, interaction, and follow-up</a:t>
+              <a:t>Turn a concept into a guided journey from entry to follow-up</a:t>
             </a:r>
             <a:endParaRPr lang="en-US" sz="2000" dirty="0">
               <a:latin typeface="Arial" panose="020B0604020202020204" pitchFamily="34" charset="0"/>
@@ -21482,8 +19316,7 @@
               <a:defRPr/>
             </a:pPr>
             <a:r>
-              <a:rPr lang="en-US" dirty="0"/>
-              <a:t>Collect structured data, repeated measures, files, voice, and media</a:t>
+              <a:t>Run repeated assessments and collect richer inputs over time</a:t>
             </a:r>
           </a:p>
           <a:p>
@@ -21493,8 +19326,7 @@
               <a:defRPr/>
             </a:pPr>
             <a:r>
-              <a:rPr lang="en-US" dirty="0"/>
-              <a:t> Personalize journeys by role, group, language, condition, or user state</a:t>
+              <a:t>Adapt content and timing by role, group, language, or user state</a:t>
             </a:r>
           </a:p>
           <a:p>
@@ -21504,8 +19336,7 @@
               <a:defRPr/>
             </a:pPr>
             <a:r>
-              <a:rPr lang="en-US" dirty="0"/>
-              <a:t>Automate reminders, notifications, tasks, and triggered actions</a:t>
+              <a:t>Automate reminders, tasks, and next steps as the program progresses</a:t>
             </a:r>
           </a:p>
           <a:p>
@@ -21514,10 +19345,6 @@
               <a:buChar char="§"/>
               <a:defRPr/>
             </a:pPr>
-            <a:r>
-              <a:rPr lang="en-US" dirty="0"/>
-              <a:t>Reach users on web and mobile through one platform logic</a:t>
-            </a:r>
           </a:p>
           <a:p>
             <a:pPr marL="342900" indent="-342900">
@@ -21592,16 +19419,7 @@
           <a:lstStyle/>
           <a:p>
             <a:r>
-              <a:rPr lang="en-US" dirty="0"/>
-              <a:t>Why </a:t>
-            </a:r>
-            <a:r>
-              <a:rPr lang="en-US" dirty="0" err="1"/>
-              <a:t>SelfHelp</a:t>
-            </a:r>
-            <a:r>
-              <a:rPr lang="en-US" dirty="0"/>
-              <a:t> Works as a Platform, Not Just a Tool</a:t>
+              <a:t>How SelfHelp Expands</a:t>
             </a:r>
           </a:p>
         </p:txBody>
@@ -21633,16 +19451,7 @@
               <a:buChar char="•"/>
             </a:pPr>
             <a:r>
-              <a:rPr lang="en-US" dirty="0"/>
-              <a:t>The core already covers pages, sections, </a:t>
-            </a:r>
-            <a:r>
-              <a:rPr lang="en-US" dirty="0" err="1"/>
-              <a:t>dataTables</a:t>
-            </a:r>
-            <a:r>
-              <a:rPr lang="en-US" dirty="0"/>
-              <a:t>, conditions, workflows, and ACL</a:t>
+              <a:t>SelfHelp grows by adding capabilities without breaking the core system</a:t>
             </a:r>
           </a:p>
           <a:p>
@@ -21651,8 +19460,7 @@
               <a:buChar char="•"/>
             </a:pPr>
             <a:r>
-              <a:rPr lang="en-US" dirty="0"/>
-              <a:t>The API layer and mobile rendering connect web, app, and external services</a:t>
+              <a:t>Core supporting plugins: external auth, Lab.js, R, and custom formulas</a:t>
             </a:r>
           </a:p>
           <a:p>
@@ -21661,8 +19469,7 @@
               <a:buChar char="•"/>
             </a:pPr>
             <a:r>
-              <a:rPr lang="en-US" dirty="0"/>
-              <a:t>Survey, experiment, and assessment plugins extend the platform beyond classic forms</a:t>
+              <a:t>These plugins strengthen real academic and institutional workflows</a:t>
             </a:r>
           </a:p>
           <a:p>
@@ -21671,8 +19478,7 @@
               <a:buChar char="•"/>
             </a:pPr>
             <a:r>
-              <a:rPr lang="en-US" dirty="0"/>
-              <a:t>Analysis and scoring can be pushed further through formula and R-based extensions</a:t>
+              <a:t>Today I want to highlight 3 newer plugins that are especially visible and practical</a:t>
             </a:r>
           </a:p>
           <a:p>
@@ -21680,10 +19486,6 @@
               <a:buFont typeface="Arial" panose="020B0604020202020204" pitchFamily="34" charset="0"/>
               <a:buChar char="•"/>
             </a:pPr>
-            <a:r>
-              <a:rPr lang="en-US" dirty="0"/>
-              <a:t>SSO, sensing, notifications, and video integrations make institutional deployment more realistic</a:t>
-            </a:r>
           </a:p>
         </p:txBody>
       </p:sp>
@@ -21753,14 +19555,8 @@
           <a:lstStyle/>
           <a:p>
             <a:r>
-              <a:rPr lang="en-US" dirty="0"/>
-              <a:t> Focus Plugin 1: </a:t>
-            </a:r>
-            <a:r>
-              <a:rPr lang="en-US" dirty="0" err="1"/>
-              <a:t>SurveyJS</a:t>
-            </a:r>
-            <a:endParaRPr lang="en-US" dirty="0"/>
+              <a:t>Featured Plugin 1: SurveyJS</a:t>
+            </a:r>
           </a:p>
         </p:txBody>
       </p:sp>
@@ -21797,8 +19593,7 @@
               <a:buChar char="•"/>
             </a:pPr>
             <a:r>
-              <a:rPr lang="en-US" dirty="0"/>
-              <a:t>Advanced survey creation with versioning, publishing, and scheduling</a:t>
+              <a:t>Versioned survey creation, publishing, and scheduling</a:t>
             </a:r>
           </a:p>
           <a:p>
@@ -21807,8 +19602,7 @@
               <a:buChar char="•"/>
             </a:pPr>
             <a:r>
-              <a:rPr lang="en-US" dirty="0"/>
-              <a:t>Supports autosave, timing metadata, edit mode, access control, and dashboards</a:t>
+              <a:t>Autosave, edit mode, timing metadata, and dashboards</a:t>
             </a:r>
           </a:p>
           <a:p>
@@ -21817,8 +19611,7 @@
               <a:buChar char="•"/>
             </a:pPr>
             <a:r>
-              <a:rPr lang="en-US" dirty="0"/>
-              <a:t>Handles files, PDF export, and voice-record responses</a:t>
+              <a:t>File upload, PDF export, and voice-record responses</a:t>
             </a:r>
           </a:p>
           <a:p>
@@ -21827,8 +19620,7 @@
               <a:buChar char="•"/>
             </a:pPr>
             <a:r>
-              <a:rPr lang="en-US" dirty="0"/>
-              <a:t>Allows dynamic content such as API-driven dropdowns and JSON replacement</a:t>
+              <a:t>Stronger data quality for repeated and longitudinal assessment</a:t>
             </a:r>
           </a:p>
           <a:p>
@@ -21836,10 +19628,6 @@
               <a:buFont typeface="Arial" panose="020B0604020202020204" pitchFamily="34" charset="0"/>
               <a:buChar char="•"/>
             </a:pPr>
-            <a:r>
-              <a:rPr lang="en-US" dirty="0"/>
-              <a:t>Strong fit for repeated assessments, diaries, intake flows, and structured questionnaires</a:t>
-            </a:r>
           </a:p>
         </p:txBody>
       </p:sp>
@@ -21909,8 +19697,7 @@
           <a:lstStyle/>
           <a:p>
             <a:r>
-              <a:rPr lang="en-US" dirty="0"/>
-              <a:t>Focus Plugin 2: LLM</a:t>
+              <a:t>Featured Plugin 2: LLM</a:t>
             </a:r>
           </a:p>
         </p:txBody>
@@ -21948,16 +19735,7 @@
               <a:buChar char="•"/>
             </a:pPr>
             <a:r>
-              <a:rPr lang="en-US" dirty="0"/>
-              <a:t>Adds configurable AI assistants directly inside </a:t>
-            </a:r>
-            <a:r>
-              <a:rPr lang="en-US" dirty="0" err="1"/>
-              <a:t>SelfHelp</a:t>
-            </a:r>
-            <a:r>
-              <a:rPr lang="en-US" dirty="0"/>
-              <a:t> pages</a:t>
+              <a:t>Controlled AI assistants inside SelfHelp pages</a:t>
             </a:r>
           </a:p>
           <a:p>
@@ -21966,8 +19744,7 @@
               <a:buChar char="•"/>
             </a:pPr>
             <a:r>
-              <a:rPr lang="en-US" dirty="0"/>
-              <a:t>Supports text, files, images, and speech-to-text input</a:t>
+              <a:t>Text, file, image, and speech-to-text input</a:t>
             </a:r>
           </a:p>
           <a:p>
@@ -21976,8 +19753,7 @@
               <a:buChar char="•"/>
             </a:pPr>
             <a:r>
-              <a:rPr lang="en-US" dirty="0"/>
-              <a:t>Can return free conversation or structured JSON and form-like outputs</a:t>
+              <a:t>Conversation output or structured JSON output, including OpenAI-style structures</a:t>
             </a:r>
           </a:p>
           <a:p>
@@ -21986,8 +19762,7 @@
               <a:buChar char="•"/>
             </a:pPr>
             <a:r>
-              <a:rPr lang="en-US" dirty="0"/>
-              <a:t>Includes reusable prompt scripts, async execution, and admin monitoring</a:t>
+              <a:t>Prompt Lab for testing, replay, and evaluation before rollout</a:t>
             </a:r>
           </a:p>
           <a:p>
@@ -21995,10 +19770,6 @@
               <a:buFont typeface="Arial" panose="020B0604020202020204" pitchFamily="34" charset="0"/>
               <a:buChar char="•"/>
             </a:pPr>
-            <a:r>
-              <a:rPr lang="en-US" dirty="0"/>
-              <a:t>Prompt Lab enables testing, replay, and evaluation before live rollout</a:t>
-            </a:r>
           </a:p>
         </p:txBody>
       </p:sp>
@@ -22068,8 +19839,7 @@
           <a:lstStyle/>
           <a:p>
             <a:r>
-              <a:rPr lang="en-US" dirty="0"/>
-              <a:t>Focus Plugin 3: LLM Therapy Chat</a:t>
+              <a:t>Featured Plugin 3: LLM Therapy Chat</a:t>
             </a:r>
           </a:p>
         </p:txBody>
@@ -22107,8 +19877,7 @@
               <a:buChar char="•"/>
             </a:pPr>
             <a:r>
-              <a:rPr lang="en-US" dirty="0"/>
-              <a:t>Combines patient-facing AI chat with therapist oversight in one conversation space</a:t>
+              <a:t>AI-supported or human-only communication in the same framework</a:t>
             </a:r>
           </a:p>
           <a:p>
@@ -22117,8 +19886,7 @@
               <a:buChar char="•"/>
             </a:pPr>
             <a:r>
-              <a:rPr lang="en-US" dirty="0"/>
-              <a:t>Therapists get a dashboard with unread counts, alerts, notes, summaries, and drafts</a:t>
+              <a:t>Therapist dashboard with alerts, notes, summaries, and drafts</a:t>
             </a:r>
           </a:p>
           <a:p>
@@ -22127,8 +19895,7 @@
               <a:buChar char="•"/>
             </a:pPr>
             <a:r>
-              <a:rPr lang="en-US" dirty="0"/>
-              <a:t>Users can escalate directly to a human instead of staying only with AI</a:t>
+              <a:t>Direct escalation from AI to human handling</a:t>
             </a:r>
           </a:p>
           <a:p>
@@ -22137,8 +19904,7 @@
               <a:buChar char="•"/>
             </a:pPr>
             <a:r>
-              <a:rPr lang="en-US" dirty="0"/>
-              <a:t>Safety logic can block AI and move the case into human-only mode</a:t>
+              <a:t>Useful for both service delivery and controlled comparison studies</a:t>
             </a:r>
           </a:p>
           <a:p>
@@ -22146,10 +19912,6 @@
               <a:buFont typeface="Arial" panose="020B0604020202020204" pitchFamily="34" charset="0"/>
               <a:buChar char="•"/>
             </a:pPr>
-            <a:r>
-              <a:rPr lang="en-US" dirty="0"/>
-              <a:t>The result is a supervised model of AI-supported communication, not an unsupervised bot</a:t>
-            </a:r>
           </a:p>
         </p:txBody>
       </p:sp>
@@ -22631,18 +20393,6 @@
 <file path=ppt/tags/tag8.xml><?xml version="1.0" encoding="utf-8"?>
 <p:tagLst xmlns:a="http://schemas.openxmlformats.org/drawingml/2006/main" xmlns:r="http://schemas.openxmlformats.org/officeDocument/2006/relationships" xmlns:p="http://schemas.openxmlformats.org/presentationml/2006/main">
   <p:tag name="SHAPE_LOCKS" val="1983"/>
-</p:tagLst>
-</file>
-
-<file path=ppt/tags/tag80.xml><?xml version="1.0" encoding="utf-8"?>
-<p:tagLst xmlns:a="http://schemas.openxmlformats.org/drawingml/2006/main" xmlns:r="http://schemas.openxmlformats.org/officeDocument/2006/relationships" xmlns:p="http://schemas.openxmlformats.org/presentationml/2006/main">
-  <p:tag name="SHAPE_LOCKS" val="1935"/>
-</p:tagLst>
-</file>
-
-<file path=ppt/tags/tag81.xml><?xml version="1.0" encoding="utf-8"?>
-<p:tagLst xmlns:a="http://schemas.openxmlformats.org/drawingml/2006/main" xmlns:r="http://schemas.openxmlformats.org/officeDocument/2006/relationships" xmlns:p="http://schemas.openxmlformats.org/presentationml/2006/main">
-  <p:tag name="SHAPE_LOCKS" val="1935"/>
 </p:tagLst>
 </file>
 

--- a/SelfHelp-2026.pptx
+++ b/SelfHelp-2026.pptx
@@ -11,10 +11,10 @@
     <p:sldMasterId id="2147483660" r:id="rId7"/>
   </p:sldMasterIdLst>
   <p:notesMasterIdLst>
-    <p:notesMasterId r:id="rId23"/>
+    <p:notesMasterId r:id="rId21"/>
   </p:notesMasterIdLst>
   <p:handoutMasterIdLst>
-    <p:handoutMasterId r:id="rId24"/>
+    <p:handoutMasterId r:id="rId22"/>
   </p:handoutMasterIdLst>
   <p:sldIdLst>
     <p:sldId id="290" r:id="rId8"/>
@@ -29,7 +29,7 @@
     <p:sldId id="314" r:id="rId17"/>
     <p:sldId id="315" r:id="rId18"/>
     <p:sldId id="316" r:id="rId19"/>
-    <p:sldId id="300" r:id="rId22"/>
+    <p:sldId id="300" r:id="rId20"/>
   </p:sldIdLst>
   <p:sldSz cx="9144000" cy="5143500" type="screen16x9"/>
   <p:notesSz cx="6858000" cy="9144000"/>
@@ -230,7 +230,7 @@
           <a:p>
             <a:fld id="{A70AE70C-D509-4E4B-9352-79C3D11520D1}" type="datetimeFigureOut">
               <a:rPr lang="de-DE" smtClean="0"/>
-              <a:t>23.03.2026</a:t>
+              <a:t>24.03.2026</a:t>
             </a:fld>
             <a:endParaRPr lang="de-DE"/>
           </a:p>
@@ -408,7 +408,7 @@
           <a:p>
             <a:fld id="{B77602DA-7CEE-4298-AF4B-1C87D65BAB06}" type="datetimeFigureOut">
               <a:rPr lang="de-CH" smtClean="0"/>
-              <a:t>23.03.2026</a:t>
+              <a:t>24.03.2026</a:t>
             </a:fld>
             <a:endParaRPr lang="de-CH" dirty="0"/>
           </a:p>
@@ -722,19 +722,23 @@
           <a:lstStyle/>
           <a:p>
             <a:r>
-              <a:t>Some of you may remember that we already presented SelfHelp here in 2021. Today I want to reconnect to that earlier presentation and show what has changed since then.</a:t>
-            </a:r>
-          </a:p>
-          <a:p/>
-          <a:p>
-            <a:r>
-              <a:t>The main message is simple: SelfHelp is no longer just a website system. It has grown into a platform for complete digital programs.</a:t>
-            </a:r>
-          </a:p>
-          <a:p/>
-          <a:p>
-            <a:r>
-              <a:t>What I want to show today is how that happened. Instead of separate tools for pages, surveys, reminders, and mobile use, we can now think in terms of one connected program.</a:t>
+              <a:t>Some of you may remember that we presented SelfHelp here in 2021. Today I want to briefly reconnect to that earlier version and show what has changed since then.</a:t>
+            </a:r>
+          </a:p>
+          <a:p>
+            <a:endParaRPr/>
+          </a:p>
+          <a:p>
+            <a:r>
+              <a:t>The main point is simple. SelfHelp is no longer just a website system. It has grown into a platform for complete digital programs.</a:t>
+            </a:r>
+          </a:p>
+          <a:p>
+            <a:endParaRPr/>
+          </a:p>
+          <a:p>
+            <a:r>
+              <a:t>That is the story behind this presentation. We started with separate digital pieces. We are moving toward one connected program.</a:t>
             </a:r>
           </a:p>
         </p:txBody>
@@ -857,25 +861,31 @@
           <a:lstStyle/>
           <a:p>
             <a:r>
-              <a:t>Each of these tools is strong in its own domain.</a:t>
-            </a:r>
-          </a:p>
-          <a:p/>
-          <a:p>
-            <a:r>
-              <a:t>LimeSurvey is excellent when the main need is survey administration. JATOS and formr are strong choices for online studies and longitudinal research logic. Moodle is a mature platform for digital learning delivery.</a:t>
-            </a:r>
-          </a:p>
-          <a:p/>
-          <a:p>
-            <a:r>
-              <a:t>SelfHelp solves a different problem. It becomes strongest when content, data, workflows, mobile use, permissions, and AI all need to stay connected inside one locally controlled system.</a:t>
-            </a:r>
-          </a:p>
-          <a:p/>
-          <a:p>
-            <a:r>
-              <a:t>That is the difference between using separate tools and building one continuous digital program.</a:t>
+              <a:t>It is also useful to compare SelfHelp with other open and self-hosted tools.</a:t>
+            </a:r>
+          </a:p>
+          <a:p>
+            <a:endParaRPr/>
+          </a:p>
+          <a:p>
+            <a:r>
+              <a:t>LimeSurvey is very strong for surveys. JATOS and formr are strong for online studies. Moodle is strong for learning delivery.</a:t>
+            </a:r>
+          </a:p>
+          <a:p>
+            <a:endParaRPr/>
+          </a:p>
+          <a:p>
+            <a:r>
+              <a:t>SelfHelp is strongest in a different kind of case. It becomes most valuable when content, data collection, workflows, mobile use, permissions, and AI all need to stay connected in one locally controlled system.</a:t>
+            </a:r>
+          </a:p>
+          <a:p>
+            <a:endParaRPr/>
+          </a:p>
+          <a:p>
+            <a:r>
+              <a:t>So the difference is not that it replaces every other tool. The difference is that it connects more of the full program in one place.</a:t>
             </a:r>
           </a:p>
         </p:txBody>
@@ -1010,37 +1020,90 @@
           <a:lstStyle/>
           <a:p>
             <a:r>
-              <a:t>The summary is simple.</a:t>
-            </a:r>
-          </a:p>
-          <a:p/>
-          <a:p>
-            <a:r>
-              <a:t>SelfHelp gives one platform where content, assessments, workflows, mobile interaction, and AI can be part of the same program. That is already useful today.</a:t>
-            </a:r>
-          </a:p>
-          <a:p/>
-          <a:p>
-            <a:r>
-              <a:t>It also gives local control and room for future development. And that is where SelfHelp 2 becomes relevant. It is already in development, and I would say it is roughly seventy to eighty percent there. The point is not redesign for its own sake. The point is to make the platform more structured, easier to extend, and much faster to build with.</a:t>
-            </a:r>
-          </a:p>
-          <a:p/>
-          <a:p>
-            <a:r>
-              <a:t>One of the most interesting next steps is LLM-supported content creation. The idea is that the system can generate structured page content much faster, so teams can spend less time building website structure by hand and more time on the actual study design, content quality, and assessment logic.</a:t>
-            </a:r>
-          </a:p>
-          <a:p/>
-          <a:p>
-            <a:r>
-              <a:t>And one practical point at the end: if colleagues see value in this direction, especially in the local university AI infrastructure behind it, it would be very helpful to support the move from proof of concept to a permanent service. A short letter of support to ID could make a real difference there.</a:t>
-            </a:r>
-          </a:p>
-          <a:p/>
-          <a:p>
-            <a:r>
-              <a:t>The final point I would leave with is this: SelfHelp moves us from isolated digital tools to continuous digital programs.</a:t>
+              <a:rPr dirty="0"/>
+              <a:t>To close, I would summarize it like this.</a:t>
+            </a:r>
+          </a:p>
+          <a:p>
+            <a:endParaRPr dirty="0"/>
+          </a:p>
+          <a:p>
+            <a:r>
+              <a:rPr dirty="0" err="1"/>
+              <a:t>SelfHelp</a:t>
+            </a:r>
+            <a:r>
+              <a:rPr dirty="0"/>
+              <a:t> gives us one platform where content, assessments, workflows, mobile interaction, and AI can all be part of the same program. That is already useful today.</a:t>
+            </a:r>
+          </a:p>
+          <a:p>
+            <a:endParaRPr dirty="0"/>
+          </a:p>
+          <a:p>
+            <a:r>
+              <a:rPr dirty="0"/>
+              <a:t>At the same time, </a:t>
+            </a:r>
+            <a:r>
+              <a:rPr dirty="0" err="1"/>
+              <a:t>SelfHelp</a:t>
+            </a:r>
+            <a:r>
+              <a:rPr dirty="0"/>
+              <a:t> 2 is already well underway. It is not just a redesign. The goal is to make the platform more structured, easier to extend, and faster to build with.</a:t>
+            </a:r>
+          </a:p>
+          <a:p>
+            <a:endParaRPr dirty="0"/>
+          </a:p>
+          <a:p>
+            <a:r>
+              <a:rPr dirty="0"/>
+              <a:t>One especially promising next step is LLM-supported content creation. That could reduce the time spent building website structure by hand and give teams more time for the actual study design, content quality, and assessment logic.</a:t>
+            </a:r>
+          </a:p>
+          <a:p>
+            <a:endParaRPr dirty="0"/>
+          </a:p>
+          <a:p>
+            <a:r>
+              <a:rPr dirty="0"/>
+              <a:t>And if </a:t>
+            </a:r>
+            <a:r>
+              <a:rPr lang="en-US" dirty="0"/>
+              <a:t>you</a:t>
+            </a:r>
+            <a:r>
+              <a:rPr dirty="0"/>
+              <a:t> see value in this direction, especially in the local university AI infrastructure behind it, </a:t>
+            </a:r>
+            <a:r>
+              <a:rPr lang="en-US" dirty="0"/>
+              <a:t>please support ID so that the local LLM infrastructure can be turned into a permanent </a:t>
+            </a:r>
+            <a:r>
+              <a:rPr lang="en-US"/>
+              <a:t>Uni service.</a:t>
+            </a:r>
+            <a:endParaRPr dirty="0"/>
+          </a:p>
+          <a:p>
+            <a:endParaRPr dirty="0"/>
+          </a:p>
+          <a:p>
+            <a:r>
+              <a:rPr dirty="0"/>
+              <a:t>The main message I would leave you with is this: </a:t>
+            </a:r>
+            <a:r>
+              <a:rPr dirty="0" err="1"/>
+              <a:t>SelfHelp</a:t>
+            </a:r>
+            <a:r>
+              <a:rPr dirty="0"/>
+              <a:t> moves us from isolated digital tools to continuous digital programs.</a:t>
             </a:r>
           </a:p>
         </p:txBody>
@@ -1112,7 +1175,7 @@
 </p:notes>
 </file>
 
-<file path=ppt/notesSlides/notesSlide13.xml><?xml version="1.0" encoding="utf-8"?>
+<file path=ppt/notesSlides/notesSlide12.xml><?xml version="1.0" encoding="utf-8"?>
 <p:notes xmlns:a="http://schemas.openxmlformats.org/drawingml/2006/main" xmlns:r="http://schemas.openxmlformats.org/officeDocument/2006/relationships" xmlns:p="http://schemas.openxmlformats.org/presentationml/2006/main">
   <p:cSld>
     <p:spTree>
@@ -1196,7 +1259,7 @@
           <a:p>
             <a:fld id="{B2B24C57-7758-4EF8-8A0E-FE171C8C1817}" type="slidenum">
               <a:rPr lang="de-CH" smtClean="0"/>
-              <a:t>15</a:t>
+              <a:t>13</a:t>
             </a:fld>
             <a:endParaRPr lang="de-CH" dirty="0"/>
           </a:p>
@@ -1263,16 +1326,20 @@
               <a:t>If I had to explain SelfHelp in one sentence, I would call it a platform for running digital programs.</a:t>
             </a:r>
           </a:p>
-          <a:p/>
-          <a:p>
-            <a:r>
-              <a:t>The important point is that it brings together pieces that are often separated. Content, assessments, workflows, and mobile delivery can all live in the same system instead of being spread across different tools.</a:t>
-            </a:r>
-          </a:p>
-          <a:p/>
-          <a:p>
-            <a:r>
-              <a:t>Because it is built from reusable components, new projects do not have to start from zero every time. And because it can be hosted under university control, it fits settings where governance and data protection matter.</a:t>
+          <a:p>
+            <a:endParaRPr/>
+          </a:p>
+          <a:p>
+            <a:r>
+              <a:t>What makes it useful is that it brings together things that are often split apart. Content, assessments, workflows, and mobile delivery can all live in the same system.</a:t>
+            </a:r>
+          </a:p>
+          <a:p>
+            <a:endParaRPr/>
+          </a:p>
+          <a:p>
+            <a:r>
+              <a:t>That makes projects easier to build and easier to adapt later. And because it can run under university control, it also fits settings where governance and data protection matter.</a:t>
             </a:r>
           </a:p>
         </p:txBody>
@@ -1377,25 +1444,51 @@
           <a:lstStyle/>
           <a:p>
             <a:r>
-              <a:t>The easiest way to see the change is to look at what the platform was mainly used for at each stage.</a:t>
-            </a:r>
-          </a:p>
-          <a:p/>
-          <a:p>
-            <a:r>
-              <a:t>In 2021, SelfHelp was mainly presented as a platform for self-help and research-oriented websites. By 2023, it had become more modular and more practical to run, with better page structure, stronger scheduling, and better mobile integration.</a:t>
-            </a:r>
-          </a:p>
-          <a:p/>
-          <a:p>
-            <a:r>
-              <a:t>From 2024 to 2026, a lot of the progress happened in the foundation. The data model became stronger, workflows became more systematic, permissions became clearer, two-factor authentication was added, and background processing became more reliable.</a:t>
-            </a:r>
-          </a:p>
-          <a:p/>
-          <a:p>
-            <a:r>
-              <a:t>And once that stronger base was in place, AI features could be added on top of it. So the overall direction is quite clear. The platform started with publishing content, and it is now moving toward running structured digital programs.</a:t>
+              <a:rPr dirty="0"/>
+              <a:t>The easiest way to understand the evolution is to look at where the emphasis was at each stage.</a:t>
+            </a:r>
+          </a:p>
+          <a:p>
+            <a:endParaRPr dirty="0"/>
+          </a:p>
+          <a:p>
+            <a:r>
+              <a:rPr dirty="0"/>
+              <a:t>In 2021, </a:t>
+            </a:r>
+            <a:r>
+              <a:rPr dirty="0" err="1"/>
+              <a:t>SelfHelp</a:t>
+            </a:r>
+            <a:r>
+              <a:rPr dirty="0"/>
+              <a:t> was mainly presented as a platform for self-help and research websites. By 2023, it had become more modular and more practical to run, with better page structure, scheduling, and mobile integration.</a:t>
+            </a:r>
+          </a:p>
+          <a:p>
+            <a:endParaRPr dirty="0"/>
+          </a:p>
+          <a:p>
+            <a:r>
+              <a:rPr dirty="0"/>
+              <a:t>Then from 2024 to 2026, a lot of the progress happened in the foundation. The data model became stronger, workflows became more systematic, permissions became clearer, and two-factor authentication was added.</a:t>
+            </a:r>
+          </a:p>
+          <a:p>
+            <a:endParaRPr dirty="0"/>
+          </a:p>
+          <a:p>
+            <a:r>
+              <a:rPr dirty="0"/>
+              <a:t>On top of that stronger base, AI could then be added in a more serious way. So the overall direction is clear. </a:t>
+            </a:r>
+            <a:r>
+              <a:rPr dirty="0" err="1"/>
+              <a:t>SelfHelp</a:t>
+            </a:r>
+            <a:r>
+              <a:rPr dirty="0"/>
+              <a:t> started with content publishing, and it is now moving toward structured digital program delivery.</a:t>
             </a:r>
           </a:p>
         </p:txBody>
@@ -1500,25 +1593,51 @@
           <a:lstStyle/>
           <a:p>
             <a:r>
+              <a:rPr dirty="0"/>
               <a:t>What this means in practice is that a team can take an idea and turn it into a full user journey.</a:t>
             </a:r>
           </a:p>
-          <a:p/>
-          <a:p>
-            <a:r>
-              <a:t>With the platform, a team can create a complete digital program: onboarding, content, structured assessments, reminders, and follow-up. That can all happen in one environment instead of being split across disconnected tools.</a:t>
-            </a:r>
-          </a:p>
-          <a:p/>
-          <a:p>
-            <a:r>
-              <a:t>A person can enter a program, receive the right content, complete assessments over time, and be guided to the next step automatically. The system can also adapt what people see based on language, group, role, or what has already happened before.</a:t>
-            </a:r>
-          </a:p>
-          <a:p/>
-          <a:p>
-            <a:r>
-              <a:t>It can collect richer input such as files or voice, which makes it more flexible than a simple form-based workflow. So the real value is not only that SelfHelp can publish content. It can run a process over time.</a:t>
+          <a:p>
+            <a:endParaRPr dirty="0"/>
+          </a:p>
+          <a:p>
+            <a:r>
+              <a:rPr dirty="0"/>
+              <a:t>With </a:t>
+            </a:r>
+            <a:r>
+              <a:rPr dirty="0" err="1"/>
+              <a:t>SelfHelp</a:t>
+            </a:r>
+            <a:r>
+              <a:rPr dirty="0"/>
+              <a:t>, you can build a complete digital program: onboarding, content, structured assessments, reminders, and follow-up. That can all happen in one environment instead of being spread across disconnected tools.</a:t>
+            </a:r>
+          </a:p>
+          <a:p>
+            <a:endParaRPr dirty="0"/>
+          </a:p>
+          <a:p>
+            <a:r>
+              <a:rPr dirty="0"/>
+              <a:t>A person can move through the program step by step. The system can adapt content, timing, and next actions based on role, group, language, or previous activity.</a:t>
+            </a:r>
+          </a:p>
+          <a:p>
+            <a:endParaRPr dirty="0"/>
+          </a:p>
+          <a:p>
+            <a:r>
+              <a:rPr dirty="0"/>
+              <a:t>So the value is not only that </a:t>
+            </a:r>
+            <a:r>
+              <a:rPr dirty="0" err="1"/>
+              <a:t>SelfHelp</a:t>
+            </a:r>
+            <a:r>
+              <a:rPr dirty="0"/>
+              <a:t> can publish content. It can run a process over time.</a:t>
             </a:r>
           </a:p>
         </p:txBody>
@@ -1623,25 +1742,43 @@
           <a:lstStyle/>
           <a:p>
             <a:r>
-              <a:t>One reason SelfHelp has been able to grow is that it expands through plugins.</a:t>
-            </a:r>
-          </a:p>
-          <a:p/>
-          <a:p>
-            <a:r>
-              <a:t>That means the platform can add capabilities without rebuilding the core system every time. Some plugins work mainly in the background, but they are important for the whole platform.</a:t>
-            </a:r>
-          </a:p>
-          <a:p/>
-          <a:p>
-            <a:r>
-              <a:t>External authentication helps when the platform needs to fit university or institutional access models. Lab.js makes it possible to include browser-based experiments and structured tasks in the same environment. R integration opens the door to more advanced analysis and computation. And custom formulas let us calculate scores and derived values directly inside the platform.</a:t>
-            </a:r>
-          </a:p>
-          <a:p/>
-          <a:p>
-            <a:r>
-              <a:t>On top of that foundation, there are newer plugins that are more visible from the user side. Those are the three I want to highlight next because they show clearly where the platform is going.</a:t>
+              <a:rPr dirty="0"/>
+              <a:t>Another important part of the story is how </a:t>
+            </a:r>
+            <a:r>
+              <a:rPr dirty="0" err="1"/>
+              <a:t>SelfHelp</a:t>
+            </a:r>
+            <a:r>
+              <a:rPr dirty="0"/>
+              <a:t> grows.</a:t>
+            </a:r>
+          </a:p>
+          <a:p>
+            <a:endParaRPr dirty="0"/>
+          </a:p>
+          <a:p>
+            <a:r>
+              <a:rPr dirty="0"/>
+              <a:t>It grows through plugins. That means new capabilities can be added without rebuilding the core platform every time.</a:t>
+            </a:r>
+          </a:p>
+          <a:p>
+            <a:endParaRPr dirty="0"/>
+          </a:p>
+          <a:p>
+            <a:r>
+              <a:rPr dirty="0"/>
+              <a:t>Some of those plugins are especially important in the background. External authentication helps it fit institutional access models. Lab.js brings browser-based experiments into the same environment. R integration supports more advanced analysis. And custom formulas allow scoring and derived values directly in the system.</a:t>
+            </a:r>
+          </a:p>
+          <a:p>
+            <a:endParaRPr dirty="0"/>
+          </a:p>
+          <a:p>
+            <a:r>
+              <a:rPr dirty="0"/>
+              <a:t>On top of that foundation, there are also newer plugins that are more visible to users. Those are the three I want to focus on next.</a:t>
             </a:r>
           </a:p>
         </p:txBody>
@@ -1764,25 +1901,63 @@
           <a:lstStyle/>
           <a:p>
             <a:r>
-              <a:t>SurveyJS is a good example of how SelfHelp has moved beyond simple forms.</a:t>
-            </a:r>
-          </a:p>
-          <a:p/>
-          <a:p>
-            <a:r>
-              <a:t>The important point is not just that we can create surveys. We can manage them properly inside the platform. They can be versioned, scheduled, edited later, and connected to dashboards.</a:t>
-            </a:r>
-          </a:p>
-          <a:p/>
-          <a:p>
-            <a:r>
-              <a:t>That improves data quality and makes repeated or longitudinal assessment easier to handle. It also gives more flexibility, because responses can include file uploads and voice recordings as well.</a:t>
-            </a:r>
-          </a:p>
-          <a:p/>
-          <a:p>
-            <a:r>
-              <a:t>So SurveyJS turns SelfHelp into a much more serious environment for structured data collection over time.</a:t>
+              <a:rPr dirty="0" err="1"/>
+              <a:t>SurveyJS</a:t>
+            </a:r>
+            <a:r>
+              <a:rPr dirty="0"/>
+              <a:t> is a good example of how </a:t>
+            </a:r>
+            <a:r>
+              <a:rPr dirty="0" err="1"/>
+              <a:t>SelfHelp</a:t>
+            </a:r>
+            <a:r>
+              <a:rPr dirty="0"/>
+              <a:t> has moved beyond simple forms.</a:t>
+            </a:r>
+          </a:p>
+          <a:p>
+            <a:endParaRPr dirty="0"/>
+          </a:p>
+          <a:p>
+            <a:r>
+              <a:rPr dirty="0"/>
+              <a:t>The key point is not only that surveys can be created. The key point is that they can be managed properly inside the platform. They can be versioned, scheduled, edited later, and connected to dashboards.</a:t>
+            </a:r>
+          </a:p>
+          <a:p>
+            <a:endParaRPr dirty="0"/>
+          </a:p>
+          <a:p>
+            <a:r>
+              <a:rPr dirty="0"/>
+              <a:t>That improves data quality and makes repeated assessment much easier to handle. It also makes the whole assessment layer more flexible, because responses can include files and voice recordings.</a:t>
+            </a:r>
+          </a:p>
+          <a:p>
+            <a:endParaRPr dirty="0"/>
+          </a:p>
+          <a:p>
+            <a:r>
+              <a:rPr dirty="0"/>
+              <a:t>So </a:t>
+            </a:r>
+            <a:r>
+              <a:rPr dirty="0" err="1"/>
+              <a:t>SurveyJS</a:t>
+            </a:r>
+            <a:r>
+              <a:rPr dirty="0"/>
+              <a:t> turns </a:t>
+            </a:r>
+            <a:r>
+              <a:rPr dirty="0" err="1"/>
+              <a:t>SelfHelp</a:t>
+            </a:r>
+            <a:r>
+              <a:rPr dirty="0"/>
+              <a:t> into a much stronger environment for structured data collection over time.</a:t>
             </a:r>
           </a:p>
         </p:txBody>
@@ -1917,37 +2092,35 @@
           <a:lstStyle/>
           <a:p>
             <a:r>
-              <a:t>This is not a chatbot. It is a controlled, testable AI component.</a:t>
-            </a:r>
-          </a:p>
-          <a:p/>
-          <a:p>
-            <a:r>
-              <a:t>The LLM plugin allows us to place a purpose-built assistant inside any page, with a defined context and a clearly bounded role. That already makes it different from a general chat tool.</a:t>
-            </a:r>
-          </a:p>
-          <a:p/>
-          <a:p>
-            <a:r>
-              <a:t>An important part of that control is prompt management. Prompts can be developed, versioned, tested, replayed, and compared before they are used in a real program. That is especially valuable in an academic setting, because AI behavior does not just have to work once. It has to be reviewable and improvable over time.</a:t>
-            </a:r>
-          </a:p>
-          <a:p/>
-          <a:p>
-            <a:r>
-              <a:t>The plugin can also work with uploaded material, image-capable models, and voice input, and it can return either conversational answers or structured outputs that the rest of the platform can use.</a:t>
-            </a:r>
-          </a:p>
-          <a:p/>
-          <a:p>
-            <a:r>
-              <a:t>That structured side is important as well. The plugin can work with structured JSON responses in the style people now know from OpenAI-based workflows, which makes it much easier to connect AI output back into the platform in a controlled way.</a:t>
-            </a:r>
-          </a:p>
-          <a:p/>
-          <a:p>
-            <a:r>
-              <a:t>It is also important that, at the moment, we are using the university's local LLM infrastructure. That means the interaction stays inside the university environment, which is a strong point when data protection and institutional control matter.</a:t>
+              <a:rPr dirty="0"/>
+              <a:t>The LLM plugin should not be understood as just a chatbot. It is better understood as a controlled and testable AI component.</a:t>
+            </a:r>
+          </a:p>
+          <a:p>
+            <a:endParaRPr dirty="0"/>
+          </a:p>
+          <a:p>
+            <a:r>
+              <a:rPr dirty="0"/>
+              <a:t>It lets us place a purpose-built assistant inside a page, with a clear role and a clear context. An important part of that is prompt management. Prompts can be versioned, tested, replayed, and improved before they are used in a real setting.</a:t>
+            </a:r>
+          </a:p>
+          <a:p>
+            <a:endParaRPr dirty="0"/>
+          </a:p>
+          <a:p>
+            <a:r>
+              <a:rPr dirty="0"/>
+              <a:t>The plugin can also work with files, images, and voice input. And it can return either normal conversation or structured JSON output, including formats that fit OpenAI-style workflows.</a:t>
+            </a:r>
+          </a:p>
+          <a:p>
+            <a:endParaRPr dirty="0"/>
+          </a:p>
+          <a:p>
+            <a:r>
+              <a:rPr dirty="0"/>
+              <a:t>That matters because it makes AI output easier to connect back into the platform in a controlled way. And at the moment, we are using the university's local LLM infrastructure, which means the interaction stays inside the university environment.</a:t>
             </a:r>
           </a:p>
         </p:txBody>
@@ -2082,25 +2255,35 @@
           <a:lstStyle/>
           <a:p>
             <a:r>
-              <a:t>This is the most distinctive plugin in the current platform.</a:t>
-            </a:r>
-          </a:p>
-          <a:p/>
-          <a:p>
-            <a:r>
-              <a:t>The key idea is supervised communication. A user can interact with AI, but therapists remain present through a dedicated dashboard where they can review conversations, intervene, send their own messages, create notes, generate drafts, and manage risk status.</a:t>
-            </a:r>
-          </a:p>
-          <a:p/>
-          <a:p>
-            <a:r>
-              <a:t>It is also important that the plugin can run without AI. That allows controlled comparison between AI-supported and human-only communication inside the same framework.</a:t>
-            </a:r>
-          </a:p>
-          <a:p/>
-          <a:p>
-            <a:r>
-              <a:t>That makes it interesting not only for practice, but also for research.</a:t>
+              <a:rPr dirty="0"/>
+              <a:t>The therapy chat plugin is probably the most distinctive part of the current platform.</a:t>
+            </a:r>
+          </a:p>
+          <a:p>
+            <a:endParaRPr dirty="0"/>
+          </a:p>
+          <a:p>
+            <a:r>
+              <a:rPr dirty="0"/>
+              <a:t>The key idea is supervised communication. A user can interact with AI, but therapists remain present through their own dashboard. They can review conversations, step in directly, write notes, generate drafts, and manage risk status.</a:t>
+            </a:r>
+          </a:p>
+          <a:p>
+            <a:endParaRPr dirty="0"/>
+          </a:p>
+          <a:p>
+            <a:r>
+              <a:rPr dirty="0"/>
+              <a:t>It is also important that this can run without AI. That means the same framework can support both AI-assisted and human-only communication.</a:t>
+            </a:r>
+          </a:p>
+          <a:p>
+            <a:endParaRPr dirty="0"/>
+          </a:p>
+          <a:p>
+            <a:r>
+              <a:rPr dirty="0"/>
+              <a:t>That makes it interesting not only for service delivery, but also for research, because different communication models can be compared in the same environment.</a:t>
             </a:r>
           </a:p>
         </p:txBody>
@@ -2235,22 +2418,28 @@
           <a:lstStyle/>
           <a:p>
             <a:r>
-              <a:t>The mobile app is important because complete digital programs rarely stay on the desktop.</a:t>
-            </a:r>
-          </a:p>
-          <a:p/>
-          <a:p>
-            <a:r>
-              <a:t>SelfHelp already has a mobile frontend that uses the same platform logic. Surveys, AI chat, therapy chat, notifications, camera-based input, and microphone-based input are already part of that picture.</a:t>
-            </a:r>
-          </a:p>
-          <a:p/>
-          <a:p>
-            <a:r>
-              <a:t>That matters because repeated interaction often happens in the middle of daily life. The mobile app makes check-ins, uploads, reflections, and conversations more natural.</a:t>
-            </a:r>
-          </a:p>
-          <a:p/>
+              <a:t>The mobile app matters because digital programs rarely stay on the desktop.</a:t>
+            </a:r>
+          </a:p>
+          <a:p>
+            <a:endParaRPr/>
+          </a:p>
+          <a:p>
+            <a:r>
+              <a:t>SelfHelp already has a mobile frontend that uses the same platform logic. Surveys, AI chat, therapy chat, notifications, camera input, and microphone input are already part of that picture.</a:t>
+            </a:r>
+          </a:p>
+          <a:p>
+            <a:endParaRPr/>
+          </a:p>
+          <a:p>
+            <a:r>
+              <a:t>That makes repeated interaction much easier in real life. People can respond, upload, reflect, or interact when it fits their day, not only when they are sitting at a computer.</a:t>
+            </a:r>
+          </a:p>
+          <a:p>
+            <a:endParaRPr/>
+          </a:p>
           <a:p>
             <a:r>
               <a:t>So the same program can stay with the user across different situations, instead of being split across separate tools.</a:t>
@@ -18304,6 +18493,7 @@
               <a:buFont typeface="Arial" panose="020B0604020202020204" pitchFamily="34" charset="0"/>
               <a:buChar char="•"/>
             </a:pPr>
+            <a:endParaRPr/>
           </a:p>
         </p:txBody>
       </p:sp>
@@ -18446,6 +18636,7 @@
               <a:buFont typeface="Arial" panose="020B0604020202020204" pitchFamily="34" charset="0"/>
               <a:buChar char="•"/>
             </a:pPr>
+            <a:endParaRPr/>
           </a:p>
         </p:txBody>
       </p:sp>
@@ -18588,6 +18779,7 @@
               <a:buFont typeface="Arial" panose="020B0604020202020204" pitchFamily="34" charset="0"/>
               <a:buChar char="•"/>
             </a:pPr>
+            <a:endParaRPr/>
           </a:p>
         </p:txBody>
       </p:sp>
@@ -19062,6 +19254,7 @@
               <a:buChar char="§"/>
               <a:defRPr/>
             </a:pPr>
+            <a:endParaRPr/>
           </a:p>
           <a:p>
             <a:pPr marL="342900" indent="-342900">
@@ -19345,6 +19538,7 @@
               <a:buChar char="§"/>
               <a:defRPr/>
             </a:pPr>
+            <a:endParaRPr/>
           </a:p>
           <a:p>
             <a:pPr marL="342900" indent="-342900">
@@ -19486,6 +19680,7 @@
               <a:buFont typeface="Arial" panose="020B0604020202020204" pitchFamily="34" charset="0"/>
               <a:buChar char="•"/>
             </a:pPr>
+            <a:endParaRPr/>
           </a:p>
         </p:txBody>
       </p:sp>
@@ -19628,6 +19823,7 @@
               <a:buFont typeface="Arial" panose="020B0604020202020204" pitchFamily="34" charset="0"/>
               <a:buChar char="•"/>
             </a:pPr>
+            <a:endParaRPr/>
           </a:p>
         </p:txBody>
       </p:sp>
@@ -19770,6 +19966,7 @@
               <a:buFont typeface="Arial" panose="020B0604020202020204" pitchFamily="34" charset="0"/>
               <a:buChar char="•"/>
             </a:pPr>
+            <a:endParaRPr/>
           </a:p>
         </p:txBody>
       </p:sp>
@@ -19912,6 +20109,7 @@
               <a:buFont typeface="Arial" panose="020B0604020202020204" pitchFamily="34" charset="0"/>
               <a:buChar char="•"/>
             </a:pPr>
+            <a:endParaRPr/>
           </a:p>
         </p:txBody>
       </p:sp>
@@ -20396,6 +20594,18 @@
 </p:tagLst>
 </file>
 
+<file path=ppt/tags/tag80.xml><?xml version="1.0" encoding="utf-8"?>
+<p:tagLst xmlns:a="http://schemas.openxmlformats.org/drawingml/2006/main" xmlns:r="http://schemas.openxmlformats.org/officeDocument/2006/relationships" xmlns:p="http://schemas.openxmlformats.org/presentationml/2006/main">
+  <p:tag name="SHAPE_LOCKS" val="1935"/>
+</p:tagLst>
+</file>
+
+<file path=ppt/tags/tag81.xml><?xml version="1.0" encoding="utf-8"?>
+<p:tagLst xmlns:a="http://schemas.openxmlformats.org/drawingml/2006/main" xmlns:r="http://schemas.openxmlformats.org/officeDocument/2006/relationships" xmlns:p="http://schemas.openxmlformats.org/presentationml/2006/main">
+  <p:tag name="SHAPE_LOCKS" val="1935"/>
+</p:tagLst>
+</file>
+
 <file path=ppt/tags/tag82.xml><?xml version="1.0" encoding="utf-8"?>
 <p:tagLst xmlns:a="http://schemas.openxmlformats.org/drawingml/2006/main" xmlns:r="http://schemas.openxmlformats.org/officeDocument/2006/relationships" xmlns:p="http://schemas.openxmlformats.org/presentationml/2006/main">
   <p:tag name="SHAPE_LOCKS" val="1935"/>
@@ -20403,18 +20613,6 @@
 </file>
 
 <file path=ppt/tags/tag83.xml><?xml version="1.0" encoding="utf-8"?>
-<p:tagLst xmlns:a="http://schemas.openxmlformats.org/drawingml/2006/main" xmlns:r="http://schemas.openxmlformats.org/officeDocument/2006/relationships" xmlns:p="http://schemas.openxmlformats.org/presentationml/2006/main">
-  <p:tag name="SHAPE_LOCKS" val="1935"/>
-</p:tagLst>
-</file>
-
-<file path=ppt/tags/tag84.xml><?xml version="1.0" encoding="utf-8"?>
-<p:tagLst xmlns:a="http://schemas.openxmlformats.org/drawingml/2006/main" xmlns:r="http://schemas.openxmlformats.org/officeDocument/2006/relationships" xmlns:p="http://schemas.openxmlformats.org/presentationml/2006/main">
-  <p:tag name="SHAPE_LOCKS" val="1935"/>
-</p:tagLst>
-</file>
-
-<file path=ppt/tags/tag85.xml><?xml version="1.0" encoding="utf-8"?>
 <p:tagLst xmlns:a="http://schemas.openxmlformats.org/drawingml/2006/main" xmlns:r="http://schemas.openxmlformats.org/officeDocument/2006/relationships" xmlns:p="http://schemas.openxmlformats.org/presentationml/2006/main">
   <p:tag name="SHAPE_LOCKS" val="1935"/>
 </p:tagLst>

--- a/SelfHelp-2026.pptx
+++ b/SelfHelp-2026.pptx
@@ -1081,11 +1081,7 @@
             </a:r>
             <a:r>
               <a:rPr lang="en-US" dirty="0"/>
-              <a:t>please support ID so that the local LLM infrastructure can be turned into a permanent </a:t>
-            </a:r>
-            <a:r>
-              <a:rPr lang="en-US"/>
-              <a:t>Uni service.</a:t>
+              <a:t>please support ID with “letter of support” so that the local LLM infrastructure can be turned into a permanent Uni service.</a:t>
             </a:r>
             <a:endParaRPr dirty="0"/>
           </a:p>
@@ -1094,8 +1090,12 @@
           </a:p>
           <a:p>
             <a:r>
+              <a:rPr lang="en-US" dirty="0"/>
+              <a:t>At the end, t</a:t>
+            </a:r>
+            <a:r>
               <a:rPr dirty="0"/>
-              <a:t>The main message I would leave you with is this: </a:t>
+              <a:t>he main message I would leave you with is this: </a:t>
             </a:r>
             <a:r>
               <a:rPr dirty="0" err="1"/>
@@ -18497,6 +18497,42 @@
           </a:p>
         </p:txBody>
       </p:sp>
+      <p:pic>
+        <p:nvPicPr>
+          <p:cNvPr id="3" name="Picture 2">
+            <a:extLst>
+              <a:ext uri="{FF2B5EF4-FFF2-40B4-BE49-F238E27FC236}">
+                <a16:creationId xmlns:a16="http://schemas.microsoft.com/office/drawing/2014/main" id="{16542B28-8CA6-8C75-46B9-71FBCE4EBDB5}"/>
+              </a:ext>
+            </a:extLst>
+          </p:cNvPr>
+          <p:cNvPicPr>
+            <a:picLocks noChangeAspect="1"/>
+          </p:cNvPicPr>
+          <p:nvPr/>
+        </p:nvPicPr>
+        <p:blipFill>
+          <a:blip r:embed="rId4" cstate="print">
+            <a:extLst>
+              <a:ext uri="{28A0092B-C50C-407E-A947-70E740481C1C}">
+                <a14:useLocalDpi xmlns:a14="http://schemas.microsoft.com/office/drawing/2010/main" val="0"/>
+              </a:ext>
+            </a:extLst>
+          </a:blip>
+          <a:stretch>
+            <a:fillRect/>
+          </a:stretch>
+        </p:blipFill>
+        <p:spPr>
+          <a:xfrm>
+            <a:off x="6934200" y="1900425"/>
+            <a:ext cx="1381232" cy="2990489"/>
+          </a:xfrm>
+          <a:prstGeom prst="rect">
+            <a:avLst/>
+          </a:prstGeom>
+        </p:spPr>
+      </p:pic>
     </p:spTree>
     <p:extLst>
       <p:ext uri="{BB962C8B-B14F-4D97-AF65-F5344CB8AC3E}">
@@ -18783,6 +18819,42 @@
           </a:p>
         </p:txBody>
       </p:sp>
+      <p:pic>
+        <p:nvPicPr>
+          <p:cNvPr id="3" name="Picture 2">
+            <a:extLst>
+              <a:ext uri="{FF2B5EF4-FFF2-40B4-BE49-F238E27FC236}">
+                <a16:creationId xmlns:a16="http://schemas.microsoft.com/office/drawing/2014/main" id="{9A61E383-5915-9DD9-7009-F05FB490B6B4}"/>
+              </a:ext>
+            </a:extLst>
+          </p:cNvPr>
+          <p:cNvPicPr>
+            <a:picLocks noChangeAspect="1"/>
+          </p:cNvPicPr>
+          <p:nvPr/>
+        </p:nvPicPr>
+        <p:blipFill>
+          <a:blip r:embed="rId4" cstate="print">
+            <a:extLst>
+              <a:ext uri="{28A0092B-C50C-407E-A947-70E740481C1C}">
+                <a14:useLocalDpi xmlns:a14="http://schemas.microsoft.com/office/drawing/2010/main" val="0"/>
+              </a:ext>
+            </a:extLst>
+          </a:blip>
+          <a:stretch>
+            <a:fillRect/>
+          </a:stretch>
+        </p:blipFill>
+        <p:spPr>
+          <a:xfrm>
+            <a:off x="6185210" y="2495550"/>
+            <a:ext cx="2815724" cy="1583845"/>
+          </a:xfrm>
+          <a:prstGeom prst="rect">
+            <a:avLst/>
+          </a:prstGeom>
+        </p:spPr>
+      </p:pic>
     </p:spTree>
     <p:extLst>
       <p:ext uri="{BB962C8B-B14F-4D97-AF65-F5344CB8AC3E}">
@@ -19076,7 +19148,16 @@
               <a:defRPr/>
             </a:pPr>
             <a:r>
-              <a:t>We already presented SelfHelp here in 2021</a:t>
+              <a:rPr dirty="0"/>
+              <a:t>We already presented </a:t>
+            </a:r>
+            <a:r>
+              <a:rPr dirty="0" err="1"/>
+              <a:t>SelfHelp</a:t>
+            </a:r>
+            <a:r>
+              <a:rPr dirty="0"/>
+              <a:t> here in 2021</a:t>
             </a:r>
             <a:endParaRPr lang="de-DE" sz="2000" dirty="0">
               <a:latin typeface="Arial" panose="020B0604020202020204" pitchFamily="34" charset="0"/>
@@ -19090,6 +19171,7 @@
               <a:defRPr/>
             </a:pPr>
             <a:r>
+              <a:rPr dirty="0"/>
               <a:t>Since then, the platform has evolved significantly</a:t>
             </a:r>
             <a:endParaRPr lang="de-DE" sz="2000" dirty="0">
@@ -19104,7 +19186,16 @@
               <a:defRPr/>
             </a:pPr>
             <a:r>
-              <a:t>Today, SelfHelp is no longer just a website system</a:t>
+              <a:rPr dirty="0"/>
+              <a:t>Today, </a:t>
+            </a:r>
+            <a:r>
+              <a:rPr dirty="0" err="1"/>
+              <a:t>SelfHelp</a:t>
+            </a:r>
+            <a:r>
+              <a:rPr dirty="0"/>
+              <a:t> is no longer just a website system</a:t>
             </a:r>
           </a:p>
           <a:p>
@@ -19114,6 +19205,7 @@
               <a:defRPr/>
             </a:pPr>
             <a:r>
+              <a:rPr dirty="0"/>
               <a:t>It is a platform for complete digital programs</a:t>
             </a:r>
           </a:p>
@@ -19127,6 +19219,63 @@
           </a:p>
         </p:txBody>
       </p:sp>
+      <p:pic>
+        <p:nvPicPr>
+          <p:cNvPr id="3" name="Picture 2">
+            <a:extLst>
+              <a:ext uri="{FF2B5EF4-FFF2-40B4-BE49-F238E27FC236}">
+                <a16:creationId xmlns:a16="http://schemas.microsoft.com/office/drawing/2014/main" id="{7BDF64D2-8A47-C9AD-616E-277F83E13695}"/>
+              </a:ext>
+            </a:extLst>
+          </p:cNvPr>
+          <p:cNvPicPr>
+            <a:picLocks noChangeAspect="1"/>
+          </p:cNvPicPr>
+          <p:nvPr/>
+        </p:nvPicPr>
+        <p:blipFill>
+          <a:blip r:embed="rId4" cstate="print">
+            <a:extLst>
+              <a:ext uri="{28A0092B-C50C-407E-A947-70E740481C1C}">
+                <a14:useLocalDpi xmlns:a14="http://schemas.microsoft.com/office/drawing/2010/main" val="0"/>
+              </a:ext>
+            </a:extLst>
+          </a:blip>
+          <a:stretch>
+            <a:fillRect/>
+          </a:stretch>
+        </p:blipFill>
+        <p:spPr>
+          <a:xfrm>
+            <a:off x="6436744" y="2216588"/>
+            <a:ext cx="2173856" cy="2173856"/>
+          </a:xfrm>
+          <a:prstGeom prst="rect">
+            <a:avLst/>
+          </a:prstGeom>
+          <a:ln>
+            <a:noFill/>
+          </a:ln>
+          <a:effectLst>
+            <a:outerShdw blurRad="127000" dist="38100" dir="2700000" algn="ctr">
+              <a:srgbClr val="000000">
+                <a:alpha val="45000"/>
+              </a:srgbClr>
+            </a:outerShdw>
+          </a:effectLst>
+          <a:scene3d>
+            <a:camera prst="perspectiveFront" fov="2700000">
+              <a:rot lat="20376000" lon="1938000" rev="20112001"/>
+            </a:camera>
+            <a:lightRig rig="soft" dir="t">
+              <a:rot lat="0" lon="0" rev="0"/>
+            </a:lightRig>
+          </a:scene3d>
+          <a:sp3d prstMaterial="translucentPowder">
+            <a:bevelT w="203200" h="50800" prst="softRound"/>
+          </a:sp3d>
+        </p:spPr>
+      </p:pic>
     </p:spTree>
     <p:extLst>
       <p:ext uri="{BB962C8B-B14F-4D97-AF65-F5344CB8AC3E}">
@@ -19266,6 +19415,42 @@
           </a:p>
         </p:txBody>
       </p:sp>
+      <p:pic>
+        <p:nvPicPr>
+          <p:cNvPr id="10" name="Picture 9">
+            <a:extLst>
+              <a:ext uri="{FF2B5EF4-FFF2-40B4-BE49-F238E27FC236}">
+                <a16:creationId xmlns:a16="http://schemas.microsoft.com/office/drawing/2014/main" id="{6F578CD9-EBEE-8951-5470-BC1867CB6EBB}"/>
+              </a:ext>
+            </a:extLst>
+          </p:cNvPr>
+          <p:cNvPicPr>
+            <a:picLocks noChangeAspect="1"/>
+          </p:cNvPicPr>
+          <p:nvPr/>
+        </p:nvPicPr>
+        <p:blipFill>
+          <a:blip r:embed="rId4" cstate="print">
+            <a:extLst>
+              <a:ext uri="{28A0092B-C50C-407E-A947-70E740481C1C}">
+                <a14:useLocalDpi xmlns:a14="http://schemas.microsoft.com/office/drawing/2010/main" val="0"/>
+              </a:ext>
+            </a:extLst>
+          </a:blip>
+          <a:stretch>
+            <a:fillRect/>
+          </a:stretch>
+        </p:blipFill>
+        <p:spPr>
+          <a:xfrm>
+            <a:off x="5791200" y="2194560"/>
+            <a:ext cx="3255148" cy="1831021"/>
+          </a:xfrm>
+          <a:prstGeom prst="rect">
+            <a:avLst/>
+          </a:prstGeom>
+        </p:spPr>
+      </p:pic>
     </p:spTree>
     <p:extLst>
       <p:ext uri="{BB962C8B-B14F-4D97-AF65-F5344CB8AC3E}">
@@ -19354,6 +19539,7 @@
               <a:defRPr/>
             </a:pPr>
             <a:r>
+              <a:rPr dirty="0"/>
               <a:t>2021: positioned as a platform for self-help and research websites</a:t>
             </a:r>
           </a:p>
@@ -19364,6 +19550,7 @@
               <a:defRPr/>
             </a:pPr>
             <a:r>
+              <a:rPr dirty="0"/>
               <a:t>2023: expanded toward modular pages, scheduling, and mobile integration</a:t>
             </a:r>
           </a:p>
@@ -19374,6 +19561,7 @@
               <a:defRPr/>
             </a:pPr>
             <a:r>
+              <a:rPr dirty="0"/>
               <a:t>2024 to 2026: stronger data model, workflows, permissions, 2FA, and background processing</a:t>
             </a:r>
           </a:p>
@@ -19384,6 +19572,7 @@
               <a:defRPr/>
             </a:pPr>
             <a:r>
+              <a:rPr dirty="0"/>
               <a:t>The newest step is AI: general LLM support and supervised therapy-style chat</a:t>
             </a:r>
           </a:p>
@@ -19394,6 +19583,7 @@
               <a:defRPr/>
             </a:pPr>
             <a:r>
+              <a:rPr dirty="0"/>
               <a:t>The direction is clear: from content publishing toward structured digital program delivery</a:t>
             </a:r>
           </a:p>
@@ -19407,6 +19597,42 @@
           </a:p>
         </p:txBody>
       </p:sp>
+      <p:pic>
+        <p:nvPicPr>
+          <p:cNvPr id="7" name="Picture 6">
+            <a:extLst>
+              <a:ext uri="{FF2B5EF4-FFF2-40B4-BE49-F238E27FC236}">
+                <a16:creationId xmlns:a16="http://schemas.microsoft.com/office/drawing/2014/main" id="{42CEE092-E939-92FF-20A6-F31DCAA0DB1B}"/>
+              </a:ext>
+            </a:extLst>
+          </p:cNvPr>
+          <p:cNvPicPr>
+            <a:picLocks noChangeAspect="1"/>
+          </p:cNvPicPr>
+          <p:nvPr/>
+        </p:nvPicPr>
+        <p:blipFill>
+          <a:blip r:embed="rId4" cstate="print">
+            <a:extLst>
+              <a:ext uri="{28A0092B-C50C-407E-A947-70E740481C1C}">
+                <a14:useLocalDpi xmlns:a14="http://schemas.microsoft.com/office/drawing/2010/main" val="0"/>
+              </a:ext>
+            </a:extLst>
+          </a:blip>
+          <a:stretch>
+            <a:fillRect/>
+          </a:stretch>
+        </p:blipFill>
+        <p:spPr>
+          <a:xfrm>
+            <a:off x="5257800" y="2333310"/>
+            <a:ext cx="3660468" cy="2129790"/>
+          </a:xfrm>
+          <a:prstGeom prst="rect">
+            <a:avLst/>
+          </a:prstGeom>
+        </p:spPr>
+      </p:pic>
     </p:spTree>
     <p:extLst>
       <p:ext uri="{BB962C8B-B14F-4D97-AF65-F5344CB8AC3E}">
@@ -19553,6 +19779,42 @@
           </a:p>
         </p:txBody>
       </p:sp>
+      <p:pic>
+        <p:nvPicPr>
+          <p:cNvPr id="3" name="Picture 2">
+            <a:extLst>
+              <a:ext uri="{FF2B5EF4-FFF2-40B4-BE49-F238E27FC236}">
+                <a16:creationId xmlns:a16="http://schemas.microsoft.com/office/drawing/2014/main" id="{E38D2F78-4D64-C112-4886-1EE10F596FEB}"/>
+              </a:ext>
+            </a:extLst>
+          </p:cNvPr>
+          <p:cNvPicPr>
+            <a:picLocks noChangeAspect="1"/>
+          </p:cNvPicPr>
+          <p:nvPr/>
+        </p:nvPicPr>
+        <p:blipFill>
+          <a:blip r:embed="rId4" cstate="print">
+            <a:extLst>
+              <a:ext uri="{28A0092B-C50C-407E-A947-70E740481C1C}">
+                <a14:useLocalDpi xmlns:a14="http://schemas.microsoft.com/office/drawing/2010/main" val="0"/>
+              </a:ext>
+            </a:extLst>
+          </a:blip>
+          <a:stretch>
+            <a:fillRect/>
+          </a:stretch>
+        </p:blipFill>
+        <p:spPr>
+          <a:xfrm>
+            <a:off x="4876800" y="2253300"/>
+            <a:ext cx="3928533" cy="2209800"/>
+          </a:xfrm>
+          <a:prstGeom prst="rect">
+            <a:avLst/>
+          </a:prstGeom>
+        </p:spPr>
+      </p:pic>
     </p:spTree>
     <p:extLst>
       <p:ext uri="{BB962C8B-B14F-4D97-AF65-F5344CB8AC3E}">
@@ -19684,6 +19946,42 @@
           </a:p>
         </p:txBody>
       </p:sp>
+      <p:pic>
+        <p:nvPicPr>
+          <p:cNvPr id="3" name="Picture 2">
+            <a:extLst>
+              <a:ext uri="{FF2B5EF4-FFF2-40B4-BE49-F238E27FC236}">
+                <a16:creationId xmlns:a16="http://schemas.microsoft.com/office/drawing/2014/main" id="{DD538A0A-8448-7B6A-59A0-9363C1CE9F37}"/>
+              </a:ext>
+            </a:extLst>
+          </p:cNvPr>
+          <p:cNvPicPr>
+            <a:picLocks noChangeAspect="1"/>
+          </p:cNvPicPr>
+          <p:nvPr/>
+        </p:nvPicPr>
+        <p:blipFill>
+          <a:blip r:embed="rId4" cstate="print">
+            <a:extLst>
+              <a:ext uri="{28A0092B-C50C-407E-A947-70E740481C1C}">
+                <a14:useLocalDpi xmlns:a14="http://schemas.microsoft.com/office/drawing/2010/main" val="0"/>
+              </a:ext>
+            </a:extLst>
+          </a:blip>
+          <a:stretch>
+            <a:fillRect/>
+          </a:stretch>
+        </p:blipFill>
+        <p:spPr>
+          <a:xfrm>
+            <a:off x="5181600" y="2343150"/>
+            <a:ext cx="3572997" cy="2009811"/>
+          </a:xfrm>
+          <a:prstGeom prst="rect">
+            <a:avLst/>
+          </a:prstGeom>
+        </p:spPr>
+      </p:pic>
     </p:spTree>
     <p:extLst>
       <p:ext uri="{BB962C8B-B14F-4D97-AF65-F5344CB8AC3E}">
@@ -23197,7 +23495,7 @@
 
 <file path=ppt/webextensions/taskpanes.xml><?xml version="1.0" encoding="utf-8"?>
 <wetp:taskpanes xmlns:wetp="http://schemas.microsoft.com/office/webextensions/taskpanes/2010/11">
-  <wetp:taskpane dockstate="right" visibility="0" width="350" row="3">
+  <wetp:taskpane dockstate="right" visibility="0" width="525" row="0">
     <wetp:webextensionref xmlns:r="http://schemas.openxmlformats.org/officeDocument/2006/relationships" r:id="rId1"/>
   </wetp:taskpane>
 </wetp:taskpanes>

--- a/SelfHelp-2026.pptx
+++ b/SelfHelp-2026.pptx
@@ -722,23 +722,13 @@
           <a:lstStyle/>
           <a:p>
             <a:r>
-              <a:t>Some of you may remember that we presented SelfHelp here in 2021. Today I want to briefly reconnect to that earlier version and show what has changed since then.</a:t>
-            </a:r>
-          </a:p>
-          <a:p>
-            <a:endParaRPr/>
-          </a:p>
-          <a:p>
-            <a:r>
-              <a:t>The main point is simple. SelfHelp is no longer just a website system. It has grown into a platform for complete digital programs.</a:t>
-            </a:r>
-          </a:p>
-          <a:p>
-            <a:endParaRPr/>
-          </a:p>
-          <a:p>
-            <a:r>
-              <a:t>That is the story behind this presentation. We started with separate digital pieces. We are moving toward one connected program.</a:t>
+              <a:t>Some of you may remember that we presented SelfHelp here in 2021. Today I want to build on that and show how much the platform has changed since then.</a:t>
+            </a:r>
+          </a:p>
+          <a:p/>
+          <a:p>
+            <a:r>
+              <a:t>The main message is simple. SelfHelp is no longer just a website system. It has grown into a platform for complete digital programs.</a:t>
             </a:r>
           </a:p>
         </p:txBody>
@@ -864,28 +854,22 @@
               <a:t>It is also useful to compare SelfHelp with other open and self-hosted tools.</a:t>
             </a:r>
           </a:p>
-          <a:p>
-            <a:endParaRPr/>
-          </a:p>
+          <a:p/>
           <a:p>
             <a:r>
               <a:t>LimeSurvey is very strong for surveys. JATOS and formr are strong for online studies. Moodle is strong for learning delivery.</a:t>
             </a:r>
           </a:p>
-          <a:p>
-            <a:endParaRPr/>
-          </a:p>
+          <a:p/>
           <a:p>
             <a:r>
               <a:t>SelfHelp is strongest in a different kind of case. It becomes most valuable when content, data collection, workflows, mobile use, permissions, and AI all need to stay connected in one locally controlled system.</a:t>
             </a:r>
           </a:p>
-          <a:p>
-            <a:endParaRPr/>
-          </a:p>
-          <a:p>
-            <a:r>
-              <a:t>So the difference is not that it replaces every other tool. The difference is that it connects more of the full program in one place.</a:t>
+          <a:p/>
+          <a:p>
+            <a:r>
+              <a:t>So the point is not that it replaces every other tool. The point is that it connects more of the full program in one place.</a:t>
             </a:r>
           </a:p>
         </p:txBody>
@@ -1020,90 +1004,37 @@
           <a:lstStyle/>
           <a:p>
             <a:r>
-              <a:rPr dirty="0"/>
               <a:t>To close, I would summarize it like this.</a:t>
             </a:r>
           </a:p>
-          <a:p>
-            <a:endParaRPr dirty="0"/>
-          </a:p>
-          <a:p>
-            <a:r>
-              <a:rPr dirty="0" err="1"/>
-              <a:t>SelfHelp</a:t>
-            </a:r>
-            <a:r>
-              <a:rPr dirty="0"/>
-              <a:t> gives us one platform where content, assessments, workflows, mobile interaction, and AI can all be part of the same program. That is already useful today.</a:t>
-            </a:r>
-          </a:p>
-          <a:p>
-            <a:endParaRPr dirty="0"/>
-          </a:p>
-          <a:p>
-            <a:r>
-              <a:rPr dirty="0"/>
-              <a:t>At the same time, </a:t>
-            </a:r>
-            <a:r>
-              <a:rPr dirty="0" err="1"/>
-              <a:t>SelfHelp</a:t>
-            </a:r>
-            <a:r>
-              <a:rPr dirty="0"/>
-              <a:t> 2 is already well underway. It is not just a redesign. The goal is to make the platform more structured, easier to extend, and faster to build with.</a:t>
-            </a:r>
-          </a:p>
-          <a:p>
-            <a:endParaRPr dirty="0"/>
-          </a:p>
-          <a:p>
-            <a:r>
-              <a:rPr dirty="0"/>
+          <a:p/>
+          <a:p>
+            <a:r>
+              <a:t>SelfHelp gives us one platform where content, assessments, workflows, mobile interaction, and AI can all be part of the same program. That is already useful today.</a:t>
+            </a:r>
+          </a:p>
+          <a:p/>
+          <a:p>
+            <a:r>
+              <a:t>At the same time, SelfHelp 2 is already well underway. It is not just a redesign. The goal is to make the platform more structured, easier to extend, and faster to build with.</a:t>
+            </a:r>
+          </a:p>
+          <a:p/>
+          <a:p>
+            <a:r>
               <a:t>One especially promising next step is LLM-supported content creation. That could reduce the time spent building website structure by hand and give teams more time for the actual study design, content quality, and assessment logic.</a:t>
             </a:r>
           </a:p>
-          <a:p>
-            <a:endParaRPr dirty="0"/>
-          </a:p>
-          <a:p>
-            <a:r>
-              <a:rPr dirty="0"/>
-              <a:t>And if </a:t>
-            </a:r>
-            <a:r>
-              <a:rPr lang="en-US" dirty="0"/>
-              <a:t>you</a:t>
-            </a:r>
-            <a:r>
-              <a:rPr dirty="0"/>
-              <a:t> see value in this direction, especially in the local university AI infrastructure behind it, </a:t>
-            </a:r>
-            <a:r>
-              <a:rPr lang="en-US" dirty="0"/>
-              <a:t>please support ID with “letter of support” so that the local LLM infrastructure can be turned into a permanent Uni service.</a:t>
-            </a:r>
-            <a:endParaRPr dirty="0"/>
-          </a:p>
-          <a:p>
-            <a:endParaRPr dirty="0"/>
-          </a:p>
-          <a:p>
-            <a:r>
-              <a:rPr lang="en-US" dirty="0"/>
-              <a:t>At the end, t</a:t>
-            </a:r>
-            <a:r>
-              <a:rPr dirty="0"/>
-              <a:t>he main message I would leave you with is this: </a:t>
-            </a:r>
-            <a:r>
-              <a:rPr dirty="0" err="1"/>
-              <a:t>SelfHelp</a:t>
-            </a:r>
-            <a:r>
-              <a:rPr dirty="0"/>
-              <a:t> moves us from isolated digital tools to continuous digital programs.</a:t>
+          <a:p/>
+          <a:p>
+            <a:r>
+              <a:t>And if you see value in this direction, especially in the local university AI infrastructure behind it, I would really encourage you to support ID with a short letter of support so that this local LLM service can become a permanent university service.</a:t>
+            </a:r>
+          </a:p>
+          <a:p/>
+          <a:p>
+            <a:r>
+              <a:t>The main message I would leave you with is this: SelfHelp moves us from isolated digital tools to continuous digital programs.</a:t>
             </a:r>
           </a:p>
         </p:txBody>
@@ -1219,7 +1150,9 @@
           <a:bodyPr/>
           <a:lstStyle/>
           <a:p>
-            <a:endParaRPr lang="LID4096" dirty="0"/>
+            <a:r>
+              <a:t>Thank you very much. I am happy to take questions.</a:t>
+            </a:r>
           </a:p>
         </p:txBody>
       </p:sp>
@@ -1271,6 +1204,76 @@
         <p14:creationId xmlns:p14="http://schemas.microsoft.com/office/powerpoint/2010/main" val="1219076293"/>
       </p:ext>
     </p:extLst>
+  </p:cSld>
+  <p:clrMapOvr>
+    <a:masterClrMapping/>
+  </p:clrMapOvr>
+</p:notes>
+</file>
+
+<file path=ppt/notesSlides/notesSlide13.xml><?xml version="1.0" encoding="utf-8"?>
+<p:notes xmlns:a="http://schemas.openxmlformats.org/drawingml/2006/main" xmlns:p="http://schemas.openxmlformats.org/presentationml/2006/main" xmlns:r="http://schemas.openxmlformats.org/officeDocument/2006/relationships">
+  <p:cSld>
+    <p:spTree>
+      <p:nvGrpSpPr>
+        <p:cNvPr id="1" name=""/>
+        <p:cNvGrpSpPr/>
+        <p:nvPr/>
+      </p:nvGrpSpPr>
+      <p:grpSpPr>
+        <a:xfrm>
+          <a:off x="0" y="0"/>
+          <a:ext cx="0" cy="0"/>
+          <a:chOff x="0" y="0"/>
+          <a:chExt cx="0" cy="0"/>
+        </a:xfrm>
+      </p:grpSpPr>
+      <p:sp>
+        <p:nvSpPr>
+          <p:cNvPr id="2" name="Slide Image Placeholder 1"/>
+          <p:cNvSpPr>
+            <a:spLocks noGrp="1"/>
+          </p:cNvSpPr>
+          <p:nvPr>
+            <p:ph type="sldImg" idx="2"/>
+          </p:nvPr>
+        </p:nvSpPr>
+        <p:spPr/>
+      </p:sp>
+      <p:sp>
+        <p:nvSpPr>
+          <p:cNvPr id="3" name="Notes Placeholder 2"/>
+          <p:cNvSpPr>
+            <a:spLocks noGrp="1"/>
+          </p:cNvSpPr>
+          <p:nvPr>
+            <p:ph type="body" idx="3" sz="quarter"/>
+          </p:nvPr>
+        </p:nvSpPr>
+        <p:spPr/>
+        <p:txBody>
+          <a:bodyPr/>
+          <a:lstStyle/>
+          <a:p>
+            <a:r>
+              <a:t>Today I want to show how SelfHelp has evolved since our 2021 presentation and why it now works as a platform for complete digital programs.</a:t>
+            </a:r>
+          </a:p>
+        </p:txBody>
+      </p:sp>
+      <p:sp>
+        <p:nvSpPr>
+          <p:cNvPr id="4" name="Slide Number Placeholder 3"/>
+          <p:cNvSpPr>
+            <a:spLocks noGrp="1"/>
+          </p:cNvSpPr>
+          <p:nvPr>
+            <p:ph type="sldNum" idx="5" sz="quarter"/>
+          </p:nvPr>
+        </p:nvSpPr>
+        <p:spPr/>
+      </p:sp>
+    </p:spTree>
   </p:cSld>
   <p:clrMapOvr>
     <a:masterClrMapping/>
@@ -1326,20 +1329,16 @@
               <a:t>If I had to explain SelfHelp in one sentence, I would call it a platform for running digital programs.</a:t>
             </a:r>
           </a:p>
-          <a:p>
-            <a:endParaRPr/>
-          </a:p>
-          <a:p>
-            <a:r>
-              <a:t>What makes it useful is that it brings together things that are often split apart. Content, assessments, workflows, and mobile delivery can all live in the same system.</a:t>
-            </a:r>
-          </a:p>
-          <a:p>
-            <a:endParaRPr/>
-          </a:p>
-          <a:p>
-            <a:r>
-              <a:t>That makes projects easier to build and easier to adapt later. And because it can run under university control, it also fits settings where governance and data protection matter.</a:t>
+          <a:p/>
+          <a:p>
+            <a:r>
+              <a:t>What makes it useful is that it brings together pieces that are often separate. Content, assessments, workflows, and mobile delivery can all live in the same system.</a:t>
+            </a:r>
+          </a:p>
+          <a:p/>
+          <a:p>
+            <a:r>
+              <a:t>That makes projects easier to build, easier to adapt, and easier to manage over time. And because it can run under university control, it also fits settings where governance and data protection matter.</a:t>
             </a:r>
           </a:p>
         </p:txBody>
@@ -1444,51 +1443,25 @@
           <a:lstStyle/>
           <a:p>
             <a:r>
-              <a:rPr dirty="0"/>
-              <a:t>The easiest way to understand the evolution is to look at where the emphasis was at each stage.</a:t>
-            </a:r>
-          </a:p>
-          <a:p>
-            <a:endParaRPr dirty="0"/>
-          </a:p>
-          <a:p>
-            <a:r>
-              <a:rPr dirty="0"/>
-              <a:t>In 2021, </a:t>
-            </a:r>
-            <a:r>
-              <a:rPr dirty="0" err="1"/>
-              <a:t>SelfHelp</a:t>
-            </a:r>
-            <a:r>
-              <a:rPr dirty="0"/>
-              <a:t> was mainly presented as a platform for self-help and research websites. By 2023, it had become more modular and more practical to run, with better page structure, scheduling, and mobile integration.</a:t>
-            </a:r>
-          </a:p>
-          <a:p>
-            <a:endParaRPr dirty="0"/>
-          </a:p>
-          <a:p>
-            <a:r>
-              <a:rPr dirty="0"/>
-              <a:t>Then from 2024 to 2026, a lot of the progress happened in the foundation. The data model became stronger, workflows became more systematic, permissions became clearer, and two-factor authentication was added.</a:t>
-            </a:r>
-          </a:p>
-          <a:p>
-            <a:endParaRPr dirty="0"/>
-          </a:p>
-          <a:p>
-            <a:r>
-              <a:rPr dirty="0"/>
-              <a:t>On top of that stronger base, AI could then be added in a more serious way. So the overall direction is clear. </a:t>
-            </a:r>
-            <a:r>
-              <a:rPr dirty="0" err="1"/>
-              <a:t>SelfHelp</a:t>
-            </a:r>
-            <a:r>
-              <a:rPr dirty="0"/>
-              <a:t> started with content publishing, and it is now moving toward structured digital program delivery.</a:t>
+              <a:t>The easiest way to understand the evolution is to look at what changed at each stage.</a:t>
+            </a:r>
+          </a:p>
+          <a:p/>
+          <a:p>
+            <a:r>
+              <a:t>In 2021, SelfHelp was mainly presented as a platform for self-help and research websites. By 2023, it had become more modular and more practical to run, with better page structure, scheduling, and mobile integration.</a:t>
+            </a:r>
+          </a:p>
+          <a:p/>
+          <a:p>
+            <a:r>
+              <a:t>Then from 2024 to 2026, a lot of the progress happened underneath the surface. The data model became stronger, workflows became more systematic, permissions became clearer, and two-factor authentication was added.</a:t>
+            </a:r>
+          </a:p>
+          <a:p/>
+          <a:p>
+            <a:r>
+              <a:t>Once that base became stronger, it made sense to add AI in a more serious way. So the direction is clear. SelfHelp started as a content platform, and it is now growing into a platform for structured digital programs.</a:t>
             </a:r>
           </a:p>
         </p:txBody>
@@ -1593,51 +1566,25 @@
           <a:lstStyle/>
           <a:p>
             <a:r>
-              <a:rPr dirty="0"/>
               <a:t>What this means in practice is that a team can take an idea and turn it into a full user journey.</a:t>
             </a:r>
           </a:p>
-          <a:p>
-            <a:endParaRPr dirty="0"/>
-          </a:p>
-          <a:p>
-            <a:r>
-              <a:rPr dirty="0"/>
-              <a:t>With </a:t>
-            </a:r>
-            <a:r>
-              <a:rPr dirty="0" err="1"/>
-              <a:t>SelfHelp</a:t>
-            </a:r>
-            <a:r>
-              <a:rPr dirty="0"/>
-              <a:t>, you can build a complete digital program: onboarding, content, structured assessments, reminders, and follow-up. That can all happen in one environment instead of being spread across disconnected tools.</a:t>
-            </a:r>
-          </a:p>
-          <a:p>
-            <a:endParaRPr dirty="0"/>
-          </a:p>
-          <a:p>
-            <a:r>
-              <a:rPr dirty="0"/>
-              <a:t>A person can move through the program step by step. The system can adapt content, timing, and next actions based on role, group, language, or previous activity.</a:t>
-            </a:r>
-          </a:p>
-          <a:p>
-            <a:endParaRPr dirty="0"/>
-          </a:p>
-          <a:p>
-            <a:r>
-              <a:rPr dirty="0"/>
-              <a:t>So the value is not only that </a:t>
-            </a:r>
-            <a:r>
-              <a:rPr dirty="0" err="1"/>
-              <a:t>SelfHelp</a:t>
-            </a:r>
-            <a:r>
-              <a:rPr dirty="0"/>
-              <a:t> can publish content. It can run a process over time.</a:t>
+          <a:p/>
+          <a:p>
+            <a:r>
+              <a:t>With SelfHelp, you can build a complete digital program: onboarding, content, structured assessments, reminders, and follow-up. That can all happen in one environment instead of being spread across disconnected tools.</a:t>
+            </a:r>
+          </a:p>
+          <a:p/>
+          <a:p>
+            <a:r>
+              <a:t>People can move through the program step by step. The system can adjust content, timing, and next actions based on role, group, language, or what already happened before.</a:t>
+            </a:r>
+          </a:p>
+          <a:p/>
+          <a:p>
+            <a:r>
+              <a:t>So the value is not only that SelfHelp can publish content. It can run a process over time.</a:t>
             </a:r>
           </a:p>
         </p:txBody>
@@ -1742,43 +1689,25 @@
           <a:lstStyle/>
           <a:p>
             <a:r>
-              <a:rPr dirty="0"/>
-              <a:t>Another important part of the story is how </a:t>
-            </a:r>
-            <a:r>
-              <a:rPr dirty="0" err="1"/>
-              <a:t>SelfHelp</a:t>
-            </a:r>
-            <a:r>
-              <a:rPr dirty="0"/>
-              <a:t> grows.</a:t>
-            </a:r>
-          </a:p>
-          <a:p>
-            <a:endParaRPr dirty="0"/>
-          </a:p>
-          <a:p>
-            <a:r>
-              <a:rPr dirty="0"/>
+              <a:t>Another important part of the story is how SelfHelp grows.</a:t>
+            </a:r>
+          </a:p>
+          <a:p/>
+          <a:p>
+            <a:r>
               <a:t>It grows through plugins. That means new capabilities can be added without rebuilding the core platform every time.</a:t>
             </a:r>
           </a:p>
-          <a:p>
-            <a:endParaRPr dirty="0"/>
-          </a:p>
-          <a:p>
-            <a:r>
-              <a:rPr dirty="0"/>
-              <a:t>Some of those plugins are especially important in the background. External authentication helps it fit institutional access models. Lab.js brings browser-based experiments into the same environment. R integration supports more advanced analysis. And custom formulas allow scoring and derived values directly in the system.</a:t>
-            </a:r>
-          </a:p>
-          <a:p>
-            <a:endParaRPr dirty="0"/>
-          </a:p>
-          <a:p>
-            <a:r>
-              <a:rPr dirty="0"/>
-              <a:t>On top of that foundation, there are also newer plugins that are more visible to users. Those are the three I want to focus on next.</a:t>
+          <a:p/>
+          <a:p>
+            <a:r>
+              <a:t>Some of those plugins matter mainly in the background. External authentication helps with institutional access. Lab.js brings browser-based experiments into the same environment. R integration supports more advanced analysis. And custom formulas allow scoring and derived values directly in the system.</a:t>
+            </a:r>
+          </a:p>
+          <a:p/>
+          <a:p>
+            <a:r>
+              <a:t>On top of that, there are also newer plugins that are much more visible from the user side. Those are the three I want to show next.</a:t>
             </a:r>
           </a:p>
         </p:txBody>
@@ -1901,63 +1830,25 @@
           <a:lstStyle/>
           <a:p>
             <a:r>
-              <a:rPr dirty="0" err="1"/>
-              <a:t>SurveyJS</a:t>
-            </a:r>
-            <a:r>
-              <a:rPr dirty="0"/>
-              <a:t> is a good example of how </a:t>
-            </a:r>
-            <a:r>
-              <a:rPr dirty="0" err="1"/>
-              <a:t>SelfHelp</a:t>
-            </a:r>
-            <a:r>
-              <a:rPr dirty="0"/>
-              <a:t> has moved beyond simple forms.</a:t>
-            </a:r>
-          </a:p>
-          <a:p>
-            <a:endParaRPr dirty="0"/>
-          </a:p>
-          <a:p>
-            <a:r>
-              <a:rPr dirty="0"/>
+              <a:t>SurveyJS is a good example of how SelfHelp has moved beyond simple forms.</a:t>
+            </a:r>
+          </a:p>
+          <a:p/>
+          <a:p>
+            <a:r>
               <a:t>The key point is not only that surveys can be created. The key point is that they can be managed properly inside the platform. They can be versioned, scheduled, edited later, and connected to dashboards.</a:t>
             </a:r>
           </a:p>
-          <a:p>
-            <a:endParaRPr dirty="0"/>
-          </a:p>
-          <a:p>
-            <a:r>
-              <a:rPr dirty="0"/>
-              <a:t>That improves data quality and makes repeated assessment much easier to handle. It also makes the whole assessment layer more flexible, because responses can include files and voice recordings.</a:t>
-            </a:r>
-          </a:p>
-          <a:p>
-            <a:endParaRPr dirty="0"/>
-          </a:p>
-          <a:p>
-            <a:r>
-              <a:rPr dirty="0"/>
-              <a:t>So </a:t>
-            </a:r>
-            <a:r>
-              <a:rPr dirty="0" err="1"/>
-              <a:t>SurveyJS</a:t>
-            </a:r>
-            <a:r>
-              <a:rPr dirty="0"/>
-              <a:t> turns </a:t>
-            </a:r>
-            <a:r>
-              <a:rPr dirty="0" err="1"/>
-              <a:t>SelfHelp</a:t>
-            </a:r>
-            <a:r>
-              <a:rPr dirty="0"/>
-              <a:t> into a much stronger environment for structured data collection over time.</a:t>
+          <a:p/>
+          <a:p>
+            <a:r>
+              <a:t>That improves data quality and makes repeated assessment much easier to handle. It also makes the assessment layer more flexible, because responses can include files and voice recordings.</a:t>
+            </a:r>
+          </a:p>
+          <a:p/>
+          <a:p>
+            <a:r>
+              <a:t>So SurveyJS makes SelfHelp a much stronger environment for structured data collection over time.</a:t>
             </a:r>
           </a:p>
         </p:txBody>
@@ -2092,35 +1983,25 @@
           <a:lstStyle/>
           <a:p>
             <a:r>
-              <a:rPr dirty="0"/>
               <a:t>The LLM plugin should not be understood as just a chatbot. It is better understood as a controlled and testable AI component.</a:t>
             </a:r>
           </a:p>
-          <a:p>
-            <a:endParaRPr dirty="0"/>
-          </a:p>
-          <a:p>
-            <a:r>
-              <a:rPr dirty="0"/>
-              <a:t>It lets us place a purpose-built assistant inside a page, with a clear role and a clear context. An important part of that is prompt management. Prompts can be versioned, tested, replayed, and improved before they are used in a real setting.</a:t>
-            </a:r>
-          </a:p>
-          <a:p>
-            <a:endParaRPr dirty="0"/>
-          </a:p>
-          <a:p>
-            <a:r>
-              <a:rPr dirty="0"/>
+          <a:p/>
+          <a:p>
+            <a:r>
+              <a:t>It lets us place a purpose-built assistant inside a page, with a clear role and a clear context. A very important part of that is prompt management. Prompts can be versioned, tested, replayed, and improved before they are used in a real setting.</a:t>
+            </a:r>
+          </a:p>
+          <a:p/>
+          <a:p>
+            <a:r>
               <a:t>The plugin can also work with files, images, and voice input. And it can return either normal conversation or structured JSON output, including formats that fit OpenAI-style workflows.</a:t>
             </a:r>
           </a:p>
-          <a:p>
-            <a:endParaRPr dirty="0"/>
-          </a:p>
-          <a:p>
-            <a:r>
-              <a:rPr dirty="0"/>
-              <a:t>That matters because it makes AI output easier to connect back into the platform in a controlled way. And at the moment, we are using the university's local LLM infrastructure, which means the interaction stays inside the university environment.</a:t>
+          <a:p/>
+          <a:p>
+            <a:r>
+              <a:t>That matters because it makes AI output easier to connect back into the platform in a controlled way. And right now, we are using the university's local LLM infrastructure, which means the interaction stays inside the university environment.</a:t>
             </a:r>
           </a:p>
         </p:txBody>
@@ -2255,34 +2136,24 @@
           <a:lstStyle/>
           <a:p>
             <a:r>
-              <a:rPr dirty="0"/>
               <a:t>The therapy chat plugin is probably the most distinctive part of the current platform.</a:t>
             </a:r>
           </a:p>
-          <a:p>
-            <a:endParaRPr dirty="0"/>
-          </a:p>
-          <a:p>
-            <a:r>
-              <a:rPr dirty="0"/>
+          <a:p/>
+          <a:p>
+            <a:r>
               <a:t>The key idea is supervised communication. A user can interact with AI, but therapists remain present through their own dashboard. They can review conversations, step in directly, write notes, generate drafts, and manage risk status.</a:t>
             </a:r>
           </a:p>
-          <a:p>
-            <a:endParaRPr dirty="0"/>
-          </a:p>
-          <a:p>
-            <a:r>
-              <a:rPr dirty="0"/>
+          <a:p/>
+          <a:p>
+            <a:r>
               <a:t>It is also important that this can run without AI. That means the same framework can support both AI-assisted and human-only communication.</a:t>
             </a:r>
           </a:p>
-          <a:p>
-            <a:endParaRPr dirty="0"/>
-          </a:p>
-          <a:p>
-            <a:r>
-              <a:rPr dirty="0"/>
+          <a:p/>
+          <a:p>
+            <a:r>
               <a:t>That makes it interesting not only for service delivery, but also for research, because different communication models can be compared in the same environment.</a:t>
             </a:r>
           </a:p>
@@ -2421,25 +2292,19 @@
               <a:t>The mobile app matters because digital programs rarely stay on the desktop.</a:t>
             </a:r>
           </a:p>
-          <a:p>
-            <a:endParaRPr/>
-          </a:p>
+          <a:p/>
           <a:p>
             <a:r>
               <a:t>SelfHelp already has a mobile frontend that uses the same platform logic. Surveys, AI chat, therapy chat, notifications, camera input, and microphone input are already part of that picture.</a:t>
             </a:r>
           </a:p>
-          <a:p>
-            <a:endParaRPr/>
-          </a:p>
+          <a:p/>
           <a:p>
             <a:r>
               <a:t>That makes repeated interaction much easier in real life. People can respond, upload, reflect, or interact when it fits their day, not only when they are sitting at a computer.</a:t>
             </a:r>
           </a:p>
-          <a:p>
-            <a:endParaRPr/>
-          </a:p>
+          <a:p/>
           <a:p>
             <a:r>
               <a:t>So the same program can stay with the user across different situations, instead of being split across separate tools.</a:t>
